--- a/content/05-teaching-resources/slides/core/11-the-business-context.pptx
+++ b/content/05-teaching-resources/slides/core/11-the-business-context.pptx
@@ -10,11 +10,17 @@
     <p:sldId id="258" r:id="rId9"/>
     <p:sldId id="259" r:id="rId10"/>
     <p:sldId id="260" r:id="rId11"/>
-    <p:sldId id="261" r:id="rId12"/>
-    <p:sldId id="262" r:id="rId13"/>
+    <p:sldId id="261" r:id="rId13"/>
+    <p:sldId id="262" r:id="rId14"/>
     <p:sldId id="263" r:id="rId15"/>
     <p:sldId id="264" r:id="rId16"/>
     <p:sldId id="265" r:id="rId17"/>
+    <p:sldId id="266" r:id="rId18"/>
+    <p:sldId id="267" r:id="rId19"/>
+    <p:sldId id="268" r:id="rId20"/>
+    <p:sldId id="269" r:id="rId21"/>
+    <p:sldId id="270" r:id="rId22"/>
+    <p:sldId id="271" r:id="rId23"/>
   </p:sldIdLst>
   <p:sldSz cx="12191695" cy="6858000" type="screen4x3"/>
   <p:notesSz cx="6858000" cy="9144000"/>
@@ -511,7 +517,22 @@
           <a:lstStyle/>
           <a:p>
             <a:r>
-              <a:t>Give students a few minutes to answer on mini whiteboards or paper, then reveal the answers on the next slide.</a:t>
+              <a:t>Answers:</a:t>
+            </a:r>
+          </a:p>
+          <a:p>
+            <a:r>
+              <a:t>1. Business to consumer.</a:t>
+            </a:r>
+          </a:p>
+          <a:p>
+            <a:r>
+              <a:t>2. External.</a:t>
+            </a:r>
+          </a:p>
+          <a:p>
+            <a:r>
+              <a:t>3. The voluntary or charity sector.</a:t>
             </a:r>
           </a:p>
         </p:txBody>
@@ -581,7 +602,22 @@
           <a:lstStyle/>
           <a:p>
             <a:r>
-              <a:t>Talk through any answers the class found difficult.</a:t>
+              <a:t>Answers:</a:t>
+            </a:r>
+          </a:p>
+          <a:p>
+            <a:r>
+              <a:t>1. Something that frustrates users, e.g. slow response.</a:t>
+            </a:r>
+          </a:p>
+          <a:p>
+            <a:r>
+              <a:t>2. Software must work with other existing and future systems.</a:t>
+            </a:r>
+          </a:p>
+          <a:p>
+            <a:r>
+              <a:t>3. Any two: functionality, accessibility, compatibility, availability, support.</a:t>
             </a:r>
           </a:p>
         </p:txBody>
@@ -607,6 +643,231 @@
 </file>
 
 <file path=ppt/notesSlides/notesSlide3.xml><?xml version="1.0" encoding="utf-8"?>
+<p:notes xmlns:a="http://schemas.openxmlformats.org/drawingml/2006/main" xmlns:p="http://schemas.openxmlformats.org/presentationml/2006/main" xmlns:r="http://schemas.openxmlformats.org/officeDocument/2006/relationships">
+  <p:cSld>
+    <p:spTree>
+      <p:nvGrpSpPr>
+        <p:cNvPr id="1" name=""/>
+        <p:cNvGrpSpPr/>
+        <p:nvPr/>
+      </p:nvGrpSpPr>
+      <p:grpSpPr>
+        <a:xfrm>
+          <a:off x="0" y="0"/>
+          <a:ext cx="0" cy="0"/>
+          <a:chOff x="0" y="0"/>
+          <a:chExt cx="0" cy="0"/>
+        </a:xfrm>
+      </p:grpSpPr>
+      <p:sp>
+        <p:nvSpPr>
+          <p:cNvPr id="2" name="Slide Image Placeholder 1"/>
+          <p:cNvSpPr>
+            <a:spLocks noGrp="1"/>
+          </p:cNvSpPr>
+          <p:nvPr>
+            <p:ph type="sldImg" idx="2"/>
+          </p:nvPr>
+        </p:nvSpPr>
+        <p:spPr/>
+      </p:sp>
+      <p:sp>
+        <p:nvSpPr>
+          <p:cNvPr id="3" name="Notes Placeholder 2"/>
+          <p:cNvSpPr>
+            <a:spLocks noGrp="1"/>
+          </p:cNvSpPr>
+          <p:nvPr>
+            <p:ph type="body" idx="3" sz="quarter"/>
+          </p:nvPr>
+        </p:nvSpPr>
+        <p:spPr/>
+        <p:txBody>
+          <a:bodyPr/>
+          <a:lstStyle/>
+          <a:p>
+            <a:r>
+              <a:t>Answers:</a:t>
+            </a:r>
+          </a:p>
+          <a:p>
+            <a:r>
+              <a:t>1. E.g. breaches, non-compliance, exclusion, failure.</a:t>
+            </a:r>
+          </a:p>
+          <a:p>
+            <a:r>
+              <a:t>2. E.g. fines, legal action, reputational damage.</a:t>
+            </a:r>
+          </a:p>
+          <a:p>
+            <a:r>
+              <a:t>3. Secure, tested, accessible code.</a:t>
+            </a:r>
+          </a:p>
+        </p:txBody>
+      </p:sp>
+      <p:sp>
+        <p:nvSpPr>
+          <p:cNvPr id="4" name="Slide Number Placeholder 3"/>
+          <p:cNvSpPr>
+            <a:spLocks noGrp="1"/>
+          </p:cNvSpPr>
+          <p:nvPr>
+            <p:ph type="sldNum" idx="5" sz="quarter"/>
+          </p:nvPr>
+        </p:nvSpPr>
+        <p:spPr/>
+      </p:sp>
+    </p:spTree>
+  </p:cSld>
+  <p:clrMapOvr>
+    <a:masterClrMapping/>
+  </p:clrMapOvr>
+</p:notes>
+</file>
+
+<file path=ppt/notesSlides/notesSlide4.xml><?xml version="1.0" encoding="utf-8"?>
+<p:notes xmlns:a="http://schemas.openxmlformats.org/drawingml/2006/main" xmlns:p="http://schemas.openxmlformats.org/presentationml/2006/main" xmlns:r="http://schemas.openxmlformats.org/officeDocument/2006/relationships">
+  <p:cSld>
+    <p:spTree>
+      <p:nvGrpSpPr>
+        <p:cNvPr id="1" name=""/>
+        <p:cNvGrpSpPr/>
+        <p:nvPr/>
+      </p:nvGrpSpPr>
+      <p:grpSpPr>
+        <a:xfrm>
+          <a:off x="0" y="0"/>
+          <a:ext cx="0" cy="0"/>
+          <a:chOff x="0" y="0"/>
+          <a:chExt cx="0" cy="0"/>
+        </a:xfrm>
+      </p:grpSpPr>
+      <p:sp>
+        <p:nvSpPr>
+          <p:cNvPr id="2" name="Slide Image Placeholder 1"/>
+          <p:cNvSpPr>
+            <a:spLocks noGrp="1"/>
+          </p:cNvSpPr>
+          <p:nvPr>
+            <p:ph type="sldImg" idx="2"/>
+          </p:nvPr>
+        </p:nvSpPr>
+        <p:spPr/>
+      </p:sp>
+      <p:sp>
+        <p:nvSpPr>
+          <p:cNvPr id="3" name="Notes Placeholder 2"/>
+          <p:cNvSpPr>
+            <a:spLocks noGrp="1"/>
+          </p:cNvSpPr>
+          <p:nvPr>
+            <p:ph type="body" idx="3" sz="quarter"/>
+          </p:nvPr>
+        </p:nvSpPr>
+        <p:spPr/>
+        <p:txBody>
+          <a:bodyPr/>
+          <a:lstStyle/>
+          <a:p>
+            <a:r>
+              <a:t>Give students a few minutes to answer on mini whiteboards or paper, then reveal the answers on the next slide.</a:t>
+            </a:r>
+          </a:p>
+        </p:txBody>
+      </p:sp>
+      <p:sp>
+        <p:nvSpPr>
+          <p:cNvPr id="4" name="Slide Number Placeholder 3"/>
+          <p:cNvSpPr>
+            <a:spLocks noGrp="1"/>
+          </p:cNvSpPr>
+          <p:nvPr>
+            <p:ph type="sldNum" idx="5" sz="quarter"/>
+          </p:nvPr>
+        </p:nvSpPr>
+        <p:spPr/>
+      </p:sp>
+    </p:spTree>
+  </p:cSld>
+  <p:clrMapOvr>
+    <a:masterClrMapping/>
+  </p:clrMapOvr>
+</p:notes>
+</file>
+
+<file path=ppt/notesSlides/notesSlide5.xml><?xml version="1.0" encoding="utf-8"?>
+<p:notes xmlns:a="http://schemas.openxmlformats.org/drawingml/2006/main" xmlns:p="http://schemas.openxmlformats.org/presentationml/2006/main" xmlns:r="http://schemas.openxmlformats.org/officeDocument/2006/relationships">
+  <p:cSld>
+    <p:spTree>
+      <p:nvGrpSpPr>
+        <p:cNvPr id="1" name=""/>
+        <p:cNvGrpSpPr/>
+        <p:nvPr/>
+      </p:nvGrpSpPr>
+      <p:grpSpPr>
+        <a:xfrm>
+          <a:off x="0" y="0"/>
+          <a:ext cx="0" cy="0"/>
+          <a:chOff x="0" y="0"/>
+          <a:chExt cx="0" cy="0"/>
+        </a:xfrm>
+      </p:grpSpPr>
+      <p:sp>
+        <p:nvSpPr>
+          <p:cNvPr id="2" name="Slide Image Placeholder 1"/>
+          <p:cNvSpPr>
+            <a:spLocks noGrp="1"/>
+          </p:cNvSpPr>
+          <p:nvPr>
+            <p:ph type="sldImg" idx="2"/>
+          </p:nvPr>
+        </p:nvSpPr>
+        <p:spPr/>
+      </p:sp>
+      <p:sp>
+        <p:nvSpPr>
+          <p:cNvPr id="3" name="Notes Placeholder 2"/>
+          <p:cNvSpPr>
+            <a:spLocks noGrp="1"/>
+          </p:cNvSpPr>
+          <p:nvPr>
+            <p:ph type="body" idx="3" sz="quarter"/>
+          </p:nvPr>
+        </p:nvSpPr>
+        <p:spPr/>
+        <p:txBody>
+          <a:bodyPr/>
+          <a:lstStyle/>
+          <a:p>
+            <a:r>
+              <a:t>Talk through any answers the class found difficult.</a:t>
+            </a:r>
+          </a:p>
+        </p:txBody>
+      </p:sp>
+      <p:sp>
+        <p:nvSpPr>
+          <p:cNvPr id="4" name="Slide Number Placeholder 3"/>
+          <p:cNvSpPr>
+            <a:spLocks noGrp="1"/>
+          </p:cNvSpPr>
+          <p:nvPr>
+            <p:ph type="sldNum" idx="5" sz="quarter"/>
+          </p:nvPr>
+        </p:nvSpPr>
+        <p:spPr/>
+      </p:sp>
+    </p:spTree>
+  </p:cSld>
+  <p:clrMapOvr>
+    <a:masterClrMapping/>
+  </p:clrMapOvr>
+</p:notes>
+</file>
+
+<file path=ppt/notesSlides/notesSlide6.xml><?xml version="1.0" encoding="utf-8"?>
 <p:notes xmlns:a="http://schemas.openxmlformats.org/drawingml/2006/main" xmlns:p="http://schemas.openxmlformats.org/presentationml/2006/main" xmlns:r="http://schemas.openxmlformats.org/officeDocument/2006/relationships">
   <p:cSld>
     <p:spTree>
@@ -3982,6 +4243,3344 @@
     <p:bg>
       <p:bgPr>
         <a:solidFill>
+          <a:srgbClr val="FFFFFF"/>
+        </a:solidFill>
+        <a:effectLst/>
+      </p:bgPr>
+    </p:bg>
+    <p:spTree>
+      <p:nvGrpSpPr>
+        <p:cNvPr id="1" name=""/>
+        <p:cNvGrpSpPr/>
+        <p:nvPr/>
+      </p:nvGrpSpPr>
+      <p:grpSpPr/>
+      <p:sp>
+        <p:nvSpPr>
+          <p:cNvPr id="2" name="TextBox 1"/>
+          <p:cNvSpPr txBox="1"/>
+          <p:nvPr/>
+        </p:nvSpPr>
+        <p:spPr>
+          <a:xfrm>
+            <a:off x="548640" y="320040"/>
+            <a:ext cx="11094415" cy="274320"/>
+          </a:xfrm>
+          <a:prstGeom prst="rect">
+            <a:avLst/>
+          </a:prstGeom>
+          <a:noFill/>
+        </p:spPr>
+        <p:txBody>
+          <a:bodyPr wrap="square" anchor="t" lIns="0" rIns="0" tIns="0" bIns="0"/>
+          <a:lstStyle/>
+          <a:p>
+            <a:pPr algn="l"/>
+            <a:r>
+              <a:rPr sz="1100" b="1" i="0">
+                <a:solidFill>
+                  <a:srgbClr val="54595D"/>
+                </a:solidFill>
+                <a:latin typeface="Calibri"/>
+              </a:rPr>
+              <a:t>CORE COMPONENT  ·  Core Paper 2</a:t>
+            </a:r>
+          </a:p>
+        </p:txBody>
+      </p:sp>
+      <p:sp>
+        <p:nvSpPr>
+          <p:cNvPr id="3" name="TextBox 2"/>
+          <p:cNvSpPr txBox="1"/>
+          <p:nvPr/>
+        </p:nvSpPr>
+        <p:spPr>
+          <a:xfrm>
+            <a:off x="548640" y="566928"/>
+            <a:ext cx="11094415" cy="822960"/>
+          </a:xfrm>
+          <a:prstGeom prst="rect">
+            <a:avLst/>
+          </a:prstGeom>
+          <a:noFill/>
+        </p:spPr>
+        <p:txBody>
+          <a:bodyPr wrap="square" anchor="ctr" lIns="0" rIns="0" tIns="0" bIns="0"/>
+          <a:lstStyle/>
+          <a:p>
+            <a:pPr algn="l"/>
+            <a:r>
+              <a:rPr sz="3200" b="1" i="0">
+                <a:solidFill>
+                  <a:srgbClr val="03306E"/>
+                </a:solidFill>
+                <a:latin typeface="Cambria"/>
+              </a:rPr>
+              <a:t>Risks and impacts</a:t>
+            </a:r>
+          </a:p>
+        </p:txBody>
+      </p:sp>
+      <p:sp>
+        <p:nvSpPr>
+          <p:cNvPr id="4" name="TextBox 3"/>
+          <p:cNvSpPr txBox="1"/>
+          <p:nvPr/>
+        </p:nvSpPr>
+        <p:spPr>
+          <a:xfrm>
+            <a:off x="548640" y="6446520"/>
+            <a:ext cx="8229600" cy="274320"/>
+          </a:xfrm>
+          <a:prstGeom prst="rect">
+            <a:avLst/>
+          </a:prstGeom>
+          <a:noFill/>
+        </p:spPr>
+        <p:txBody>
+          <a:bodyPr wrap="square" anchor="t" lIns="0" rIns="0" tIns="0" bIns="0"/>
+          <a:lstStyle/>
+          <a:p>
+            <a:pPr algn="l"/>
+            <a:r>
+              <a:rPr sz="1000" b="0" i="0">
+                <a:solidFill>
+                  <a:srgbClr val="54595D"/>
+                </a:solidFill>
+                <a:latin typeface="Calibri"/>
+              </a:rPr>
+              <a:t>Digital Software Development T Level  ·  The Business Context</a:t>
+            </a:r>
+          </a:p>
+        </p:txBody>
+      </p:sp>
+      <p:sp>
+        <p:nvSpPr>
+          <p:cNvPr id="5" name="TextBox 4"/>
+          <p:cNvSpPr txBox="1"/>
+          <p:nvPr/>
+        </p:nvSpPr>
+        <p:spPr>
+          <a:xfrm>
+            <a:off x="10728655" y="6446520"/>
+            <a:ext cx="914400" cy="274320"/>
+          </a:xfrm>
+          <a:prstGeom prst="rect">
+            <a:avLst/>
+          </a:prstGeom>
+          <a:noFill/>
+        </p:spPr>
+        <p:txBody>
+          <a:bodyPr wrap="square" anchor="t" lIns="0" rIns="0" tIns="0" bIns="0"/>
+          <a:lstStyle/>
+          <a:p>
+            <a:pPr algn="r"/>
+            <a:r>
+              <a:rPr sz="1000" b="0" i="0">
+                <a:solidFill>
+                  <a:srgbClr val="54595D"/>
+                </a:solidFill>
+                <a:latin typeface="Calibri"/>
+              </a:rPr>
+              <a:t>10</a:t>
+            </a:r>
+          </a:p>
+        </p:txBody>
+      </p:sp>
+      <p:sp>
+        <p:nvSpPr>
+          <p:cNvPr id="6" name="TextBox 5"/>
+          <p:cNvSpPr txBox="1"/>
+          <p:nvPr/>
+        </p:nvSpPr>
+        <p:spPr>
+          <a:xfrm>
+            <a:off x="548640" y="1554480"/>
+            <a:ext cx="6720840" cy="4617720"/>
+          </a:xfrm>
+          <a:prstGeom prst="rect">
+            <a:avLst/>
+          </a:prstGeom>
+          <a:noFill/>
+        </p:spPr>
+        <p:txBody>
+          <a:bodyPr wrap="square" lIns="0" rIns="0" tIns="0" bIns="0">
+            <a:spAutoFit/>
+          </a:bodyPr>
+          <a:lstStyle/>
+          <a:p>
+            <a:pPr>
+              <a:spcAft>
+                <a:spcPts val="1320"/>
+              </a:spcAft>
+            </a:pPr>
+            <a:r>
+              <a:rPr sz="2200" b="1">
+                <a:solidFill>
+                  <a:srgbClr val="202122"/>
+                </a:solidFill>
+                <a:latin typeface="Calibri"/>
+              </a:rPr>
+              <a:t>Relying on software brings risks:</a:t>
+            </a:r>
+            <a:r>
+              <a:rPr sz="2200" b="0">
+                <a:solidFill>
+                  <a:srgbClr val="202122"/>
+                </a:solidFill>
+                <a:latin typeface="Calibri"/>
+              </a:rPr>
+              <a:t> security and privacy breaches, breaking laws or regulations, excluding users through bias or poor design, being overtaken by rival technology, and systems failing or not being fit for purpose.</a:t>
+            </a:r>
+          </a:p>
+          <a:p>
+            <a:pPr>
+              <a:spcAft>
+                <a:spcPts val="1320"/>
+              </a:spcAft>
+            </a:pPr>
+            <a:r>
+              <a:rPr sz="2200" b="1">
+                <a:solidFill>
+                  <a:srgbClr val="202122"/>
+                </a:solidFill>
+                <a:latin typeface="Calibri"/>
+              </a:rPr>
+              <a:t>The impacts can be serious:</a:t>
+            </a:r>
+            <a:r>
+              <a:rPr sz="2200" b="0">
+                <a:solidFill>
+                  <a:srgbClr val="202122"/>
+                </a:solidFill>
+                <a:latin typeface="Calibri"/>
+              </a:rPr>
+              <a:t> legal action, fines, reputational damage, losing a licence to operate and losing business.</a:t>
+            </a:r>
+          </a:p>
+          <a:p>
+            <a:pPr>
+              <a:spcAft>
+                <a:spcPts val="1320"/>
+              </a:spcAft>
+            </a:pPr>
+            <a:r>
+              <a:rPr sz="2200" b="0">
+                <a:solidFill>
+                  <a:srgbClr val="202122"/>
+                </a:solidFill>
+                <a:latin typeface="Calibri"/>
+              </a:rPr>
+              <a:t>Developers reduce these risks through secure, tested, accessible, well-designed code.</a:t>
+            </a:r>
+          </a:p>
+        </p:txBody>
+      </p:sp>
+      <p:sp>
+        <p:nvSpPr>
+          <p:cNvPr id="7" name="Rounded Rectangle 6"/>
+          <p:cNvSpPr/>
+          <p:nvPr/>
+        </p:nvSpPr>
+        <p:spPr>
+          <a:xfrm>
+            <a:off x="7772400" y="1554480"/>
+            <a:ext cx="3867912" cy="4526280"/>
+          </a:xfrm>
+          <a:prstGeom prst="roundRect">
+            <a:avLst>
+              <a:gd name="adj" fmla="val 8000"/>
+            </a:avLst>
+          </a:prstGeom>
+          <a:solidFill>
+            <a:srgbClr val="03306E"/>
+          </a:solidFill>
+          <a:ln>
+            <a:noFill/>
+          </a:ln>
+          <a:effectLst/>
+        </p:spPr>
+        <p:style>
+          <a:lnRef idx="1">
+            <a:schemeClr val="accent1"/>
+          </a:lnRef>
+          <a:fillRef idx="3">
+            <a:schemeClr val="accent1"/>
+          </a:fillRef>
+          <a:effectRef idx="2">
+            <a:schemeClr val="accent1"/>
+          </a:effectRef>
+          <a:fontRef idx="minor">
+            <a:schemeClr val="lt1"/>
+          </a:fontRef>
+        </p:style>
+        <p:txBody>
+          <a:bodyPr rtlCol="0" anchor="ctr"/>
+          <a:lstStyle/>
+          <a:p/>
+        </p:txBody>
+      </p:sp>
+      <p:sp>
+        <p:nvSpPr>
+          <p:cNvPr id="8" name="Oval 7"/>
+          <p:cNvSpPr/>
+          <p:nvPr/>
+        </p:nvSpPr>
+        <p:spPr>
+          <a:xfrm>
+            <a:off x="8046720" y="1828800"/>
+            <a:ext cx="548640" cy="548640"/>
+          </a:xfrm>
+          <a:prstGeom prst="ellipse">
+            <a:avLst/>
+          </a:prstGeom>
+          <a:solidFill>
+            <a:srgbClr val="F2B705"/>
+          </a:solidFill>
+          <a:ln>
+            <a:noFill/>
+          </a:ln>
+          <a:effectLst/>
+        </p:spPr>
+        <p:style>
+          <a:lnRef idx="1">
+            <a:schemeClr val="accent1"/>
+          </a:lnRef>
+          <a:fillRef idx="3">
+            <a:schemeClr val="accent1"/>
+          </a:fillRef>
+          <a:effectRef idx="2">
+            <a:schemeClr val="accent1"/>
+          </a:effectRef>
+          <a:fontRef idx="minor">
+            <a:schemeClr val="lt1"/>
+          </a:fontRef>
+        </p:style>
+        <p:txBody>
+          <a:bodyPr rtlCol="0" anchor="ctr" lIns="0" rIns="0" tIns="0" bIns="0"/>
+          <a:lstStyle/>
+          <a:p>
+            <a:pPr algn="ctr"/>
+            <a:r>
+              <a:rPr sz="1300" b="1">
+                <a:solidFill>
+                  <a:srgbClr val="202122"/>
+                </a:solidFill>
+                <a:latin typeface="Calibri"/>
+              </a:rPr>
+              <a:t>e.g.</a:t>
+            </a:r>
+          </a:p>
+        </p:txBody>
+      </p:sp>
+      <p:sp>
+        <p:nvSpPr>
+          <p:cNvPr id="9" name="TextBox 8"/>
+          <p:cNvSpPr txBox="1"/>
+          <p:nvPr/>
+        </p:nvSpPr>
+        <p:spPr>
+          <a:xfrm>
+            <a:off x="8046720" y="2560320"/>
+            <a:ext cx="3291840" cy="365760"/>
+          </a:xfrm>
+          <a:prstGeom prst="rect">
+            <a:avLst/>
+          </a:prstGeom>
+          <a:noFill/>
+        </p:spPr>
+        <p:txBody>
+          <a:bodyPr wrap="square" anchor="t" lIns="0" rIns="0" tIns="0" bIns="0"/>
+          <a:lstStyle/>
+          <a:p>
+            <a:pPr algn="l"/>
+            <a:r>
+              <a:rPr sz="1300" b="1" i="0">
+                <a:solidFill>
+                  <a:srgbClr val="A9C8F0"/>
+                </a:solidFill>
+                <a:latin typeface="Calibri"/>
+              </a:rPr>
+              <a:t>EXAMPLE</a:t>
+            </a:r>
+          </a:p>
+        </p:txBody>
+      </p:sp>
+      <p:sp>
+        <p:nvSpPr>
+          <p:cNvPr id="10" name="TextBox 9"/>
+          <p:cNvSpPr txBox="1"/>
+          <p:nvPr/>
+        </p:nvSpPr>
+        <p:spPr>
+          <a:xfrm>
+            <a:off x="8046720" y="2971800"/>
+            <a:ext cx="3291840" cy="2971800"/>
+          </a:xfrm>
+          <a:prstGeom prst="rect">
+            <a:avLst/>
+          </a:prstGeom>
+          <a:noFill/>
+        </p:spPr>
+        <p:txBody>
+          <a:bodyPr wrap="square" anchor="t" lIns="0" rIns="0" tIns="0" bIns="0"/>
+          <a:lstStyle/>
+          <a:p>
+            <a:pPr algn="l"/>
+            <a:r>
+              <a:rPr sz="1900" b="0" i="0">
+                <a:solidFill>
+                  <a:srgbClr val="FFFFFF"/>
+                </a:solidFill>
+                <a:latin typeface="Cambria"/>
+              </a:rPr>
+              <a:t>A retailer's website leaks card details through an SQL injection flaw: fines, lawsuits and lost customers.</a:t>
+            </a:r>
+          </a:p>
+        </p:txBody>
+      </p:sp>
+    </p:spTree>
+  </p:cSld>
+  <p:clrMapOvr>
+    <a:masterClrMapping/>
+  </p:clrMapOvr>
+</p:sld>
+</file>
+
+<file path=ppt/slides/slide11.xml><?xml version="1.0" encoding="utf-8"?>
+<p:sld xmlns:a="http://schemas.openxmlformats.org/drawingml/2006/main" xmlns:p="http://schemas.openxmlformats.org/presentationml/2006/main" xmlns:r="http://schemas.openxmlformats.org/officeDocument/2006/relationships">
+  <p:cSld>
+    <p:bg>
+      <p:bgPr>
+        <a:solidFill>
+          <a:srgbClr val="FFFFFF"/>
+        </a:solidFill>
+        <a:effectLst/>
+      </p:bgPr>
+    </p:bg>
+    <p:spTree>
+      <p:nvGrpSpPr>
+        <p:cNvPr id="1" name=""/>
+        <p:cNvGrpSpPr/>
+        <p:nvPr/>
+      </p:nvGrpSpPr>
+      <p:grpSpPr/>
+      <p:sp>
+        <p:nvSpPr>
+          <p:cNvPr id="2" name="TextBox 1"/>
+          <p:cNvSpPr txBox="1"/>
+          <p:nvPr/>
+        </p:nvSpPr>
+        <p:spPr>
+          <a:xfrm>
+            <a:off x="548640" y="320040"/>
+            <a:ext cx="11094415" cy="274320"/>
+          </a:xfrm>
+          <a:prstGeom prst="rect">
+            <a:avLst/>
+          </a:prstGeom>
+          <a:noFill/>
+        </p:spPr>
+        <p:txBody>
+          <a:bodyPr wrap="square" anchor="t" lIns="0" rIns="0" tIns="0" bIns="0"/>
+          <a:lstStyle/>
+          <a:p>
+            <a:pPr algn="l"/>
+            <a:r>
+              <a:rPr sz="1100" b="1" i="0">
+                <a:solidFill>
+                  <a:srgbClr val="54595D"/>
+                </a:solidFill>
+                <a:latin typeface="Calibri"/>
+              </a:rPr>
+              <a:t>CORE COMPONENT  ·  Core Paper 2</a:t>
+            </a:r>
+          </a:p>
+        </p:txBody>
+      </p:sp>
+      <p:sp>
+        <p:nvSpPr>
+          <p:cNvPr id="3" name="TextBox 2"/>
+          <p:cNvSpPr txBox="1"/>
+          <p:nvPr/>
+        </p:nvSpPr>
+        <p:spPr>
+          <a:xfrm>
+            <a:off x="548640" y="566928"/>
+            <a:ext cx="11094415" cy="822960"/>
+          </a:xfrm>
+          <a:prstGeom prst="rect">
+            <a:avLst/>
+          </a:prstGeom>
+          <a:noFill/>
+        </p:spPr>
+        <p:txBody>
+          <a:bodyPr wrap="square" anchor="ctr" lIns="0" rIns="0" tIns="0" bIns="0"/>
+          <a:lstStyle/>
+          <a:p>
+            <a:pPr algn="l"/>
+            <a:r>
+              <a:rPr sz="3200" b="1" i="0">
+                <a:solidFill>
+                  <a:srgbClr val="03306E"/>
+                </a:solidFill>
+                <a:latin typeface="Cambria"/>
+              </a:rPr>
+              <a:t>Risks and impacts</a:t>
+            </a:r>
+          </a:p>
+        </p:txBody>
+      </p:sp>
+      <p:sp>
+        <p:nvSpPr>
+          <p:cNvPr id="4" name="TextBox 3"/>
+          <p:cNvSpPr txBox="1"/>
+          <p:nvPr/>
+        </p:nvSpPr>
+        <p:spPr>
+          <a:xfrm>
+            <a:off x="548640" y="6446520"/>
+            <a:ext cx="8229600" cy="274320"/>
+          </a:xfrm>
+          <a:prstGeom prst="rect">
+            <a:avLst/>
+          </a:prstGeom>
+          <a:noFill/>
+        </p:spPr>
+        <p:txBody>
+          <a:bodyPr wrap="square" anchor="t" lIns="0" rIns="0" tIns="0" bIns="0"/>
+          <a:lstStyle/>
+          <a:p>
+            <a:pPr algn="l"/>
+            <a:r>
+              <a:rPr sz="1000" b="0" i="0">
+                <a:solidFill>
+                  <a:srgbClr val="54595D"/>
+                </a:solidFill>
+                <a:latin typeface="Calibri"/>
+              </a:rPr>
+              <a:t>Digital Software Development T Level  ·  The Business Context</a:t>
+            </a:r>
+          </a:p>
+        </p:txBody>
+      </p:sp>
+      <p:sp>
+        <p:nvSpPr>
+          <p:cNvPr id="5" name="TextBox 4"/>
+          <p:cNvSpPr txBox="1"/>
+          <p:nvPr/>
+        </p:nvSpPr>
+        <p:spPr>
+          <a:xfrm>
+            <a:off x="10728655" y="6446520"/>
+            <a:ext cx="914400" cy="274320"/>
+          </a:xfrm>
+          <a:prstGeom prst="rect">
+            <a:avLst/>
+          </a:prstGeom>
+          <a:noFill/>
+        </p:spPr>
+        <p:txBody>
+          <a:bodyPr wrap="square" anchor="t" lIns="0" rIns="0" tIns="0" bIns="0"/>
+          <a:lstStyle/>
+          <a:p>
+            <a:pPr algn="r"/>
+            <a:r>
+              <a:rPr sz="1000" b="0" i="0">
+                <a:solidFill>
+                  <a:srgbClr val="54595D"/>
+                </a:solidFill>
+                <a:latin typeface="Calibri"/>
+              </a:rPr>
+              <a:t>11</a:t>
+            </a:r>
+          </a:p>
+        </p:txBody>
+      </p:sp>
+      <p:sp>
+        <p:nvSpPr>
+          <p:cNvPr id="6" name="Rounded Rectangle 5"/>
+          <p:cNvSpPr/>
+          <p:nvPr/>
+        </p:nvSpPr>
+        <p:spPr>
+          <a:xfrm>
+            <a:off x="548640" y="1600200"/>
+            <a:ext cx="5364327" cy="640080"/>
+          </a:xfrm>
+          <a:prstGeom prst="roundRect">
+            <a:avLst>
+              <a:gd name="adj" fmla="val 15000"/>
+            </a:avLst>
+          </a:prstGeom>
+          <a:solidFill>
+            <a:srgbClr val="03306E"/>
+          </a:solidFill>
+          <a:ln>
+            <a:noFill/>
+          </a:ln>
+          <a:effectLst/>
+        </p:spPr>
+        <p:style>
+          <a:lnRef idx="1">
+            <a:schemeClr val="accent1"/>
+          </a:lnRef>
+          <a:fillRef idx="3">
+            <a:schemeClr val="accent1"/>
+          </a:fillRef>
+          <a:effectRef idx="2">
+            <a:schemeClr val="accent1"/>
+          </a:effectRef>
+          <a:fontRef idx="minor">
+            <a:schemeClr val="lt1"/>
+          </a:fontRef>
+        </p:style>
+        <p:txBody>
+          <a:bodyPr rtlCol="0" anchor="ctr"/>
+          <a:lstStyle/>
+          <a:p/>
+        </p:txBody>
+      </p:sp>
+      <p:sp>
+        <p:nvSpPr>
+          <p:cNvPr id="7" name="TextBox 6"/>
+          <p:cNvSpPr txBox="1"/>
+          <p:nvPr/>
+        </p:nvSpPr>
+        <p:spPr>
+          <a:xfrm>
+            <a:off x="777240" y="1600200"/>
+            <a:ext cx="4907127" cy="640080"/>
+          </a:xfrm>
+          <a:prstGeom prst="rect">
+            <a:avLst/>
+          </a:prstGeom>
+          <a:noFill/>
+        </p:spPr>
+        <p:txBody>
+          <a:bodyPr wrap="square" anchor="ctr" lIns="0" rIns="0" tIns="0" bIns="0"/>
+          <a:lstStyle/>
+          <a:p>
+            <a:pPr algn="l"/>
+            <a:r>
+              <a:rPr sz="2000" b="1" i="0">
+                <a:solidFill>
+                  <a:srgbClr val="FFFFFF"/>
+                </a:solidFill>
+                <a:latin typeface="Calibri"/>
+              </a:rPr>
+              <a:t>Risks</a:t>
+            </a:r>
+          </a:p>
+        </p:txBody>
+      </p:sp>
+      <p:sp>
+        <p:nvSpPr>
+          <p:cNvPr id="8" name="Rounded Rectangle 7"/>
+          <p:cNvSpPr/>
+          <p:nvPr/>
+        </p:nvSpPr>
+        <p:spPr>
+          <a:xfrm>
+            <a:off x="548640" y="2377440"/>
+            <a:ext cx="5364327" cy="3794760"/>
+          </a:xfrm>
+          <a:prstGeom prst="roundRect">
+            <a:avLst>
+              <a:gd name="adj" fmla="val 4000"/>
+            </a:avLst>
+          </a:prstGeom>
+          <a:solidFill>
+            <a:srgbClr val="EAF3FF"/>
+          </a:solidFill>
+          <a:ln>
+            <a:noFill/>
+          </a:ln>
+          <a:effectLst/>
+        </p:spPr>
+        <p:style>
+          <a:lnRef idx="1">
+            <a:schemeClr val="accent1"/>
+          </a:lnRef>
+          <a:fillRef idx="3">
+            <a:schemeClr val="accent1"/>
+          </a:fillRef>
+          <a:effectRef idx="2">
+            <a:schemeClr val="accent1"/>
+          </a:effectRef>
+          <a:fontRef idx="minor">
+            <a:schemeClr val="lt1"/>
+          </a:fontRef>
+        </p:style>
+        <p:txBody>
+          <a:bodyPr rtlCol="0" anchor="ctr"/>
+          <a:lstStyle/>
+          <a:p/>
+        </p:txBody>
+      </p:sp>
+      <p:sp>
+        <p:nvSpPr>
+          <p:cNvPr id="9" name="TextBox 8"/>
+          <p:cNvSpPr txBox="1"/>
+          <p:nvPr/>
+        </p:nvSpPr>
+        <p:spPr>
+          <a:xfrm>
+            <a:off x="822959" y="2606040"/>
+            <a:ext cx="4815687" cy="3337560"/>
+          </a:xfrm>
+          <a:prstGeom prst="rect">
+            <a:avLst/>
+          </a:prstGeom>
+          <a:noFill/>
+        </p:spPr>
+        <p:txBody>
+          <a:bodyPr wrap="square" lIns="0" rIns="0" tIns="0" bIns="0">
+            <a:spAutoFit/>
+          </a:bodyPr>
+          <a:lstStyle/>
+          <a:p>
+            <a:pPr marL="274320" indent="-274320">
+              <a:spcAft>
+                <a:spcPts val="945"/>
+              </a:spcAft>
+              <a:buClr>
+                <a:srgbClr val="0645AD"/>
+              </a:buClr>
+              <a:buFont typeface="Arial"/>
+              <a:buChar char="•"/>
+            </a:pPr>
+            <a:r>
+              <a:rPr sz="2100" b="0">
+                <a:solidFill>
+                  <a:srgbClr val="202122"/>
+                </a:solidFill>
+                <a:latin typeface="Calibri"/>
+              </a:rPr>
+              <a:t>Security and privacy breaches</a:t>
+            </a:r>
+          </a:p>
+          <a:p>
+            <a:pPr marL="274320" indent="-274320">
+              <a:spcAft>
+                <a:spcPts val="945"/>
+              </a:spcAft>
+              <a:buClr>
+                <a:srgbClr val="0645AD"/>
+              </a:buClr>
+              <a:buFont typeface="Arial"/>
+              <a:buChar char="•"/>
+            </a:pPr>
+            <a:r>
+              <a:rPr sz="2100" b="0">
+                <a:solidFill>
+                  <a:srgbClr val="202122"/>
+                </a:solidFill>
+                <a:latin typeface="Calibri"/>
+              </a:rPr>
+              <a:t>Legal or regulatory non-compliance</a:t>
+            </a:r>
+          </a:p>
+          <a:p>
+            <a:pPr marL="274320" indent="-274320">
+              <a:spcAft>
+                <a:spcPts val="945"/>
+              </a:spcAft>
+              <a:buClr>
+                <a:srgbClr val="0645AD"/>
+              </a:buClr>
+              <a:buFont typeface="Arial"/>
+              <a:buChar char="•"/>
+            </a:pPr>
+            <a:r>
+              <a:rPr sz="2100" b="0">
+                <a:solidFill>
+                  <a:srgbClr val="202122"/>
+                </a:solidFill>
+                <a:latin typeface="Calibri"/>
+              </a:rPr>
+              <a:t>Excluding users through bias or poor UX</a:t>
+            </a:r>
+          </a:p>
+          <a:p>
+            <a:pPr marL="274320" indent="-274320">
+              <a:spcAft>
+                <a:spcPts val="945"/>
+              </a:spcAft>
+              <a:buClr>
+                <a:srgbClr val="0645AD"/>
+              </a:buClr>
+              <a:buFont typeface="Arial"/>
+              <a:buChar char="•"/>
+            </a:pPr>
+            <a:r>
+              <a:rPr sz="2100" b="0">
+                <a:solidFill>
+                  <a:srgbClr val="202122"/>
+                </a:solidFill>
+                <a:latin typeface="Calibri"/>
+              </a:rPr>
+              <a:t>Rival technologies</a:t>
+            </a:r>
+          </a:p>
+          <a:p>
+            <a:pPr marL="274320" indent="-274320">
+              <a:spcAft>
+                <a:spcPts val="945"/>
+              </a:spcAft>
+              <a:buClr>
+                <a:srgbClr val="0645AD"/>
+              </a:buClr>
+              <a:buFont typeface="Arial"/>
+              <a:buChar char="•"/>
+            </a:pPr>
+            <a:r>
+              <a:rPr sz="2100" b="0">
+                <a:solidFill>
+                  <a:srgbClr val="202122"/>
+                </a:solidFill>
+                <a:latin typeface="Calibri"/>
+              </a:rPr>
+              <a:t>Over-reliance, failure or systems unfit for purpose</a:t>
+            </a:r>
+          </a:p>
+        </p:txBody>
+      </p:sp>
+      <p:sp>
+        <p:nvSpPr>
+          <p:cNvPr id="10" name="Rounded Rectangle 9"/>
+          <p:cNvSpPr/>
+          <p:nvPr/>
+        </p:nvSpPr>
+        <p:spPr>
+          <a:xfrm>
+            <a:off x="6278727" y="1600200"/>
+            <a:ext cx="5364327" cy="640080"/>
+          </a:xfrm>
+          <a:prstGeom prst="roundRect">
+            <a:avLst>
+              <a:gd name="adj" fmla="val 15000"/>
+            </a:avLst>
+          </a:prstGeom>
+          <a:solidFill>
+            <a:srgbClr val="0645AD"/>
+          </a:solidFill>
+          <a:ln>
+            <a:noFill/>
+          </a:ln>
+          <a:effectLst/>
+        </p:spPr>
+        <p:style>
+          <a:lnRef idx="1">
+            <a:schemeClr val="accent1"/>
+          </a:lnRef>
+          <a:fillRef idx="3">
+            <a:schemeClr val="accent1"/>
+          </a:fillRef>
+          <a:effectRef idx="2">
+            <a:schemeClr val="accent1"/>
+          </a:effectRef>
+          <a:fontRef idx="minor">
+            <a:schemeClr val="lt1"/>
+          </a:fontRef>
+        </p:style>
+        <p:txBody>
+          <a:bodyPr rtlCol="0" anchor="ctr"/>
+          <a:lstStyle/>
+          <a:p/>
+        </p:txBody>
+      </p:sp>
+      <p:sp>
+        <p:nvSpPr>
+          <p:cNvPr id="11" name="TextBox 10"/>
+          <p:cNvSpPr txBox="1"/>
+          <p:nvPr/>
+        </p:nvSpPr>
+        <p:spPr>
+          <a:xfrm>
+            <a:off x="6507327" y="1600200"/>
+            <a:ext cx="4907127" cy="640080"/>
+          </a:xfrm>
+          <a:prstGeom prst="rect">
+            <a:avLst/>
+          </a:prstGeom>
+          <a:noFill/>
+        </p:spPr>
+        <p:txBody>
+          <a:bodyPr wrap="square" anchor="ctr" lIns="0" rIns="0" tIns="0" bIns="0"/>
+          <a:lstStyle/>
+          <a:p>
+            <a:pPr algn="l"/>
+            <a:r>
+              <a:rPr sz="2000" b="1" i="0">
+                <a:solidFill>
+                  <a:srgbClr val="FFFFFF"/>
+                </a:solidFill>
+                <a:latin typeface="Calibri"/>
+              </a:rPr>
+              <a:t>Impacts</a:t>
+            </a:r>
+          </a:p>
+        </p:txBody>
+      </p:sp>
+      <p:sp>
+        <p:nvSpPr>
+          <p:cNvPr id="12" name="Rounded Rectangle 11"/>
+          <p:cNvSpPr/>
+          <p:nvPr/>
+        </p:nvSpPr>
+        <p:spPr>
+          <a:xfrm>
+            <a:off x="6278727" y="2377440"/>
+            <a:ext cx="5364327" cy="3794760"/>
+          </a:xfrm>
+          <a:prstGeom prst="roundRect">
+            <a:avLst>
+              <a:gd name="adj" fmla="val 4000"/>
+            </a:avLst>
+          </a:prstGeom>
+          <a:solidFill>
+            <a:srgbClr val="EAF3FF"/>
+          </a:solidFill>
+          <a:ln>
+            <a:noFill/>
+          </a:ln>
+          <a:effectLst/>
+        </p:spPr>
+        <p:style>
+          <a:lnRef idx="1">
+            <a:schemeClr val="accent1"/>
+          </a:lnRef>
+          <a:fillRef idx="3">
+            <a:schemeClr val="accent1"/>
+          </a:fillRef>
+          <a:effectRef idx="2">
+            <a:schemeClr val="accent1"/>
+          </a:effectRef>
+          <a:fontRef idx="minor">
+            <a:schemeClr val="lt1"/>
+          </a:fontRef>
+        </p:style>
+        <p:txBody>
+          <a:bodyPr rtlCol="0" anchor="ctr"/>
+          <a:lstStyle/>
+          <a:p/>
+        </p:txBody>
+      </p:sp>
+      <p:sp>
+        <p:nvSpPr>
+          <p:cNvPr id="13" name="TextBox 12"/>
+          <p:cNvSpPr txBox="1"/>
+          <p:nvPr/>
+        </p:nvSpPr>
+        <p:spPr>
+          <a:xfrm>
+            <a:off x="6553047" y="2606040"/>
+            <a:ext cx="4815687" cy="3337560"/>
+          </a:xfrm>
+          <a:prstGeom prst="rect">
+            <a:avLst/>
+          </a:prstGeom>
+          <a:noFill/>
+        </p:spPr>
+        <p:txBody>
+          <a:bodyPr wrap="square" lIns="0" rIns="0" tIns="0" bIns="0">
+            <a:spAutoFit/>
+          </a:bodyPr>
+          <a:lstStyle/>
+          <a:p>
+            <a:pPr marL="274320" indent="-274320">
+              <a:spcAft>
+                <a:spcPts val="990"/>
+              </a:spcAft>
+              <a:buClr>
+                <a:srgbClr val="0645AD"/>
+              </a:buClr>
+              <a:buFont typeface="Arial"/>
+              <a:buChar char="•"/>
+            </a:pPr>
+            <a:r>
+              <a:rPr sz="2200" b="0">
+                <a:solidFill>
+                  <a:srgbClr val="202122"/>
+                </a:solidFill>
+                <a:latin typeface="Calibri"/>
+              </a:rPr>
+              <a:t>Legal action</a:t>
+            </a:r>
+          </a:p>
+          <a:p>
+            <a:pPr marL="274320" indent="-274320">
+              <a:spcAft>
+                <a:spcPts val="990"/>
+              </a:spcAft>
+              <a:buClr>
+                <a:srgbClr val="0645AD"/>
+              </a:buClr>
+              <a:buFont typeface="Arial"/>
+              <a:buChar char="•"/>
+            </a:pPr>
+            <a:r>
+              <a:rPr sz="2200" b="0">
+                <a:solidFill>
+                  <a:srgbClr val="202122"/>
+                </a:solidFill>
+                <a:latin typeface="Calibri"/>
+              </a:rPr>
+              <a:t>Fines</a:t>
+            </a:r>
+          </a:p>
+          <a:p>
+            <a:pPr marL="274320" indent="-274320">
+              <a:spcAft>
+                <a:spcPts val="990"/>
+              </a:spcAft>
+              <a:buClr>
+                <a:srgbClr val="0645AD"/>
+              </a:buClr>
+              <a:buFont typeface="Arial"/>
+              <a:buChar char="•"/>
+            </a:pPr>
+            <a:r>
+              <a:rPr sz="2200" b="0">
+                <a:solidFill>
+                  <a:srgbClr val="202122"/>
+                </a:solidFill>
+                <a:latin typeface="Calibri"/>
+              </a:rPr>
+              <a:t>Reputational damage</a:t>
+            </a:r>
+          </a:p>
+          <a:p>
+            <a:pPr marL="274320" indent="-274320">
+              <a:spcAft>
+                <a:spcPts val="990"/>
+              </a:spcAft>
+              <a:buClr>
+                <a:srgbClr val="0645AD"/>
+              </a:buClr>
+              <a:buFont typeface="Arial"/>
+              <a:buChar char="•"/>
+            </a:pPr>
+            <a:r>
+              <a:rPr sz="2200" b="0">
+                <a:solidFill>
+                  <a:srgbClr val="202122"/>
+                </a:solidFill>
+                <a:latin typeface="Calibri"/>
+              </a:rPr>
+              <a:t>Loss of licence to practise</a:t>
+            </a:r>
+          </a:p>
+          <a:p>
+            <a:pPr marL="274320" indent="-274320">
+              <a:spcAft>
+                <a:spcPts val="990"/>
+              </a:spcAft>
+              <a:buClr>
+                <a:srgbClr val="0645AD"/>
+              </a:buClr>
+              <a:buFont typeface="Arial"/>
+              <a:buChar char="•"/>
+            </a:pPr>
+            <a:r>
+              <a:rPr sz="2200" b="0">
+                <a:solidFill>
+                  <a:srgbClr val="202122"/>
+                </a:solidFill>
+                <a:latin typeface="Calibri"/>
+              </a:rPr>
+              <a:t>Lost business</a:t>
+            </a:r>
+          </a:p>
+        </p:txBody>
+      </p:sp>
+    </p:spTree>
+  </p:cSld>
+  <p:clrMapOvr>
+    <a:masterClrMapping/>
+  </p:clrMapOvr>
+</p:sld>
+</file>
+
+<file path=ppt/slides/slide12.xml><?xml version="1.0" encoding="utf-8"?>
+<p:sld xmlns:a="http://schemas.openxmlformats.org/drawingml/2006/main" xmlns:p="http://schemas.openxmlformats.org/presentationml/2006/main" xmlns:r="http://schemas.openxmlformats.org/officeDocument/2006/relationships">
+  <p:cSld>
+    <p:bg>
+      <p:bgPr>
+        <a:solidFill>
+          <a:srgbClr val="FFFFFF"/>
+        </a:solidFill>
+        <a:effectLst/>
+      </p:bgPr>
+    </p:bg>
+    <p:spTree>
+      <p:nvGrpSpPr>
+        <p:cNvPr id="1" name=""/>
+        <p:cNvGrpSpPr/>
+        <p:nvPr/>
+      </p:nvGrpSpPr>
+      <p:grpSpPr/>
+      <p:sp>
+        <p:nvSpPr>
+          <p:cNvPr id="2" name="TextBox 1"/>
+          <p:cNvSpPr txBox="1"/>
+          <p:nvPr/>
+        </p:nvSpPr>
+        <p:spPr>
+          <a:xfrm>
+            <a:off x="548640" y="320040"/>
+            <a:ext cx="11094415" cy="274320"/>
+          </a:xfrm>
+          <a:prstGeom prst="rect">
+            <a:avLst/>
+          </a:prstGeom>
+          <a:noFill/>
+        </p:spPr>
+        <p:txBody>
+          <a:bodyPr wrap="square" anchor="t" lIns="0" rIns="0" tIns="0" bIns="0"/>
+          <a:lstStyle/>
+          <a:p>
+            <a:pPr algn="l"/>
+            <a:r>
+              <a:rPr sz="1100" b="1" i="0">
+                <a:solidFill>
+                  <a:srgbClr val="54595D"/>
+                </a:solidFill>
+                <a:latin typeface="Calibri"/>
+              </a:rPr>
+              <a:t>CORE COMPONENT  ·  Core Paper 2</a:t>
+            </a:r>
+          </a:p>
+        </p:txBody>
+      </p:sp>
+      <p:sp>
+        <p:nvSpPr>
+          <p:cNvPr id="3" name="TextBox 2"/>
+          <p:cNvSpPr txBox="1"/>
+          <p:nvPr/>
+        </p:nvSpPr>
+        <p:spPr>
+          <a:xfrm>
+            <a:off x="548640" y="566928"/>
+            <a:ext cx="11094415" cy="822960"/>
+          </a:xfrm>
+          <a:prstGeom prst="rect">
+            <a:avLst/>
+          </a:prstGeom>
+          <a:noFill/>
+        </p:spPr>
+        <p:txBody>
+          <a:bodyPr wrap="square" anchor="ctr" lIns="0" rIns="0" tIns="0" bIns="0"/>
+          <a:lstStyle/>
+          <a:p>
+            <a:pPr algn="l"/>
+            <a:r>
+              <a:rPr sz="3200" b="1" i="0">
+                <a:solidFill>
+                  <a:srgbClr val="03306E"/>
+                </a:solidFill>
+                <a:latin typeface="Cambria"/>
+              </a:rPr>
+              <a:t>Quick check: Risks and impacts</a:t>
+            </a:r>
+          </a:p>
+        </p:txBody>
+      </p:sp>
+      <p:sp>
+        <p:nvSpPr>
+          <p:cNvPr id="4" name="TextBox 3"/>
+          <p:cNvSpPr txBox="1"/>
+          <p:nvPr/>
+        </p:nvSpPr>
+        <p:spPr>
+          <a:xfrm>
+            <a:off x="548640" y="6446520"/>
+            <a:ext cx="8229600" cy="274320"/>
+          </a:xfrm>
+          <a:prstGeom prst="rect">
+            <a:avLst/>
+          </a:prstGeom>
+          <a:noFill/>
+        </p:spPr>
+        <p:txBody>
+          <a:bodyPr wrap="square" anchor="t" lIns="0" rIns="0" tIns="0" bIns="0"/>
+          <a:lstStyle/>
+          <a:p>
+            <a:pPr algn="l"/>
+            <a:r>
+              <a:rPr sz="1000" b="0" i="0">
+                <a:solidFill>
+                  <a:srgbClr val="54595D"/>
+                </a:solidFill>
+                <a:latin typeface="Calibri"/>
+              </a:rPr>
+              <a:t>Digital Software Development T Level  ·  The Business Context</a:t>
+            </a:r>
+          </a:p>
+        </p:txBody>
+      </p:sp>
+      <p:sp>
+        <p:nvSpPr>
+          <p:cNvPr id="5" name="TextBox 4"/>
+          <p:cNvSpPr txBox="1"/>
+          <p:nvPr/>
+        </p:nvSpPr>
+        <p:spPr>
+          <a:xfrm>
+            <a:off x="10728655" y="6446520"/>
+            <a:ext cx="914400" cy="274320"/>
+          </a:xfrm>
+          <a:prstGeom prst="rect">
+            <a:avLst/>
+          </a:prstGeom>
+          <a:noFill/>
+        </p:spPr>
+        <p:txBody>
+          <a:bodyPr wrap="square" anchor="t" lIns="0" rIns="0" tIns="0" bIns="0"/>
+          <a:lstStyle/>
+          <a:p>
+            <a:pPr algn="r"/>
+            <a:r>
+              <a:rPr sz="1000" b="0" i="0">
+                <a:solidFill>
+                  <a:srgbClr val="54595D"/>
+                </a:solidFill>
+                <a:latin typeface="Calibri"/>
+              </a:rPr>
+              <a:t>12</a:t>
+            </a:r>
+          </a:p>
+        </p:txBody>
+      </p:sp>
+      <p:sp>
+        <p:nvSpPr>
+          <p:cNvPr id="6" name="Oval 5"/>
+          <p:cNvSpPr/>
+          <p:nvPr/>
+        </p:nvSpPr>
+        <p:spPr>
+          <a:xfrm>
+            <a:off x="548640" y="1691640"/>
+            <a:ext cx="502920" cy="502920"/>
+          </a:xfrm>
+          <a:prstGeom prst="ellipse">
+            <a:avLst/>
+          </a:prstGeom>
+          <a:solidFill>
+            <a:srgbClr val="F2B705"/>
+          </a:solidFill>
+          <a:ln>
+            <a:noFill/>
+          </a:ln>
+          <a:effectLst/>
+        </p:spPr>
+        <p:style>
+          <a:lnRef idx="1">
+            <a:schemeClr val="accent1"/>
+          </a:lnRef>
+          <a:fillRef idx="3">
+            <a:schemeClr val="accent1"/>
+          </a:fillRef>
+          <a:effectRef idx="2">
+            <a:schemeClr val="accent1"/>
+          </a:effectRef>
+          <a:fontRef idx="minor">
+            <a:schemeClr val="lt1"/>
+          </a:fontRef>
+        </p:style>
+        <p:txBody>
+          <a:bodyPr rtlCol="0" anchor="ctr" lIns="0" rIns="0" tIns="0" bIns="0"/>
+          <a:lstStyle/>
+          <a:p>
+            <a:pPr algn="ctr"/>
+            <a:r>
+              <a:rPr sz="1600" b="1">
+                <a:solidFill>
+                  <a:srgbClr val="202122"/>
+                </a:solidFill>
+                <a:latin typeface="Calibri"/>
+              </a:rPr>
+              <a:t>1</a:t>
+            </a:r>
+          </a:p>
+        </p:txBody>
+      </p:sp>
+      <p:sp>
+        <p:nvSpPr>
+          <p:cNvPr id="7" name="TextBox 6"/>
+          <p:cNvSpPr txBox="1"/>
+          <p:nvPr/>
+        </p:nvSpPr>
+        <p:spPr>
+          <a:xfrm>
+            <a:off x="1371600" y="1645920"/>
+            <a:ext cx="10271455" cy="1188720"/>
+          </a:xfrm>
+          <a:prstGeom prst="rect">
+            <a:avLst/>
+          </a:prstGeom>
+          <a:noFill/>
+        </p:spPr>
+        <p:txBody>
+          <a:bodyPr wrap="square" anchor="t" lIns="0" rIns="0" tIns="0" bIns="0"/>
+          <a:lstStyle/>
+          <a:p>
+            <a:pPr algn="l"/>
+            <a:r>
+              <a:rPr sz="2400" b="0" i="0">
+                <a:solidFill>
+                  <a:srgbClr val="202122"/>
+                </a:solidFill>
+                <a:latin typeface="Calibri"/>
+              </a:rPr>
+              <a:t>Name two risks of relying on software.</a:t>
+            </a:r>
+          </a:p>
+        </p:txBody>
+      </p:sp>
+      <p:sp>
+        <p:nvSpPr>
+          <p:cNvPr id="8" name="Oval 7"/>
+          <p:cNvSpPr/>
+          <p:nvPr/>
+        </p:nvSpPr>
+        <p:spPr>
+          <a:xfrm>
+            <a:off x="548640" y="3108960"/>
+            <a:ext cx="502920" cy="502920"/>
+          </a:xfrm>
+          <a:prstGeom prst="ellipse">
+            <a:avLst/>
+          </a:prstGeom>
+          <a:solidFill>
+            <a:srgbClr val="F2B705"/>
+          </a:solidFill>
+          <a:ln>
+            <a:noFill/>
+          </a:ln>
+          <a:effectLst/>
+        </p:spPr>
+        <p:style>
+          <a:lnRef idx="1">
+            <a:schemeClr val="accent1"/>
+          </a:lnRef>
+          <a:fillRef idx="3">
+            <a:schemeClr val="accent1"/>
+          </a:fillRef>
+          <a:effectRef idx="2">
+            <a:schemeClr val="accent1"/>
+          </a:effectRef>
+          <a:fontRef idx="minor">
+            <a:schemeClr val="lt1"/>
+          </a:fontRef>
+        </p:style>
+        <p:txBody>
+          <a:bodyPr rtlCol="0" anchor="ctr" lIns="0" rIns="0" tIns="0" bIns="0"/>
+          <a:lstStyle/>
+          <a:p>
+            <a:pPr algn="ctr"/>
+            <a:r>
+              <a:rPr sz="1600" b="1">
+                <a:solidFill>
+                  <a:srgbClr val="202122"/>
+                </a:solidFill>
+                <a:latin typeface="Calibri"/>
+              </a:rPr>
+              <a:t>2</a:t>
+            </a:r>
+          </a:p>
+        </p:txBody>
+      </p:sp>
+      <p:sp>
+        <p:nvSpPr>
+          <p:cNvPr id="9" name="TextBox 8"/>
+          <p:cNvSpPr txBox="1"/>
+          <p:nvPr/>
+        </p:nvSpPr>
+        <p:spPr>
+          <a:xfrm>
+            <a:off x="1371600" y="3063240"/>
+            <a:ext cx="10271455" cy="1188720"/>
+          </a:xfrm>
+          <a:prstGeom prst="rect">
+            <a:avLst/>
+          </a:prstGeom>
+          <a:noFill/>
+        </p:spPr>
+        <p:txBody>
+          <a:bodyPr wrap="square" anchor="t" lIns="0" rIns="0" tIns="0" bIns="0"/>
+          <a:lstStyle/>
+          <a:p>
+            <a:pPr algn="l"/>
+            <a:r>
+              <a:rPr sz="2400" b="0" i="0">
+                <a:solidFill>
+                  <a:srgbClr val="202122"/>
+                </a:solidFill>
+                <a:latin typeface="Calibri"/>
+              </a:rPr>
+              <a:t>Give two impacts of a data breach.</a:t>
+            </a:r>
+          </a:p>
+        </p:txBody>
+      </p:sp>
+      <p:sp>
+        <p:nvSpPr>
+          <p:cNvPr id="10" name="Oval 9"/>
+          <p:cNvSpPr/>
+          <p:nvPr/>
+        </p:nvSpPr>
+        <p:spPr>
+          <a:xfrm>
+            <a:off x="548640" y="4526280"/>
+            <a:ext cx="502920" cy="502920"/>
+          </a:xfrm>
+          <a:prstGeom prst="ellipse">
+            <a:avLst/>
+          </a:prstGeom>
+          <a:solidFill>
+            <a:srgbClr val="F2B705"/>
+          </a:solidFill>
+          <a:ln>
+            <a:noFill/>
+          </a:ln>
+          <a:effectLst/>
+        </p:spPr>
+        <p:style>
+          <a:lnRef idx="1">
+            <a:schemeClr val="accent1"/>
+          </a:lnRef>
+          <a:fillRef idx="3">
+            <a:schemeClr val="accent1"/>
+          </a:fillRef>
+          <a:effectRef idx="2">
+            <a:schemeClr val="accent1"/>
+          </a:effectRef>
+          <a:fontRef idx="minor">
+            <a:schemeClr val="lt1"/>
+          </a:fontRef>
+        </p:style>
+        <p:txBody>
+          <a:bodyPr rtlCol="0" anchor="ctr" lIns="0" rIns="0" tIns="0" bIns="0"/>
+          <a:lstStyle/>
+          <a:p>
+            <a:pPr algn="ctr"/>
+            <a:r>
+              <a:rPr sz="1600" b="1">
+                <a:solidFill>
+                  <a:srgbClr val="202122"/>
+                </a:solidFill>
+                <a:latin typeface="Calibri"/>
+              </a:rPr>
+              <a:t>3</a:t>
+            </a:r>
+          </a:p>
+        </p:txBody>
+      </p:sp>
+      <p:sp>
+        <p:nvSpPr>
+          <p:cNvPr id="11" name="TextBox 10"/>
+          <p:cNvSpPr txBox="1"/>
+          <p:nvPr/>
+        </p:nvSpPr>
+        <p:spPr>
+          <a:xfrm>
+            <a:off x="1371600" y="4480560"/>
+            <a:ext cx="10271455" cy="1188720"/>
+          </a:xfrm>
+          <a:prstGeom prst="rect">
+            <a:avLst/>
+          </a:prstGeom>
+          <a:noFill/>
+        </p:spPr>
+        <p:txBody>
+          <a:bodyPr wrap="square" anchor="t" lIns="0" rIns="0" tIns="0" bIns="0"/>
+          <a:lstStyle/>
+          <a:p>
+            <a:pPr algn="l"/>
+            <a:r>
+              <a:rPr sz="2400" b="0" i="0">
+                <a:solidFill>
+                  <a:srgbClr val="202122"/>
+                </a:solidFill>
+                <a:latin typeface="Calibri"/>
+              </a:rPr>
+              <a:t>How can developers reduce these risks?</a:t>
+            </a:r>
+          </a:p>
+        </p:txBody>
+      </p:sp>
+      <p:sp>
+        <p:nvSpPr>
+          <p:cNvPr id="12" name="TextBox 11"/>
+          <p:cNvSpPr txBox="1"/>
+          <p:nvPr/>
+        </p:nvSpPr>
+        <p:spPr>
+          <a:xfrm>
+            <a:off x="548640" y="5852160"/>
+            <a:ext cx="11094415" cy="365760"/>
+          </a:xfrm>
+          <a:prstGeom prst="rect">
+            <a:avLst/>
+          </a:prstGeom>
+          <a:noFill/>
+        </p:spPr>
+        <p:txBody>
+          <a:bodyPr wrap="square" anchor="t" lIns="0" rIns="0" tIns="0" bIns="0"/>
+          <a:lstStyle/>
+          <a:p>
+            <a:pPr algn="l"/>
+            <a:r>
+              <a:rPr sz="1300" b="0" i="1">
+                <a:solidFill>
+                  <a:srgbClr val="54595D"/>
+                </a:solidFill>
+                <a:latin typeface="Calibri"/>
+              </a:rPr>
+              <a:t>Answer on mini whiteboards or in your book. Answers are in the speaker notes.</a:t>
+            </a:r>
+          </a:p>
+        </p:txBody>
+      </p:sp>
+    </p:spTree>
+  </p:cSld>
+  <p:clrMapOvr>
+    <a:masterClrMapping/>
+  </p:clrMapOvr>
+</p:sld>
+</file>
+
+<file path=ppt/slides/slide13.xml><?xml version="1.0" encoding="utf-8"?>
+<p:sld xmlns:a="http://schemas.openxmlformats.org/drawingml/2006/main" xmlns:p="http://schemas.openxmlformats.org/presentationml/2006/main" xmlns:r="http://schemas.openxmlformats.org/officeDocument/2006/relationships">
+  <p:cSld>
+    <p:bg>
+      <p:bgPr>
+        <a:solidFill>
+          <a:srgbClr val="FFFFFF"/>
+        </a:solidFill>
+        <a:effectLst/>
+      </p:bgPr>
+    </p:bg>
+    <p:spTree>
+      <p:nvGrpSpPr>
+        <p:cNvPr id="1" name=""/>
+        <p:cNvGrpSpPr/>
+        <p:nvPr/>
+      </p:nvGrpSpPr>
+      <p:grpSpPr/>
+      <p:sp>
+        <p:nvSpPr>
+          <p:cNvPr id="2" name="TextBox 1"/>
+          <p:cNvSpPr txBox="1"/>
+          <p:nvPr/>
+        </p:nvSpPr>
+        <p:spPr>
+          <a:xfrm>
+            <a:off x="548640" y="320040"/>
+            <a:ext cx="11094415" cy="274320"/>
+          </a:xfrm>
+          <a:prstGeom prst="rect">
+            <a:avLst/>
+          </a:prstGeom>
+          <a:noFill/>
+        </p:spPr>
+        <p:txBody>
+          <a:bodyPr wrap="square" anchor="t" lIns="0" rIns="0" tIns="0" bIns="0"/>
+          <a:lstStyle/>
+          <a:p>
+            <a:pPr algn="l"/>
+            <a:r>
+              <a:rPr sz="1100" b="1" i="0">
+                <a:solidFill>
+                  <a:srgbClr val="54595D"/>
+                </a:solidFill>
+                <a:latin typeface="Calibri"/>
+              </a:rPr>
+              <a:t>CORE COMPONENT  ·  Core Paper 2</a:t>
+            </a:r>
+          </a:p>
+        </p:txBody>
+      </p:sp>
+      <p:sp>
+        <p:nvSpPr>
+          <p:cNvPr id="3" name="TextBox 2"/>
+          <p:cNvSpPr txBox="1"/>
+          <p:nvPr/>
+        </p:nvSpPr>
+        <p:spPr>
+          <a:xfrm>
+            <a:off x="548640" y="566928"/>
+            <a:ext cx="11094415" cy="822960"/>
+          </a:xfrm>
+          <a:prstGeom prst="rect">
+            <a:avLst/>
+          </a:prstGeom>
+          <a:noFill/>
+        </p:spPr>
+        <p:txBody>
+          <a:bodyPr wrap="square" anchor="ctr" lIns="0" rIns="0" tIns="0" bIns="0"/>
+          <a:lstStyle/>
+          <a:p>
+            <a:pPr algn="l"/>
+            <a:r>
+              <a:rPr sz="3200" b="1" i="0">
+                <a:solidFill>
+                  <a:srgbClr val="03306E"/>
+                </a:solidFill>
+                <a:latin typeface="Cambria"/>
+              </a:rPr>
+              <a:t>Check your understanding</a:t>
+            </a:r>
+          </a:p>
+        </p:txBody>
+      </p:sp>
+      <p:sp>
+        <p:nvSpPr>
+          <p:cNvPr id="4" name="TextBox 3"/>
+          <p:cNvSpPr txBox="1"/>
+          <p:nvPr/>
+        </p:nvSpPr>
+        <p:spPr>
+          <a:xfrm>
+            <a:off x="548640" y="6446520"/>
+            <a:ext cx="8229600" cy="274320"/>
+          </a:xfrm>
+          <a:prstGeom prst="rect">
+            <a:avLst/>
+          </a:prstGeom>
+          <a:noFill/>
+        </p:spPr>
+        <p:txBody>
+          <a:bodyPr wrap="square" anchor="t" lIns="0" rIns="0" tIns="0" bIns="0"/>
+          <a:lstStyle/>
+          <a:p>
+            <a:pPr algn="l"/>
+            <a:r>
+              <a:rPr sz="1000" b="0" i="0">
+                <a:solidFill>
+                  <a:srgbClr val="54595D"/>
+                </a:solidFill>
+                <a:latin typeface="Calibri"/>
+              </a:rPr>
+              <a:t>Digital Software Development T Level  ·  The Business Context</a:t>
+            </a:r>
+          </a:p>
+        </p:txBody>
+      </p:sp>
+      <p:sp>
+        <p:nvSpPr>
+          <p:cNvPr id="5" name="TextBox 4"/>
+          <p:cNvSpPr txBox="1"/>
+          <p:nvPr/>
+        </p:nvSpPr>
+        <p:spPr>
+          <a:xfrm>
+            <a:off x="10728655" y="6446520"/>
+            <a:ext cx="914400" cy="274320"/>
+          </a:xfrm>
+          <a:prstGeom prst="rect">
+            <a:avLst/>
+          </a:prstGeom>
+          <a:noFill/>
+        </p:spPr>
+        <p:txBody>
+          <a:bodyPr wrap="square" anchor="t" lIns="0" rIns="0" tIns="0" bIns="0"/>
+          <a:lstStyle/>
+          <a:p>
+            <a:pPr algn="r"/>
+            <a:r>
+              <a:rPr sz="1000" b="0" i="0">
+                <a:solidFill>
+                  <a:srgbClr val="54595D"/>
+                </a:solidFill>
+                <a:latin typeface="Calibri"/>
+              </a:rPr>
+              <a:t>13</a:t>
+            </a:r>
+          </a:p>
+        </p:txBody>
+      </p:sp>
+      <p:sp>
+        <p:nvSpPr>
+          <p:cNvPr id="6" name="Oval 5"/>
+          <p:cNvSpPr/>
+          <p:nvPr/>
+        </p:nvSpPr>
+        <p:spPr>
+          <a:xfrm>
+            <a:off x="548640" y="1618488"/>
+            <a:ext cx="411480" cy="411480"/>
+          </a:xfrm>
+          <a:prstGeom prst="ellipse">
+            <a:avLst/>
+          </a:prstGeom>
+          <a:solidFill>
+            <a:srgbClr val="F2B705"/>
+          </a:solidFill>
+          <a:ln>
+            <a:noFill/>
+          </a:ln>
+          <a:effectLst/>
+        </p:spPr>
+        <p:style>
+          <a:lnRef idx="1">
+            <a:schemeClr val="accent1"/>
+          </a:lnRef>
+          <a:fillRef idx="3">
+            <a:schemeClr val="accent1"/>
+          </a:fillRef>
+          <a:effectRef idx="2">
+            <a:schemeClr val="accent1"/>
+          </a:effectRef>
+          <a:fontRef idx="minor">
+            <a:schemeClr val="lt1"/>
+          </a:fontRef>
+        </p:style>
+        <p:txBody>
+          <a:bodyPr rtlCol="0" anchor="ctr" lIns="0" rIns="0" tIns="0" bIns="0"/>
+          <a:lstStyle/>
+          <a:p>
+            <a:pPr algn="ctr"/>
+            <a:r>
+              <a:rPr sz="1400" b="1">
+                <a:solidFill>
+                  <a:srgbClr val="202122"/>
+                </a:solidFill>
+                <a:latin typeface="Calibri"/>
+              </a:rPr>
+              <a:t>1</a:t>
+            </a:r>
+          </a:p>
+        </p:txBody>
+      </p:sp>
+      <p:sp>
+        <p:nvSpPr>
+          <p:cNvPr id="7" name="TextBox 6"/>
+          <p:cNvSpPr txBox="1"/>
+          <p:nvPr/>
+        </p:nvSpPr>
+        <p:spPr>
+          <a:xfrm>
+            <a:off x="1234440" y="1600200"/>
+            <a:ext cx="10408615" cy="1030986"/>
+          </a:xfrm>
+          <a:prstGeom prst="rect">
+            <a:avLst/>
+          </a:prstGeom>
+          <a:noFill/>
+        </p:spPr>
+        <p:txBody>
+          <a:bodyPr wrap="square" anchor="t" lIns="0" rIns="0" tIns="0" bIns="0"/>
+          <a:lstStyle/>
+          <a:p>
+            <a:pPr algn="l"/>
+            <a:r>
+              <a:rPr sz="2200" b="0" i="0">
+                <a:solidFill>
+                  <a:srgbClr val="202122"/>
+                </a:solidFill>
+                <a:latin typeface="Calibri"/>
+              </a:rPr>
+              <a:t>What does B2C mean?</a:t>
+            </a:r>
+          </a:p>
+        </p:txBody>
+      </p:sp>
+      <p:sp>
+        <p:nvSpPr>
+          <p:cNvPr id="8" name="Oval 7"/>
+          <p:cNvSpPr/>
+          <p:nvPr/>
+        </p:nvSpPr>
+        <p:spPr>
+          <a:xfrm>
+            <a:off x="548640" y="2814066"/>
+            <a:ext cx="411480" cy="411480"/>
+          </a:xfrm>
+          <a:prstGeom prst="ellipse">
+            <a:avLst/>
+          </a:prstGeom>
+          <a:solidFill>
+            <a:srgbClr val="F2B705"/>
+          </a:solidFill>
+          <a:ln>
+            <a:noFill/>
+          </a:ln>
+          <a:effectLst/>
+        </p:spPr>
+        <p:style>
+          <a:lnRef idx="1">
+            <a:schemeClr val="accent1"/>
+          </a:lnRef>
+          <a:fillRef idx="3">
+            <a:schemeClr val="accent1"/>
+          </a:fillRef>
+          <a:effectRef idx="2">
+            <a:schemeClr val="accent1"/>
+          </a:effectRef>
+          <a:fontRef idx="minor">
+            <a:schemeClr val="lt1"/>
+          </a:fontRef>
+        </p:style>
+        <p:txBody>
+          <a:bodyPr rtlCol="0" anchor="ctr" lIns="0" rIns="0" tIns="0" bIns="0"/>
+          <a:lstStyle/>
+          <a:p>
+            <a:pPr algn="ctr"/>
+            <a:r>
+              <a:rPr sz="1400" b="1">
+                <a:solidFill>
+                  <a:srgbClr val="202122"/>
+                </a:solidFill>
+                <a:latin typeface="Calibri"/>
+              </a:rPr>
+              <a:t>2</a:t>
+            </a:r>
+          </a:p>
+        </p:txBody>
+      </p:sp>
+      <p:sp>
+        <p:nvSpPr>
+          <p:cNvPr id="9" name="TextBox 8"/>
+          <p:cNvSpPr txBox="1"/>
+          <p:nvPr/>
+        </p:nvSpPr>
+        <p:spPr>
+          <a:xfrm>
+            <a:off x="1234440" y="2795778"/>
+            <a:ext cx="10408615" cy="1030986"/>
+          </a:xfrm>
+          <a:prstGeom prst="rect">
+            <a:avLst/>
+          </a:prstGeom>
+          <a:noFill/>
+        </p:spPr>
+        <p:txBody>
+          <a:bodyPr wrap="square" anchor="t" lIns="0" rIns="0" tIns="0" bIns="0"/>
+          <a:lstStyle/>
+          <a:p>
+            <a:pPr algn="l"/>
+            <a:r>
+              <a:rPr sz="2200" b="0" i="0">
+                <a:solidFill>
+                  <a:srgbClr val="202122"/>
+                </a:solidFill>
+                <a:latin typeface="Calibri"/>
+              </a:rPr>
+              <a:t>Is a shareholder an internal or external stakeholder?</a:t>
+            </a:r>
+          </a:p>
+        </p:txBody>
+      </p:sp>
+      <p:sp>
+        <p:nvSpPr>
+          <p:cNvPr id="10" name="Oval 9"/>
+          <p:cNvSpPr/>
+          <p:nvPr/>
+        </p:nvSpPr>
+        <p:spPr>
+          <a:xfrm>
+            <a:off x="548640" y="4009644"/>
+            <a:ext cx="411480" cy="411480"/>
+          </a:xfrm>
+          <a:prstGeom prst="ellipse">
+            <a:avLst/>
+          </a:prstGeom>
+          <a:solidFill>
+            <a:srgbClr val="F2B705"/>
+          </a:solidFill>
+          <a:ln>
+            <a:noFill/>
+          </a:ln>
+          <a:effectLst/>
+        </p:spPr>
+        <p:style>
+          <a:lnRef idx="1">
+            <a:schemeClr val="accent1"/>
+          </a:lnRef>
+          <a:fillRef idx="3">
+            <a:schemeClr val="accent1"/>
+          </a:fillRef>
+          <a:effectRef idx="2">
+            <a:schemeClr val="accent1"/>
+          </a:effectRef>
+          <a:fontRef idx="minor">
+            <a:schemeClr val="lt1"/>
+          </a:fontRef>
+        </p:style>
+        <p:txBody>
+          <a:bodyPr rtlCol="0" anchor="ctr" lIns="0" rIns="0" tIns="0" bIns="0"/>
+          <a:lstStyle/>
+          <a:p>
+            <a:pPr algn="ctr"/>
+            <a:r>
+              <a:rPr sz="1400" b="1">
+                <a:solidFill>
+                  <a:srgbClr val="202122"/>
+                </a:solidFill>
+                <a:latin typeface="Calibri"/>
+              </a:rPr>
+              <a:t>3</a:t>
+            </a:r>
+          </a:p>
+        </p:txBody>
+      </p:sp>
+      <p:sp>
+        <p:nvSpPr>
+          <p:cNvPr id="11" name="TextBox 10"/>
+          <p:cNvSpPr txBox="1"/>
+          <p:nvPr/>
+        </p:nvSpPr>
+        <p:spPr>
+          <a:xfrm>
+            <a:off x="1234440" y="3991356"/>
+            <a:ext cx="10408615" cy="1030986"/>
+          </a:xfrm>
+          <a:prstGeom prst="rect">
+            <a:avLst/>
+          </a:prstGeom>
+          <a:noFill/>
+        </p:spPr>
+        <p:txBody>
+          <a:bodyPr wrap="square" anchor="t" lIns="0" rIns="0" tIns="0" bIns="0"/>
+          <a:lstStyle/>
+          <a:p>
+            <a:pPr algn="l"/>
+            <a:r>
+              <a:rPr sz="2200" b="0" i="0">
+                <a:solidFill>
+                  <a:srgbClr val="202122"/>
+                </a:solidFill>
+                <a:latin typeface="Calibri"/>
+              </a:rPr>
+              <a:t>What is a 'pain point'?</a:t>
+            </a:r>
+          </a:p>
+        </p:txBody>
+      </p:sp>
+      <p:sp>
+        <p:nvSpPr>
+          <p:cNvPr id="12" name="Oval 11"/>
+          <p:cNvSpPr/>
+          <p:nvPr/>
+        </p:nvSpPr>
+        <p:spPr>
+          <a:xfrm>
+            <a:off x="548640" y="5205221"/>
+            <a:ext cx="411480" cy="411480"/>
+          </a:xfrm>
+          <a:prstGeom prst="ellipse">
+            <a:avLst/>
+          </a:prstGeom>
+          <a:solidFill>
+            <a:srgbClr val="F2B705"/>
+          </a:solidFill>
+          <a:ln>
+            <a:noFill/>
+          </a:ln>
+          <a:effectLst/>
+        </p:spPr>
+        <p:style>
+          <a:lnRef idx="1">
+            <a:schemeClr val="accent1"/>
+          </a:lnRef>
+          <a:fillRef idx="3">
+            <a:schemeClr val="accent1"/>
+          </a:fillRef>
+          <a:effectRef idx="2">
+            <a:schemeClr val="accent1"/>
+          </a:effectRef>
+          <a:fontRef idx="minor">
+            <a:schemeClr val="lt1"/>
+          </a:fontRef>
+        </p:style>
+        <p:txBody>
+          <a:bodyPr rtlCol="0" anchor="ctr" lIns="0" rIns="0" tIns="0" bIns="0"/>
+          <a:lstStyle/>
+          <a:p>
+            <a:pPr algn="ctr"/>
+            <a:r>
+              <a:rPr sz="1400" b="1">
+                <a:solidFill>
+                  <a:srgbClr val="202122"/>
+                </a:solidFill>
+                <a:latin typeface="Calibri"/>
+              </a:rPr>
+              <a:t>4</a:t>
+            </a:r>
+          </a:p>
+        </p:txBody>
+      </p:sp>
+      <p:sp>
+        <p:nvSpPr>
+          <p:cNvPr id="13" name="TextBox 12"/>
+          <p:cNvSpPr txBox="1"/>
+          <p:nvPr/>
+        </p:nvSpPr>
+        <p:spPr>
+          <a:xfrm>
+            <a:off x="1234440" y="5186933"/>
+            <a:ext cx="10408615" cy="1030986"/>
+          </a:xfrm>
+          <a:prstGeom prst="rect">
+            <a:avLst/>
+          </a:prstGeom>
+          <a:noFill/>
+        </p:spPr>
+        <p:txBody>
+          <a:bodyPr wrap="square" anchor="t" lIns="0" rIns="0" tIns="0" bIns="0"/>
+          <a:lstStyle/>
+          <a:p>
+            <a:pPr algn="l"/>
+            <a:r>
+              <a:rPr sz="2200" b="0" i="0">
+                <a:solidFill>
+                  <a:srgbClr val="202122"/>
+                </a:solidFill>
+                <a:latin typeface="Calibri"/>
+              </a:rPr>
+              <a:t>Name two impacts of a data breach.</a:t>
+            </a:r>
+          </a:p>
+        </p:txBody>
+      </p:sp>
+    </p:spTree>
+  </p:cSld>
+  <p:clrMapOvr>
+    <a:masterClrMapping/>
+  </p:clrMapOvr>
+</p:sld>
+</file>
+
+<file path=ppt/slides/slide14.xml><?xml version="1.0" encoding="utf-8"?>
+<p:sld xmlns:a="http://schemas.openxmlformats.org/drawingml/2006/main" xmlns:p="http://schemas.openxmlformats.org/presentationml/2006/main" xmlns:r="http://schemas.openxmlformats.org/officeDocument/2006/relationships">
+  <p:cSld>
+    <p:bg>
+      <p:bgPr>
+        <a:solidFill>
+          <a:srgbClr val="FFFFFF"/>
+        </a:solidFill>
+        <a:effectLst/>
+      </p:bgPr>
+    </p:bg>
+    <p:spTree>
+      <p:nvGrpSpPr>
+        <p:cNvPr id="1" name=""/>
+        <p:cNvGrpSpPr/>
+        <p:nvPr/>
+      </p:nvGrpSpPr>
+      <p:grpSpPr/>
+      <p:sp>
+        <p:nvSpPr>
+          <p:cNvPr id="2" name="TextBox 1"/>
+          <p:cNvSpPr txBox="1"/>
+          <p:nvPr/>
+        </p:nvSpPr>
+        <p:spPr>
+          <a:xfrm>
+            <a:off x="548640" y="320040"/>
+            <a:ext cx="11094415" cy="274320"/>
+          </a:xfrm>
+          <a:prstGeom prst="rect">
+            <a:avLst/>
+          </a:prstGeom>
+          <a:noFill/>
+        </p:spPr>
+        <p:txBody>
+          <a:bodyPr wrap="square" anchor="t" lIns="0" rIns="0" tIns="0" bIns="0"/>
+          <a:lstStyle/>
+          <a:p>
+            <a:pPr algn="l"/>
+            <a:r>
+              <a:rPr sz="1100" b="1" i="0">
+                <a:solidFill>
+                  <a:srgbClr val="54595D"/>
+                </a:solidFill>
+                <a:latin typeface="Calibri"/>
+              </a:rPr>
+              <a:t>CORE COMPONENT  ·  Core Paper 2</a:t>
+            </a:r>
+          </a:p>
+        </p:txBody>
+      </p:sp>
+      <p:sp>
+        <p:nvSpPr>
+          <p:cNvPr id="3" name="TextBox 2"/>
+          <p:cNvSpPr txBox="1"/>
+          <p:nvPr/>
+        </p:nvSpPr>
+        <p:spPr>
+          <a:xfrm>
+            <a:off x="548640" y="566928"/>
+            <a:ext cx="11094415" cy="822960"/>
+          </a:xfrm>
+          <a:prstGeom prst="rect">
+            <a:avLst/>
+          </a:prstGeom>
+          <a:noFill/>
+        </p:spPr>
+        <p:txBody>
+          <a:bodyPr wrap="square" anchor="ctr" lIns="0" rIns="0" tIns="0" bIns="0"/>
+          <a:lstStyle/>
+          <a:p>
+            <a:pPr algn="l"/>
+            <a:r>
+              <a:rPr sz="3200" b="1" i="0">
+                <a:solidFill>
+                  <a:srgbClr val="03306E"/>
+                </a:solidFill>
+                <a:latin typeface="Cambria"/>
+              </a:rPr>
+              <a:t>Answers</a:t>
+            </a:r>
+          </a:p>
+        </p:txBody>
+      </p:sp>
+      <p:sp>
+        <p:nvSpPr>
+          <p:cNvPr id="4" name="TextBox 3"/>
+          <p:cNvSpPr txBox="1"/>
+          <p:nvPr/>
+        </p:nvSpPr>
+        <p:spPr>
+          <a:xfrm>
+            <a:off x="548640" y="6446520"/>
+            <a:ext cx="8229600" cy="274320"/>
+          </a:xfrm>
+          <a:prstGeom prst="rect">
+            <a:avLst/>
+          </a:prstGeom>
+          <a:noFill/>
+        </p:spPr>
+        <p:txBody>
+          <a:bodyPr wrap="square" anchor="t" lIns="0" rIns="0" tIns="0" bIns="0"/>
+          <a:lstStyle/>
+          <a:p>
+            <a:pPr algn="l"/>
+            <a:r>
+              <a:rPr sz="1000" b="0" i="0">
+                <a:solidFill>
+                  <a:srgbClr val="54595D"/>
+                </a:solidFill>
+                <a:latin typeface="Calibri"/>
+              </a:rPr>
+              <a:t>Digital Software Development T Level  ·  The Business Context</a:t>
+            </a:r>
+          </a:p>
+        </p:txBody>
+      </p:sp>
+      <p:sp>
+        <p:nvSpPr>
+          <p:cNvPr id="5" name="TextBox 4"/>
+          <p:cNvSpPr txBox="1"/>
+          <p:nvPr/>
+        </p:nvSpPr>
+        <p:spPr>
+          <a:xfrm>
+            <a:off x="10728655" y="6446520"/>
+            <a:ext cx="914400" cy="274320"/>
+          </a:xfrm>
+          <a:prstGeom prst="rect">
+            <a:avLst/>
+          </a:prstGeom>
+          <a:noFill/>
+        </p:spPr>
+        <p:txBody>
+          <a:bodyPr wrap="square" anchor="t" lIns="0" rIns="0" tIns="0" bIns="0"/>
+          <a:lstStyle/>
+          <a:p>
+            <a:pPr algn="r"/>
+            <a:r>
+              <a:rPr sz="1000" b="0" i="0">
+                <a:solidFill>
+                  <a:srgbClr val="54595D"/>
+                </a:solidFill>
+                <a:latin typeface="Calibri"/>
+              </a:rPr>
+              <a:t>14</a:t>
+            </a:r>
+          </a:p>
+        </p:txBody>
+      </p:sp>
+      <p:sp>
+        <p:nvSpPr>
+          <p:cNvPr id="6" name="Oval 5"/>
+          <p:cNvSpPr/>
+          <p:nvPr/>
+        </p:nvSpPr>
+        <p:spPr>
+          <a:xfrm>
+            <a:off x="548640" y="1618488"/>
+            <a:ext cx="411480" cy="411480"/>
+          </a:xfrm>
+          <a:prstGeom prst="ellipse">
+            <a:avLst/>
+          </a:prstGeom>
+          <a:solidFill>
+            <a:srgbClr val="F2B705"/>
+          </a:solidFill>
+          <a:ln>
+            <a:noFill/>
+          </a:ln>
+          <a:effectLst/>
+        </p:spPr>
+        <p:style>
+          <a:lnRef idx="1">
+            <a:schemeClr val="accent1"/>
+          </a:lnRef>
+          <a:fillRef idx="3">
+            <a:schemeClr val="accent1"/>
+          </a:fillRef>
+          <a:effectRef idx="2">
+            <a:schemeClr val="accent1"/>
+          </a:effectRef>
+          <a:fontRef idx="minor">
+            <a:schemeClr val="lt1"/>
+          </a:fontRef>
+        </p:style>
+        <p:txBody>
+          <a:bodyPr rtlCol="0" anchor="ctr" lIns="0" rIns="0" tIns="0" bIns="0"/>
+          <a:lstStyle/>
+          <a:p>
+            <a:pPr algn="ctr"/>
+            <a:r>
+              <a:rPr sz="1400" b="1">
+                <a:solidFill>
+                  <a:srgbClr val="202122"/>
+                </a:solidFill>
+                <a:latin typeface="Calibri"/>
+              </a:rPr>
+              <a:t>1</a:t>
+            </a:r>
+          </a:p>
+        </p:txBody>
+      </p:sp>
+      <p:sp>
+        <p:nvSpPr>
+          <p:cNvPr id="7" name="TextBox 6"/>
+          <p:cNvSpPr txBox="1"/>
+          <p:nvPr/>
+        </p:nvSpPr>
+        <p:spPr>
+          <a:xfrm>
+            <a:off x="1234440" y="1600200"/>
+            <a:ext cx="10408615" cy="1030986"/>
+          </a:xfrm>
+          <a:prstGeom prst="rect">
+            <a:avLst/>
+          </a:prstGeom>
+          <a:noFill/>
+        </p:spPr>
+        <p:txBody>
+          <a:bodyPr wrap="square" anchor="t" lIns="0" rIns="0" tIns="0" bIns="0"/>
+          <a:lstStyle/>
+          <a:p>
+            <a:pPr algn="l"/>
+            <a:r>
+              <a:rPr sz="1800" b="0" i="0">
+                <a:solidFill>
+                  <a:srgbClr val="54595D"/>
+                </a:solidFill>
+                <a:latin typeface="Calibri"/>
+              </a:rPr>
+              <a:t>What does B2C mean?</a:t>
+            </a:r>
+          </a:p>
+          <a:p>
+            <a:r>
+              <a:rPr sz="1800" b="1">
+                <a:solidFill>
+                  <a:srgbClr val="03306E"/>
+                </a:solidFill>
+                <a:latin typeface="Calibri"/>
+              </a:rPr>
+              <a:t>Business to consumer.</a:t>
+            </a:r>
+          </a:p>
+        </p:txBody>
+      </p:sp>
+      <p:sp>
+        <p:nvSpPr>
+          <p:cNvPr id="8" name="Oval 7"/>
+          <p:cNvSpPr/>
+          <p:nvPr/>
+        </p:nvSpPr>
+        <p:spPr>
+          <a:xfrm>
+            <a:off x="548640" y="2814066"/>
+            <a:ext cx="411480" cy="411480"/>
+          </a:xfrm>
+          <a:prstGeom prst="ellipse">
+            <a:avLst/>
+          </a:prstGeom>
+          <a:solidFill>
+            <a:srgbClr val="F2B705"/>
+          </a:solidFill>
+          <a:ln>
+            <a:noFill/>
+          </a:ln>
+          <a:effectLst/>
+        </p:spPr>
+        <p:style>
+          <a:lnRef idx="1">
+            <a:schemeClr val="accent1"/>
+          </a:lnRef>
+          <a:fillRef idx="3">
+            <a:schemeClr val="accent1"/>
+          </a:fillRef>
+          <a:effectRef idx="2">
+            <a:schemeClr val="accent1"/>
+          </a:effectRef>
+          <a:fontRef idx="minor">
+            <a:schemeClr val="lt1"/>
+          </a:fontRef>
+        </p:style>
+        <p:txBody>
+          <a:bodyPr rtlCol="0" anchor="ctr" lIns="0" rIns="0" tIns="0" bIns="0"/>
+          <a:lstStyle/>
+          <a:p>
+            <a:pPr algn="ctr"/>
+            <a:r>
+              <a:rPr sz="1400" b="1">
+                <a:solidFill>
+                  <a:srgbClr val="202122"/>
+                </a:solidFill>
+                <a:latin typeface="Calibri"/>
+              </a:rPr>
+              <a:t>2</a:t>
+            </a:r>
+          </a:p>
+        </p:txBody>
+      </p:sp>
+      <p:sp>
+        <p:nvSpPr>
+          <p:cNvPr id="9" name="TextBox 8"/>
+          <p:cNvSpPr txBox="1"/>
+          <p:nvPr/>
+        </p:nvSpPr>
+        <p:spPr>
+          <a:xfrm>
+            <a:off x="1234440" y="2795778"/>
+            <a:ext cx="10408615" cy="1030986"/>
+          </a:xfrm>
+          <a:prstGeom prst="rect">
+            <a:avLst/>
+          </a:prstGeom>
+          <a:noFill/>
+        </p:spPr>
+        <p:txBody>
+          <a:bodyPr wrap="square" anchor="t" lIns="0" rIns="0" tIns="0" bIns="0"/>
+          <a:lstStyle/>
+          <a:p>
+            <a:pPr algn="l"/>
+            <a:r>
+              <a:rPr sz="1800" b="0" i="0">
+                <a:solidFill>
+                  <a:srgbClr val="54595D"/>
+                </a:solidFill>
+                <a:latin typeface="Calibri"/>
+              </a:rPr>
+              <a:t>Is a shareholder an internal or external stakeholder?</a:t>
+            </a:r>
+          </a:p>
+          <a:p>
+            <a:r>
+              <a:rPr sz="1800" b="1">
+                <a:solidFill>
+                  <a:srgbClr val="03306E"/>
+                </a:solidFill>
+                <a:latin typeface="Calibri"/>
+              </a:rPr>
+              <a:t>External.</a:t>
+            </a:r>
+          </a:p>
+        </p:txBody>
+      </p:sp>
+      <p:sp>
+        <p:nvSpPr>
+          <p:cNvPr id="10" name="Oval 9"/>
+          <p:cNvSpPr/>
+          <p:nvPr/>
+        </p:nvSpPr>
+        <p:spPr>
+          <a:xfrm>
+            <a:off x="548640" y="4009644"/>
+            <a:ext cx="411480" cy="411480"/>
+          </a:xfrm>
+          <a:prstGeom prst="ellipse">
+            <a:avLst/>
+          </a:prstGeom>
+          <a:solidFill>
+            <a:srgbClr val="F2B705"/>
+          </a:solidFill>
+          <a:ln>
+            <a:noFill/>
+          </a:ln>
+          <a:effectLst/>
+        </p:spPr>
+        <p:style>
+          <a:lnRef idx="1">
+            <a:schemeClr val="accent1"/>
+          </a:lnRef>
+          <a:fillRef idx="3">
+            <a:schemeClr val="accent1"/>
+          </a:fillRef>
+          <a:effectRef idx="2">
+            <a:schemeClr val="accent1"/>
+          </a:effectRef>
+          <a:fontRef idx="minor">
+            <a:schemeClr val="lt1"/>
+          </a:fontRef>
+        </p:style>
+        <p:txBody>
+          <a:bodyPr rtlCol="0" anchor="ctr" lIns="0" rIns="0" tIns="0" bIns="0"/>
+          <a:lstStyle/>
+          <a:p>
+            <a:pPr algn="ctr"/>
+            <a:r>
+              <a:rPr sz="1400" b="1">
+                <a:solidFill>
+                  <a:srgbClr val="202122"/>
+                </a:solidFill>
+                <a:latin typeface="Calibri"/>
+              </a:rPr>
+              <a:t>3</a:t>
+            </a:r>
+          </a:p>
+        </p:txBody>
+      </p:sp>
+      <p:sp>
+        <p:nvSpPr>
+          <p:cNvPr id="11" name="TextBox 10"/>
+          <p:cNvSpPr txBox="1"/>
+          <p:nvPr/>
+        </p:nvSpPr>
+        <p:spPr>
+          <a:xfrm>
+            <a:off x="1234440" y="3991356"/>
+            <a:ext cx="10408615" cy="1030986"/>
+          </a:xfrm>
+          <a:prstGeom prst="rect">
+            <a:avLst/>
+          </a:prstGeom>
+          <a:noFill/>
+        </p:spPr>
+        <p:txBody>
+          <a:bodyPr wrap="square" anchor="t" lIns="0" rIns="0" tIns="0" bIns="0"/>
+          <a:lstStyle/>
+          <a:p>
+            <a:pPr algn="l"/>
+            <a:r>
+              <a:rPr sz="1800" b="0" i="0">
+                <a:solidFill>
+                  <a:srgbClr val="54595D"/>
+                </a:solidFill>
+                <a:latin typeface="Calibri"/>
+              </a:rPr>
+              <a:t>What is a 'pain point'?</a:t>
+            </a:r>
+          </a:p>
+          <a:p>
+            <a:r>
+              <a:rPr sz="1800" b="1">
+                <a:solidFill>
+                  <a:srgbClr val="03306E"/>
+                </a:solidFill>
+                <a:latin typeface="Calibri"/>
+              </a:rPr>
+              <a:t>Something that frustrates users, such as slow response or complex tasks.</a:t>
+            </a:r>
+          </a:p>
+        </p:txBody>
+      </p:sp>
+      <p:sp>
+        <p:nvSpPr>
+          <p:cNvPr id="12" name="Oval 11"/>
+          <p:cNvSpPr/>
+          <p:nvPr/>
+        </p:nvSpPr>
+        <p:spPr>
+          <a:xfrm>
+            <a:off x="548640" y="5205221"/>
+            <a:ext cx="411480" cy="411480"/>
+          </a:xfrm>
+          <a:prstGeom prst="ellipse">
+            <a:avLst/>
+          </a:prstGeom>
+          <a:solidFill>
+            <a:srgbClr val="F2B705"/>
+          </a:solidFill>
+          <a:ln>
+            <a:noFill/>
+          </a:ln>
+          <a:effectLst/>
+        </p:spPr>
+        <p:style>
+          <a:lnRef idx="1">
+            <a:schemeClr val="accent1"/>
+          </a:lnRef>
+          <a:fillRef idx="3">
+            <a:schemeClr val="accent1"/>
+          </a:fillRef>
+          <a:effectRef idx="2">
+            <a:schemeClr val="accent1"/>
+          </a:effectRef>
+          <a:fontRef idx="minor">
+            <a:schemeClr val="lt1"/>
+          </a:fontRef>
+        </p:style>
+        <p:txBody>
+          <a:bodyPr rtlCol="0" anchor="ctr" lIns="0" rIns="0" tIns="0" bIns="0"/>
+          <a:lstStyle/>
+          <a:p>
+            <a:pPr algn="ctr"/>
+            <a:r>
+              <a:rPr sz="1400" b="1">
+                <a:solidFill>
+                  <a:srgbClr val="202122"/>
+                </a:solidFill>
+                <a:latin typeface="Calibri"/>
+              </a:rPr>
+              <a:t>4</a:t>
+            </a:r>
+          </a:p>
+        </p:txBody>
+      </p:sp>
+      <p:sp>
+        <p:nvSpPr>
+          <p:cNvPr id="13" name="TextBox 12"/>
+          <p:cNvSpPr txBox="1"/>
+          <p:nvPr/>
+        </p:nvSpPr>
+        <p:spPr>
+          <a:xfrm>
+            <a:off x="1234440" y="5186933"/>
+            <a:ext cx="10408615" cy="1030986"/>
+          </a:xfrm>
+          <a:prstGeom prst="rect">
+            <a:avLst/>
+          </a:prstGeom>
+          <a:noFill/>
+        </p:spPr>
+        <p:txBody>
+          <a:bodyPr wrap="square" anchor="t" lIns="0" rIns="0" tIns="0" bIns="0"/>
+          <a:lstStyle/>
+          <a:p>
+            <a:pPr algn="l"/>
+            <a:r>
+              <a:rPr sz="1800" b="0" i="0">
+                <a:solidFill>
+                  <a:srgbClr val="54595D"/>
+                </a:solidFill>
+                <a:latin typeface="Calibri"/>
+              </a:rPr>
+              <a:t>Name two impacts of a data breach.</a:t>
+            </a:r>
+          </a:p>
+          <a:p>
+            <a:r>
+              <a:rPr sz="1800" b="1">
+                <a:solidFill>
+                  <a:srgbClr val="03306E"/>
+                </a:solidFill>
+                <a:latin typeface="Calibri"/>
+              </a:rPr>
+              <a:t>Any two of: legal action, fines, reputational damage, loss of licence, lost business.</a:t>
+            </a:r>
+          </a:p>
+        </p:txBody>
+      </p:sp>
+    </p:spTree>
+  </p:cSld>
+  <p:clrMapOvr>
+    <a:masterClrMapping/>
+  </p:clrMapOvr>
+</p:sld>
+</file>
+
+<file path=ppt/slides/slide15.xml><?xml version="1.0" encoding="utf-8"?>
+<p:sld xmlns:a="http://schemas.openxmlformats.org/drawingml/2006/main" xmlns:p="http://schemas.openxmlformats.org/presentationml/2006/main" xmlns:r="http://schemas.openxmlformats.org/officeDocument/2006/relationships">
+  <p:cSld>
+    <p:bg>
+      <p:bgPr>
+        <a:solidFill>
+          <a:srgbClr val="FFFFFF"/>
+        </a:solidFill>
+        <a:effectLst/>
+      </p:bgPr>
+    </p:bg>
+    <p:spTree>
+      <p:nvGrpSpPr>
+        <p:cNvPr id="1" name=""/>
+        <p:cNvGrpSpPr/>
+        <p:nvPr/>
+      </p:nvGrpSpPr>
+      <p:grpSpPr/>
+      <p:sp>
+        <p:nvSpPr>
+          <p:cNvPr id="2" name="TextBox 1"/>
+          <p:cNvSpPr txBox="1"/>
+          <p:nvPr/>
+        </p:nvSpPr>
+        <p:spPr>
+          <a:xfrm>
+            <a:off x="548640" y="320040"/>
+            <a:ext cx="11094415" cy="274320"/>
+          </a:xfrm>
+          <a:prstGeom prst="rect">
+            <a:avLst/>
+          </a:prstGeom>
+          <a:noFill/>
+        </p:spPr>
+        <p:txBody>
+          <a:bodyPr wrap="square" anchor="t" lIns="0" rIns="0" tIns="0" bIns="0"/>
+          <a:lstStyle/>
+          <a:p>
+            <a:pPr algn="l"/>
+            <a:r>
+              <a:rPr sz="1100" b="1" i="0">
+                <a:solidFill>
+                  <a:srgbClr val="54595D"/>
+                </a:solidFill>
+                <a:latin typeface="Calibri"/>
+              </a:rPr>
+              <a:t>CORE COMPONENT  ·  Core Paper 2</a:t>
+            </a:r>
+          </a:p>
+        </p:txBody>
+      </p:sp>
+      <p:sp>
+        <p:nvSpPr>
+          <p:cNvPr id="3" name="TextBox 2"/>
+          <p:cNvSpPr txBox="1"/>
+          <p:nvPr/>
+        </p:nvSpPr>
+        <p:spPr>
+          <a:xfrm>
+            <a:off x="548640" y="566928"/>
+            <a:ext cx="11094415" cy="822960"/>
+          </a:xfrm>
+          <a:prstGeom prst="rect">
+            <a:avLst/>
+          </a:prstGeom>
+          <a:noFill/>
+        </p:spPr>
+        <p:txBody>
+          <a:bodyPr wrap="square" anchor="ctr" lIns="0" rIns="0" tIns="0" bIns="0"/>
+          <a:lstStyle/>
+          <a:p>
+            <a:pPr algn="l"/>
+            <a:r>
+              <a:rPr sz="3200" b="1" i="0">
+                <a:solidFill>
+                  <a:srgbClr val="03306E"/>
+                </a:solidFill>
+                <a:latin typeface="Cambria"/>
+              </a:rPr>
+              <a:t>Activity: Pitch a feature</a:t>
+            </a:r>
+          </a:p>
+        </p:txBody>
+      </p:sp>
+      <p:sp>
+        <p:nvSpPr>
+          <p:cNvPr id="4" name="TextBox 3"/>
+          <p:cNvSpPr txBox="1"/>
+          <p:nvPr/>
+        </p:nvSpPr>
+        <p:spPr>
+          <a:xfrm>
+            <a:off x="548640" y="6446520"/>
+            <a:ext cx="8229600" cy="274320"/>
+          </a:xfrm>
+          <a:prstGeom prst="rect">
+            <a:avLst/>
+          </a:prstGeom>
+          <a:noFill/>
+        </p:spPr>
+        <p:txBody>
+          <a:bodyPr wrap="square" anchor="t" lIns="0" rIns="0" tIns="0" bIns="0"/>
+          <a:lstStyle/>
+          <a:p>
+            <a:pPr algn="l"/>
+            <a:r>
+              <a:rPr sz="1000" b="0" i="0">
+                <a:solidFill>
+                  <a:srgbClr val="54595D"/>
+                </a:solidFill>
+                <a:latin typeface="Calibri"/>
+              </a:rPr>
+              <a:t>Digital Software Development T Level  ·  The Business Context</a:t>
+            </a:r>
+          </a:p>
+        </p:txBody>
+      </p:sp>
+      <p:sp>
+        <p:nvSpPr>
+          <p:cNvPr id="5" name="TextBox 4"/>
+          <p:cNvSpPr txBox="1"/>
+          <p:nvPr/>
+        </p:nvSpPr>
+        <p:spPr>
+          <a:xfrm>
+            <a:off x="10728655" y="6446520"/>
+            <a:ext cx="914400" cy="274320"/>
+          </a:xfrm>
+          <a:prstGeom prst="rect">
+            <a:avLst/>
+          </a:prstGeom>
+          <a:noFill/>
+        </p:spPr>
+        <p:txBody>
+          <a:bodyPr wrap="square" anchor="t" lIns="0" rIns="0" tIns="0" bIns="0"/>
+          <a:lstStyle/>
+          <a:p>
+            <a:pPr algn="r"/>
+            <a:r>
+              <a:rPr sz="1000" b="0" i="0">
+                <a:solidFill>
+                  <a:srgbClr val="54595D"/>
+                </a:solidFill>
+                <a:latin typeface="Calibri"/>
+              </a:rPr>
+              <a:t>15</a:t>
+            </a:r>
+          </a:p>
+        </p:txBody>
+      </p:sp>
+      <p:sp>
+        <p:nvSpPr>
+          <p:cNvPr id="6" name="Rounded Rectangle 5"/>
+          <p:cNvSpPr/>
+          <p:nvPr/>
+        </p:nvSpPr>
+        <p:spPr>
+          <a:xfrm>
+            <a:off x="548640" y="1508760"/>
+            <a:ext cx="2011680" cy="457200"/>
+          </a:xfrm>
+          <a:prstGeom prst="roundRect">
+            <a:avLst>
+              <a:gd name="adj" fmla="val 50000"/>
+            </a:avLst>
+          </a:prstGeom>
+          <a:solidFill>
+            <a:srgbClr val="F2B705"/>
+          </a:solidFill>
+          <a:ln>
+            <a:noFill/>
+          </a:ln>
+          <a:effectLst/>
+        </p:spPr>
+        <p:style>
+          <a:lnRef idx="1">
+            <a:schemeClr val="accent1"/>
+          </a:lnRef>
+          <a:fillRef idx="3">
+            <a:schemeClr val="accent1"/>
+          </a:fillRef>
+          <a:effectRef idx="2">
+            <a:schemeClr val="accent1"/>
+          </a:effectRef>
+          <a:fontRef idx="minor">
+            <a:schemeClr val="lt1"/>
+          </a:fontRef>
+        </p:style>
+        <p:txBody>
+          <a:bodyPr rtlCol="0" anchor="ctr"/>
+          <a:lstStyle/>
+          <a:p/>
+        </p:txBody>
+      </p:sp>
+      <p:sp>
+        <p:nvSpPr>
+          <p:cNvPr id="7" name="TextBox 6"/>
+          <p:cNvSpPr txBox="1"/>
+          <p:nvPr/>
+        </p:nvSpPr>
+        <p:spPr>
+          <a:xfrm>
+            <a:off x="548640" y="1508760"/>
+            <a:ext cx="2011680" cy="457200"/>
+          </a:xfrm>
+          <a:prstGeom prst="rect">
+            <a:avLst/>
+          </a:prstGeom>
+          <a:noFill/>
+        </p:spPr>
+        <p:txBody>
+          <a:bodyPr wrap="square" anchor="ctr" lIns="0" rIns="0" tIns="0" bIns="0"/>
+          <a:lstStyle/>
+          <a:p>
+            <a:pPr algn="ctr"/>
+            <a:r>
+              <a:rPr sz="1400" b="1" i="0">
+                <a:solidFill>
+                  <a:srgbClr val="202122"/>
+                </a:solidFill>
+                <a:latin typeface="Calibri"/>
+              </a:rPr>
+              <a:t>20 minutes</a:t>
+            </a:r>
+          </a:p>
+        </p:txBody>
+      </p:sp>
+      <p:sp>
+        <p:nvSpPr>
+          <p:cNvPr id="8" name="TextBox 7"/>
+          <p:cNvSpPr txBox="1"/>
+          <p:nvPr/>
+        </p:nvSpPr>
+        <p:spPr>
+          <a:xfrm>
+            <a:off x="2743200" y="1508760"/>
+            <a:ext cx="4754880" cy="457200"/>
+          </a:xfrm>
+          <a:prstGeom prst="rect">
+            <a:avLst/>
+          </a:prstGeom>
+          <a:noFill/>
+        </p:spPr>
+        <p:txBody>
+          <a:bodyPr wrap="square" anchor="ctr" lIns="0" rIns="0" tIns="0" bIns="0"/>
+          <a:lstStyle/>
+          <a:p>
+            <a:pPr algn="l"/>
+            <a:r>
+              <a:rPr sz="1400" b="0" i="1">
+                <a:solidFill>
+                  <a:srgbClr val="54595D"/>
+                </a:solidFill>
+                <a:latin typeface="Calibri"/>
+              </a:rPr>
+              <a:t>Pairs</a:t>
+            </a:r>
+          </a:p>
+        </p:txBody>
+      </p:sp>
+      <p:sp>
+        <p:nvSpPr>
+          <p:cNvPr id="9" name="Oval 8"/>
+          <p:cNvSpPr/>
+          <p:nvPr/>
+        </p:nvSpPr>
+        <p:spPr>
+          <a:xfrm>
+            <a:off x="548640" y="2482596"/>
+            <a:ext cx="384048" cy="384048"/>
+          </a:xfrm>
+          <a:prstGeom prst="ellipse">
+            <a:avLst/>
+          </a:prstGeom>
+          <a:solidFill>
+            <a:srgbClr val="0645AD"/>
+          </a:solidFill>
+          <a:ln>
+            <a:noFill/>
+          </a:ln>
+          <a:effectLst/>
+        </p:spPr>
+        <p:style>
+          <a:lnRef idx="1">
+            <a:schemeClr val="accent1"/>
+          </a:lnRef>
+          <a:fillRef idx="3">
+            <a:schemeClr val="accent1"/>
+          </a:fillRef>
+          <a:effectRef idx="2">
+            <a:schemeClr val="accent1"/>
+          </a:effectRef>
+          <a:fontRef idx="minor">
+            <a:schemeClr val="lt1"/>
+          </a:fontRef>
+        </p:style>
+        <p:txBody>
+          <a:bodyPr rtlCol="0" anchor="ctr" lIns="0" rIns="0" tIns="0" bIns="0"/>
+          <a:lstStyle/>
+          <a:p>
+            <a:pPr algn="ctr"/>
+            <a:r>
+              <a:rPr sz="1300" b="1">
+                <a:solidFill>
+                  <a:srgbClr val="FFFFFF"/>
+                </a:solidFill>
+                <a:latin typeface="Calibri"/>
+              </a:rPr>
+              <a:t>1</a:t>
+            </a:r>
+          </a:p>
+        </p:txBody>
+      </p:sp>
+      <p:sp>
+        <p:nvSpPr>
+          <p:cNvPr id="10" name="TextBox 9"/>
+          <p:cNvSpPr txBox="1"/>
+          <p:nvPr/>
+        </p:nvSpPr>
+        <p:spPr>
+          <a:xfrm>
+            <a:off x="1143000" y="2240280"/>
+            <a:ext cx="5943600" cy="868680"/>
+          </a:xfrm>
+          <a:prstGeom prst="rect">
+            <a:avLst/>
+          </a:prstGeom>
+          <a:noFill/>
+        </p:spPr>
+        <p:txBody>
+          <a:bodyPr wrap="square" anchor="ctr" lIns="0" rIns="0" tIns="0" bIns="0"/>
+          <a:lstStyle/>
+          <a:p>
+            <a:pPr algn="l"/>
+            <a:r>
+              <a:rPr sz="1700" b="0" i="0">
+                <a:solidFill>
+                  <a:srgbClr val="202122"/>
+                </a:solidFill>
+                <a:latin typeface="Calibri"/>
+              </a:rPr>
+              <a:t>Choose a local business and a software feature that would help it.</a:t>
+            </a:r>
+          </a:p>
+        </p:txBody>
+      </p:sp>
+      <p:sp>
+        <p:nvSpPr>
+          <p:cNvPr id="11" name="Oval 10"/>
+          <p:cNvSpPr/>
+          <p:nvPr/>
+        </p:nvSpPr>
+        <p:spPr>
+          <a:xfrm>
+            <a:off x="548640" y="3461004"/>
+            <a:ext cx="384048" cy="384048"/>
+          </a:xfrm>
+          <a:prstGeom prst="ellipse">
+            <a:avLst/>
+          </a:prstGeom>
+          <a:solidFill>
+            <a:srgbClr val="0645AD"/>
+          </a:solidFill>
+          <a:ln>
+            <a:noFill/>
+          </a:ln>
+          <a:effectLst/>
+        </p:spPr>
+        <p:style>
+          <a:lnRef idx="1">
+            <a:schemeClr val="accent1"/>
+          </a:lnRef>
+          <a:fillRef idx="3">
+            <a:schemeClr val="accent1"/>
+          </a:fillRef>
+          <a:effectRef idx="2">
+            <a:schemeClr val="accent1"/>
+          </a:effectRef>
+          <a:fontRef idx="minor">
+            <a:schemeClr val="lt1"/>
+          </a:fontRef>
+        </p:style>
+        <p:txBody>
+          <a:bodyPr rtlCol="0" anchor="ctr" lIns="0" rIns="0" tIns="0" bIns="0"/>
+          <a:lstStyle/>
+          <a:p>
+            <a:pPr algn="ctr"/>
+            <a:r>
+              <a:rPr sz="1300" b="1">
+                <a:solidFill>
+                  <a:srgbClr val="FFFFFF"/>
+                </a:solidFill>
+                <a:latin typeface="Calibri"/>
+              </a:rPr>
+              <a:t>2</a:t>
+            </a:r>
+          </a:p>
+        </p:txBody>
+      </p:sp>
+      <p:sp>
+        <p:nvSpPr>
+          <p:cNvPr id="12" name="TextBox 11"/>
+          <p:cNvSpPr txBox="1"/>
+          <p:nvPr/>
+        </p:nvSpPr>
+        <p:spPr>
+          <a:xfrm>
+            <a:off x="1143000" y="3218688"/>
+            <a:ext cx="5943600" cy="868680"/>
+          </a:xfrm>
+          <a:prstGeom prst="rect">
+            <a:avLst/>
+          </a:prstGeom>
+          <a:noFill/>
+        </p:spPr>
+        <p:txBody>
+          <a:bodyPr wrap="square" anchor="ctr" lIns="0" rIns="0" tIns="0" bIns="0"/>
+          <a:lstStyle/>
+          <a:p>
+            <a:pPr algn="l"/>
+            <a:r>
+              <a:rPr sz="1700" b="0" i="0">
+                <a:solidFill>
+                  <a:srgbClr val="202122"/>
+                </a:solidFill>
+                <a:latin typeface="Calibri"/>
+              </a:rPr>
+              <a:t>Identify which business area gains value and how.</a:t>
+            </a:r>
+          </a:p>
+        </p:txBody>
+      </p:sp>
+      <p:sp>
+        <p:nvSpPr>
+          <p:cNvPr id="13" name="Oval 12"/>
+          <p:cNvSpPr/>
+          <p:nvPr/>
+        </p:nvSpPr>
+        <p:spPr>
+          <a:xfrm>
+            <a:off x="548640" y="4439412"/>
+            <a:ext cx="384048" cy="384048"/>
+          </a:xfrm>
+          <a:prstGeom prst="ellipse">
+            <a:avLst/>
+          </a:prstGeom>
+          <a:solidFill>
+            <a:srgbClr val="0645AD"/>
+          </a:solidFill>
+          <a:ln>
+            <a:noFill/>
+          </a:ln>
+          <a:effectLst/>
+        </p:spPr>
+        <p:style>
+          <a:lnRef idx="1">
+            <a:schemeClr val="accent1"/>
+          </a:lnRef>
+          <a:fillRef idx="3">
+            <a:schemeClr val="accent1"/>
+          </a:fillRef>
+          <a:effectRef idx="2">
+            <a:schemeClr val="accent1"/>
+          </a:effectRef>
+          <a:fontRef idx="minor">
+            <a:schemeClr val="lt1"/>
+          </a:fontRef>
+        </p:style>
+        <p:txBody>
+          <a:bodyPr rtlCol="0" anchor="ctr" lIns="0" rIns="0" tIns="0" bIns="0"/>
+          <a:lstStyle/>
+          <a:p>
+            <a:pPr algn="ctr"/>
+            <a:r>
+              <a:rPr sz="1300" b="1">
+                <a:solidFill>
+                  <a:srgbClr val="FFFFFF"/>
+                </a:solidFill>
+                <a:latin typeface="Calibri"/>
+              </a:rPr>
+              <a:t>3</a:t>
+            </a:r>
+          </a:p>
+        </p:txBody>
+      </p:sp>
+      <p:sp>
+        <p:nvSpPr>
+          <p:cNvPr id="14" name="TextBox 13"/>
+          <p:cNvSpPr txBox="1"/>
+          <p:nvPr/>
+        </p:nvSpPr>
+        <p:spPr>
+          <a:xfrm>
+            <a:off x="1143000" y="4197096"/>
+            <a:ext cx="5943600" cy="868680"/>
+          </a:xfrm>
+          <a:prstGeom prst="rect">
+            <a:avLst/>
+          </a:prstGeom>
+          <a:noFill/>
+        </p:spPr>
+        <p:txBody>
+          <a:bodyPr wrap="square" anchor="ctr" lIns="0" rIns="0" tIns="0" bIns="0"/>
+          <a:lstStyle/>
+          <a:p>
+            <a:pPr algn="l"/>
+            <a:r>
+              <a:rPr sz="1700" b="0" i="0">
+                <a:solidFill>
+                  <a:srgbClr val="202122"/>
+                </a:solidFill>
+                <a:latin typeface="Calibri"/>
+              </a:rPr>
+              <a:t>List the stakeholders affected.</a:t>
+            </a:r>
+          </a:p>
+        </p:txBody>
+      </p:sp>
+      <p:sp>
+        <p:nvSpPr>
+          <p:cNvPr id="15" name="Oval 14"/>
+          <p:cNvSpPr/>
+          <p:nvPr/>
+        </p:nvSpPr>
+        <p:spPr>
+          <a:xfrm>
+            <a:off x="548640" y="5417820"/>
+            <a:ext cx="384048" cy="384048"/>
+          </a:xfrm>
+          <a:prstGeom prst="ellipse">
+            <a:avLst/>
+          </a:prstGeom>
+          <a:solidFill>
+            <a:srgbClr val="0645AD"/>
+          </a:solidFill>
+          <a:ln>
+            <a:noFill/>
+          </a:ln>
+          <a:effectLst/>
+        </p:spPr>
+        <p:style>
+          <a:lnRef idx="1">
+            <a:schemeClr val="accent1"/>
+          </a:lnRef>
+          <a:fillRef idx="3">
+            <a:schemeClr val="accent1"/>
+          </a:fillRef>
+          <a:effectRef idx="2">
+            <a:schemeClr val="accent1"/>
+          </a:effectRef>
+          <a:fontRef idx="minor">
+            <a:schemeClr val="lt1"/>
+          </a:fontRef>
+        </p:style>
+        <p:txBody>
+          <a:bodyPr rtlCol="0" anchor="ctr" lIns="0" rIns="0" tIns="0" bIns="0"/>
+          <a:lstStyle/>
+          <a:p>
+            <a:pPr algn="ctr"/>
+            <a:r>
+              <a:rPr sz="1300" b="1">
+                <a:solidFill>
+                  <a:srgbClr val="FFFFFF"/>
+                </a:solidFill>
+                <a:latin typeface="Calibri"/>
+              </a:rPr>
+              <a:t>4</a:t>
+            </a:r>
+          </a:p>
+        </p:txBody>
+      </p:sp>
+      <p:sp>
+        <p:nvSpPr>
+          <p:cNvPr id="16" name="TextBox 15"/>
+          <p:cNvSpPr txBox="1"/>
+          <p:nvPr/>
+        </p:nvSpPr>
+        <p:spPr>
+          <a:xfrm>
+            <a:off x="1143000" y="5175504"/>
+            <a:ext cx="5943600" cy="868680"/>
+          </a:xfrm>
+          <a:prstGeom prst="rect">
+            <a:avLst/>
+          </a:prstGeom>
+          <a:noFill/>
+        </p:spPr>
+        <p:txBody>
+          <a:bodyPr wrap="square" anchor="ctr" lIns="0" rIns="0" tIns="0" bIns="0"/>
+          <a:lstStyle/>
+          <a:p>
+            <a:pPr algn="l"/>
+            <a:r>
+              <a:rPr sz="1700" b="0" i="0">
+                <a:solidFill>
+                  <a:srgbClr val="202122"/>
+                </a:solidFill>
+                <a:latin typeface="Calibri"/>
+              </a:rPr>
+              <a:t>Identify two risks and how you would reduce them.</a:t>
+            </a:r>
+          </a:p>
+        </p:txBody>
+      </p:sp>
+      <p:sp>
+        <p:nvSpPr>
+          <p:cNvPr id="17" name="Rounded Rectangle 16"/>
+          <p:cNvSpPr/>
+          <p:nvPr/>
+        </p:nvSpPr>
+        <p:spPr>
+          <a:xfrm>
+            <a:off x="7772400" y="1508760"/>
+            <a:ext cx="3867912" cy="4572000"/>
+          </a:xfrm>
+          <a:prstGeom prst="roundRect">
+            <a:avLst>
+              <a:gd name="adj" fmla="val 8000"/>
+            </a:avLst>
+          </a:prstGeom>
+          <a:solidFill>
+            <a:srgbClr val="EAF3FF"/>
+          </a:solidFill>
+          <a:ln>
+            <a:noFill/>
+          </a:ln>
+          <a:effectLst/>
+        </p:spPr>
+        <p:style>
+          <a:lnRef idx="1">
+            <a:schemeClr val="accent1"/>
+          </a:lnRef>
+          <a:fillRef idx="3">
+            <a:schemeClr val="accent1"/>
+          </a:fillRef>
+          <a:effectRef idx="2">
+            <a:schemeClr val="accent1"/>
+          </a:effectRef>
+          <a:fontRef idx="minor">
+            <a:schemeClr val="lt1"/>
+          </a:fontRef>
+        </p:style>
+        <p:txBody>
+          <a:bodyPr rtlCol="0" anchor="ctr"/>
+          <a:lstStyle/>
+          <a:p/>
+        </p:txBody>
+      </p:sp>
+      <p:sp>
+        <p:nvSpPr>
+          <p:cNvPr id="18" name="TextBox 17"/>
+          <p:cNvSpPr txBox="1"/>
+          <p:nvPr/>
+        </p:nvSpPr>
+        <p:spPr>
+          <a:xfrm>
+            <a:off x="8046720" y="1737360"/>
+            <a:ext cx="3291840" cy="365760"/>
+          </a:xfrm>
+          <a:prstGeom prst="rect">
+            <a:avLst/>
+          </a:prstGeom>
+          <a:noFill/>
+        </p:spPr>
+        <p:txBody>
+          <a:bodyPr wrap="square" anchor="t" lIns="0" rIns="0" tIns="0" bIns="0"/>
+          <a:lstStyle/>
+          <a:p>
+            <a:pPr algn="l"/>
+            <a:r>
+              <a:rPr sz="1300" b="1" i="0">
+                <a:solidFill>
+                  <a:srgbClr val="0645AD"/>
+                </a:solidFill>
+                <a:latin typeface="Calibri"/>
+              </a:rPr>
+              <a:t>SUCCESS CRITERIA</a:t>
+            </a:r>
+          </a:p>
+        </p:txBody>
+      </p:sp>
+      <p:sp>
+        <p:nvSpPr>
+          <p:cNvPr id="19" name="TextBox 18"/>
+          <p:cNvSpPr txBox="1"/>
+          <p:nvPr/>
+        </p:nvSpPr>
+        <p:spPr>
+          <a:xfrm>
+            <a:off x="8046720" y="2240280"/>
+            <a:ext cx="3337560" cy="3657600"/>
+          </a:xfrm>
+          <a:prstGeom prst="rect">
+            <a:avLst/>
+          </a:prstGeom>
+          <a:noFill/>
+        </p:spPr>
+        <p:txBody>
+          <a:bodyPr wrap="square" lIns="0" rIns="0" tIns="0" bIns="0">
+            <a:spAutoFit/>
+          </a:bodyPr>
+          <a:lstStyle/>
+          <a:p>
+            <a:pPr marL="274320" indent="-274320">
+              <a:spcAft>
+                <a:spcPts val="810"/>
+              </a:spcAft>
+              <a:buClr>
+                <a:srgbClr val="0645AD"/>
+              </a:buClr>
+              <a:buFont typeface="Arial"/>
+              <a:buChar char="•"/>
+            </a:pPr>
+            <a:r>
+              <a:rPr sz="1800" b="0">
+                <a:solidFill>
+                  <a:srgbClr val="202122"/>
+                </a:solidFill>
+                <a:latin typeface="Calibri"/>
+              </a:rPr>
+              <a:t>Value is specific and measurable</a:t>
+            </a:r>
+          </a:p>
+          <a:p>
+            <a:pPr marL="274320" indent="-274320">
+              <a:spcAft>
+                <a:spcPts val="810"/>
+              </a:spcAft>
+              <a:buClr>
+                <a:srgbClr val="0645AD"/>
+              </a:buClr>
+              <a:buFont typeface="Arial"/>
+              <a:buChar char="•"/>
+            </a:pPr>
+            <a:r>
+              <a:rPr sz="1800" b="0">
+                <a:solidFill>
+                  <a:srgbClr val="202122"/>
+                </a:solidFill>
+                <a:latin typeface="Calibri"/>
+              </a:rPr>
+              <a:t>Stakeholders split internal and external</a:t>
+            </a:r>
+          </a:p>
+          <a:p>
+            <a:pPr marL="274320" indent="-274320">
+              <a:spcAft>
+                <a:spcPts val="810"/>
+              </a:spcAft>
+              <a:buClr>
+                <a:srgbClr val="0645AD"/>
+              </a:buClr>
+              <a:buFont typeface="Arial"/>
+              <a:buChar char="•"/>
+            </a:pPr>
+            <a:r>
+              <a:rPr sz="1800" b="0">
+                <a:solidFill>
+                  <a:srgbClr val="202122"/>
+                </a:solidFill>
+                <a:latin typeface="Calibri"/>
+              </a:rPr>
+              <a:t>Risks are realistic</a:t>
+            </a:r>
+          </a:p>
+        </p:txBody>
+      </p:sp>
+    </p:spTree>
+  </p:cSld>
+  <p:clrMapOvr>
+    <a:masterClrMapping/>
+  </p:clrMapOvr>
+</p:sld>
+</file>
+
+<file path=ppt/slides/slide16.xml><?xml version="1.0" encoding="utf-8"?>
+<p:sld xmlns:a="http://schemas.openxmlformats.org/drawingml/2006/main" xmlns:p="http://schemas.openxmlformats.org/presentationml/2006/main" xmlns:r="http://schemas.openxmlformats.org/officeDocument/2006/relationships">
+  <p:cSld>
+    <p:bg>
+      <p:bgPr>
+        <a:solidFill>
           <a:srgbClr val="03306E"/>
         </a:solidFill>
         <a:effectLst/>
@@ -5299,22 +8898,111 @@
       </p:sp>
       <p:sp>
         <p:nvSpPr>
-          <p:cNvPr id="6" name="Rounded Rectangle 5"/>
+          <p:cNvPr id="6" name="TextBox 5"/>
+          <p:cNvSpPr txBox="1"/>
+          <p:nvPr/>
+        </p:nvSpPr>
+        <p:spPr>
+          <a:xfrm>
+            <a:off x="548640" y="1554480"/>
+            <a:ext cx="6720840" cy="4617720"/>
+          </a:xfrm>
+          <a:prstGeom prst="rect">
+            <a:avLst/>
+          </a:prstGeom>
+          <a:noFill/>
+        </p:spPr>
+        <p:txBody>
+          <a:bodyPr wrap="square" lIns="0" rIns="0" tIns="0" bIns="0">
+            <a:spAutoFit/>
+          </a:bodyPr>
+          <a:lstStyle/>
+          <a:p>
+            <a:pPr>
+              <a:spcAft>
+                <a:spcPts val="1260"/>
+              </a:spcAft>
+            </a:pPr>
+            <a:r>
+              <a:rPr sz="2100" b="0">
+                <a:solidFill>
+                  <a:srgbClr val="202122"/>
+                </a:solidFill>
+                <a:latin typeface="Calibri"/>
+              </a:rPr>
+              <a:t>Organisations provide products or services. The private sector (SMEs, large enterprises and NGOs) usually aims for profit; the public sector is run by government; the voluntary or charity sector is not for profit.</a:t>
+            </a:r>
+          </a:p>
+          <a:p>
+            <a:pPr>
+              <a:spcAft>
+                <a:spcPts val="1260"/>
+              </a:spcAft>
+            </a:pPr>
+            <a:r>
+              <a:rPr sz="2100" b="1">
+                <a:solidFill>
+                  <a:srgbClr val="202122"/>
+                </a:solidFill>
+                <a:latin typeface="Calibri"/>
+              </a:rPr>
+              <a:t>Business models describe the customer:</a:t>
+            </a:r>
+            <a:r>
+              <a:rPr sz="2100" b="0">
+                <a:solidFill>
+                  <a:srgbClr val="202122"/>
+                </a:solidFill>
+                <a:latin typeface="Calibri"/>
+              </a:rPr>
+              <a:t> B2C sells to consumers, B2B to other businesses, B2M to a mass market.</a:t>
+            </a:r>
+          </a:p>
+          <a:p>
+            <a:pPr>
+              <a:spcAft>
+                <a:spcPts val="1260"/>
+              </a:spcAft>
+            </a:pPr>
+            <a:r>
+              <a:rPr sz="2100" b="1">
+                <a:solidFill>
+                  <a:srgbClr val="202122"/>
+                </a:solidFill>
+                <a:latin typeface="Calibri"/>
+              </a:rPr>
+              <a:t>Stakeholders are everyone affected:</a:t>
+            </a:r>
+            <a:r>
+              <a:rPr sz="2100" b="0">
+                <a:solidFill>
+                  <a:srgbClr val="202122"/>
+                </a:solidFill>
+                <a:latin typeface="Calibri"/>
+              </a:rPr>
+              <a:t> internal ones (owners, directors, employees) and external ones (customers, suppliers, shareholders, investors and government). Good software meets their different needs.</a:t>
+            </a:r>
+          </a:p>
+        </p:txBody>
+      </p:sp>
+      <p:sp>
+        <p:nvSpPr>
+          <p:cNvPr id="7" name="Rounded Rectangle 6"/>
           <p:cNvSpPr/>
           <p:nvPr/>
         </p:nvSpPr>
         <p:spPr>
           <a:xfrm>
-            <a:off x="548640" y="1600200"/>
-            <a:ext cx="5410047" cy="2148840"/>
+            <a:off x="7772400" y="1554480"/>
+            <a:ext cx="3867912" cy="4526280"/>
           </a:xfrm>
           <a:prstGeom prst="roundRect">
             <a:avLst>
-              <a:gd name="adj" fmla="val 6000"/>
+              <a:gd name="adj" fmla="val 8000"/>
             </a:avLst>
           </a:prstGeom>
           <a:solidFill>
-            <a:srgbClr val="EAF3FF"/>
+            <a:srgbClr val="03306E"/>
           </a:solidFill>
           <a:ln>
             <a:noFill/>
@@ -5343,14 +9031,14 @@
       </p:sp>
       <p:sp>
         <p:nvSpPr>
-          <p:cNvPr id="7" name="Oval 6"/>
+          <p:cNvPr id="8" name="Oval 7"/>
           <p:cNvSpPr/>
           <p:nvPr/>
         </p:nvSpPr>
         <p:spPr>
           <a:xfrm>
-            <a:off x="777240" y="1828800"/>
-            <a:ext cx="457200" cy="457200"/>
+            <a:off x="8046720" y="1828800"/>
+            <a:ext cx="548640" cy="548640"/>
           </a:xfrm>
           <a:prstGeom prst="ellipse">
             <a:avLst/>
@@ -5383,60 +9071,60 @@
           <a:p>
             <a:pPr algn="ctr"/>
             <a:r>
-              <a:rPr sz="1500" b="1">
+              <a:rPr sz="1300" b="1">
                 <a:solidFill>
                   <a:srgbClr val="202122"/>
                 </a:solidFill>
                 <a:latin typeface="Calibri"/>
               </a:rPr>
-              <a:t>1</a:t>
-            </a:r>
-          </a:p>
-        </p:txBody>
-      </p:sp>
-      <p:sp>
-        <p:nvSpPr>
-          <p:cNvPr id="8" name="TextBox 7"/>
-          <p:cNvSpPr txBox="1"/>
-          <p:nvPr/>
-        </p:nvSpPr>
-        <p:spPr>
-          <a:xfrm>
-            <a:off x="1371600" y="1801368"/>
-            <a:ext cx="4404207" cy="512064"/>
-          </a:xfrm>
-          <a:prstGeom prst="rect">
-            <a:avLst/>
-          </a:prstGeom>
-          <a:noFill/>
-        </p:spPr>
-        <p:txBody>
-          <a:bodyPr wrap="square" anchor="ctr" lIns="0" rIns="0" tIns="0" bIns="0"/>
+              <a:t>e.g.</a:t>
+            </a:r>
+          </a:p>
+        </p:txBody>
+      </p:sp>
+      <p:sp>
+        <p:nvSpPr>
+          <p:cNvPr id="9" name="TextBox 8"/>
+          <p:cNvSpPr txBox="1"/>
+          <p:nvPr/>
+        </p:nvSpPr>
+        <p:spPr>
+          <a:xfrm>
+            <a:off x="8046720" y="2560320"/>
+            <a:ext cx="3291840" cy="365760"/>
+          </a:xfrm>
+          <a:prstGeom prst="rect">
+            <a:avLst/>
+          </a:prstGeom>
+          <a:noFill/>
+        </p:spPr>
+        <p:txBody>
+          <a:bodyPr wrap="square" anchor="t" lIns="0" rIns="0" tIns="0" bIns="0"/>
           <a:lstStyle/>
           <a:p>
             <a:pPr algn="l"/>
             <a:r>
-              <a:rPr sz="1900" b="1" i="0">
-                <a:solidFill>
-                  <a:srgbClr val="03306E"/>
-                </a:solidFill>
-                <a:latin typeface="Calibri"/>
-              </a:rPr>
-              <a:t>Sectors</a:t>
-            </a:r>
-          </a:p>
-        </p:txBody>
-      </p:sp>
-      <p:sp>
-        <p:nvSpPr>
-          <p:cNvPr id="9" name="TextBox 8"/>
-          <p:cNvSpPr txBox="1"/>
-          <p:nvPr/>
-        </p:nvSpPr>
-        <p:spPr>
-          <a:xfrm>
-            <a:off x="777240" y="2468880"/>
-            <a:ext cx="4952847" cy="1143000"/>
+              <a:rPr sz="1300" b="1" i="0">
+                <a:solidFill>
+                  <a:srgbClr val="A9C8F0"/>
+                </a:solidFill>
+                <a:latin typeface="Calibri"/>
+              </a:rPr>
+              <a:t>EXAMPLE</a:t>
+            </a:r>
+          </a:p>
+        </p:txBody>
+      </p:sp>
+      <p:sp>
+        <p:nvSpPr>
+          <p:cNvPr id="10" name="TextBox 9"/>
+          <p:cNvSpPr txBox="1"/>
+          <p:nvPr/>
+        </p:nvSpPr>
+        <p:spPr>
+          <a:xfrm>
+            <a:off x="8046720" y="2971800"/>
+            <a:ext cx="3291840" cy="2971800"/>
           </a:xfrm>
           <a:prstGeom prst="rect">
             <a:avLst/>
@@ -5449,502 +9137,13 @@
           <a:p>
             <a:pPr algn="l"/>
             <a:r>
-              <a:rPr sz="2000" b="0" i="0">
-                <a:solidFill>
-                  <a:srgbClr val="202122"/>
-                </a:solidFill>
-                <a:latin typeface="Calibri"/>
-              </a:rPr>
-              <a:t>Private (SME, large enterprise, NGO), public, and voluntary or charity.</a:t>
-            </a:r>
-          </a:p>
-        </p:txBody>
-      </p:sp>
-      <p:sp>
-        <p:nvSpPr>
-          <p:cNvPr id="10" name="Rounded Rectangle 9"/>
-          <p:cNvSpPr/>
-          <p:nvPr/>
-        </p:nvSpPr>
-        <p:spPr>
-          <a:xfrm>
-            <a:off x="6233007" y="1600200"/>
-            <a:ext cx="5410047" cy="2148840"/>
-          </a:xfrm>
-          <a:prstGeom prst="roundRect">
-            <a:avLst>
-              <a:gd name="adj" fmla="val 6000"/>
-            </a:avLst>
-          </a:prstGeom>
-          <a:solidFill>
-            <a:srgbClr val="EAF3FF"/>
-          </a:solidFill>
-          <a:ln>
-            <a:noFill/>
-          </a:ln>
-          <a:effectLst/>
-        </p:spPr>
-        <p:style>
-          <a:lnRef idx="1">
-            <a:schemeClr val="accent1"/>
-          </a:lnRef>
-          <a:fillRef idx="3">
-            <a:schemeClr val="accent1"/>
-          </a:fillRef>
-          <a:effectRef idx="2">
-            <a:schemeClr val="accent1"/>
-          </a:effectRef>
-          <a:fontRef idx="minor">
-            <a:schemeClr val="lt1"/>
-          </a:fontRef>
-        </p:style>
-        <p:txBody>
-          <a:bodyPr rtlCol="0" anchor="ctr"/>
-          <a:lstStyle/>
-          <a:p/>
-        </p:txBody>
-      </p:sp>
-      <p:sp>
-        <p:nvSpPr>
-          <p:cNvPr id="11" name="Oval 10"/>
-          <p:cNvSpPr/>
-          <p:nvPr/>
-        </p:nvSpPr>
-        <p:spPr>
-          <a:xfrm>
-            <a:off x="6461607" y="1828800"/>
-            <a:ext cx="457200" cy="457200"/>
-          </a:xfrm>
-          <a:prstGeom prst="ellipse">
-            <a:avLst/>
-          </a:prstGeom>
-          <a:solidFill>
-            <a:srgbClr val="F2B705"/>
-          </a:solidFill>
-          <a:ln>
-            <a:noFill/>
-          </a:ln>
-          <a:effectLst/>
-        </p:spPr>
-        <p:style>
-          <a:lnRef idx="1">
-            <a:schemeClr val="accent1"/>
-          </a:lnRef>
-          <a:fillRef idx="3">
-            <a:schemeClr val="accent1"/>
-          </a:fillRef>
-          <a:effectRef idx="2">
-            <a:schemeClr val="accent1"/>
-          </a:effectRef>
-          <a:fontRef idx="minor">
-            <a:schemeClr val="lt1"/>
-          </a:fontRef>
-        </p:style>
-        <p:txBody>
-          <a:bodyPr rtlCol="0" anchor="ctr" lIns="0" rIns="0" tIns="0" bIns="0"/>
-          <a:lstStyle/>
-          <a:p>
-            <a:pPr algn="ctr"/>
-            <a:r>
-              <a:rPr sz="1500" b="1">
-                <a:solidFill>
-                  <a:srgbClr val="202122"/>
-                </a:solidFill>
-                <a:latin typeface="Calibri"/>
-              </a:rPr>
-              <a:t>2</a:t>
-            </a:r>
-          </a:p>
-        </p:txBody>
-      </p:sp>
-      <p:sp>
-        <p:nvSpPr>
-          <p:cNvPr id="12" name="TextBox 11"/>
-          <p:cNvSpPr txBox="1"/>
-          <p:nvPr/>
-        </p:nvSpPr>
-        <p:spPr>
-          <a:xfrm>
-            <a:off x="7055967" y="1801368"/>
-            <a:ext cx="4404207" cy="512064"/>
-          </a:xfrm>
-          <a:prstGeom prst="rect">
-            <a:avLst/>
-          </a:prstGeom>
-          <a:noFill/>
-        </p:spPr>
-        <p:txBody>
-          <a:bodyPr wrap="square" anchor="ctr" lIns="0" rIns="0" tIns="0" bIns="0"/>
-          <a:lstStyle/>
-          <a:p>
-            <a:pPr algn="l"/>
-            <a:r>
-              <a:rPr sz="1900" b="1" i="0">
-                <a:solidFill>
-                  <a:srgbClr val="03306E"/>
-                </a:solidFill>
-                <a:latin typeface="Calibri"/>
-              </a:rPr>
-              <a:t>Business models</a:t>
-            </a:r>
-          </a:p>
-        </p:txBody>
-      </p:sp>
-      <p:sp>
-        <p:nvSpPr>
-          <p:cNvPr id="13" name="TextBox 12"/>
-          <p:cNvSpPr txBox="1"/>
-          <p:nvPr/>
-        </p:nvSpPr>
-        <p:spPr>
-          <a:xfrm>
-            <a:off x="6461607" y="2468880"/>
-            <a:ext cx="4952847" cy="1143000"/>
-          </a:xfrm>
-          <a:prstGeom prst="rect">
-            <a:avLst/>
-          </a:prstGeom>
-          <a:noFill/>
-        </p:spPr>
-        <p:txBody>
-          <a:bodyPr wrap="square" anchor="t" lIns="0" rIns="0" tIns="0" bIns="0"/>
-          <a:lstStyle/>
-          <a:p>
-            <a:pPr algn="l"/>
-            <a:r>
-              <a:rPr sz="2000" b="0" i="0">
-                <a:solidFill>
-                  <a:srgbClr val="202122"/>
-                </a:solidFill>
-                <a:latin typeface="Calibri"/>
-              </a:rPr>
-              <a:t>B2C sells to consumers, B2B to businesses, B2M to a mass market.</a:t>
-            </a:r>
-          </a:p>
-        </p:txBody>
-      </p:sp>
-      <p:sp>
-        <p:nvSpPr>
-          <p:cNvPr id="14" name="Rounded Rectangle 13"/>
-          <p:cNvSpPr/>
-          <p:nvPr/>
-        </p:nvSpPr>
-        <p:spPr>
-          <a:xfrm>
-            <a:off x="548640" y="4023360"/>
-            <a:ext cx="5410047" cy="2148840"/>
-          </a:xfrm>
-          <a:prstGeom prst="roundRect">
-            <a:avLst>
-              <a:gd name="adj" fmla="val 6000"/>
-            </a:avLst>
-          </a:prstGeom>
-          <a:solidFill>
-            <a:srgbClr val="EAF3FF"/>
-          </a:solidFill>
-          <a:ln>
-            <a:noFill/>
-          </a:ln>
-          <a:effectLst/>
-        </p:spPr>
-        <p:style>
-          <a:lnRef idx="1">
-            <a:schemeClr val="accent1"/>
-          </a:lnRef>
-          <a:fillRef idx="3">
-            <a:schemeClr val="accent1"/>
-          </a:fillRef>
-          <a:effectRef idx="2">
-            <a:schemeClr val="accent1"/>
-          </a:effectRef>
-          <a:fontRef idx="minor">
-            <a:schemeClr val="lt1"/>
-          </a:fontRef>
-        </p:style>
-        <p:txBody>
-          <a:bodyPr rtlCol="0" anchor="ctr"/>
-          <a:lstStyle/>
-          <a:p/>
-        </p:txBody>
-      </p:sp>
-      <p:sp>
-        <p:nvSpPr>
-          <p:cNvPr id="15" name="Oval 14"/>
-          <p:cNvSpPr/>
-          <p:nvPr/>
-        </p:nvSpPr>
-        <p:spPr>
-          <a:xfrm>
-            <a:off x="777240" y="4251960"/>
-            <a:ext cx="457200" cy="457200"/>
-          </a:xfrm>
-          <a:prstGeom prst="ellipse">
-            <a:avLst/>
-          </a:prstGeom>
-          <a:solidFill>
-            <a:srgbClr val="F2B705"/>
-          </a:solidFill>
-          <a:ln>
-            <a:noFill/>
-          </a:ln>
-          <a:effectLst/>
-        </p:spPr>
-        <p:style>
-          <a:lnRef idx="1">
-            <a:schemeClr val="accent1"/>
-          </a:lnRef>
-          <a:fillRef idx="3">
-            <a:schemeClr val="accent1"/>
-          </a:fillRef>
-          <a:effectRef idx="2">
-            <a:schemeClr val="accent1"/>
-          </a:effectRef>
-          <a:fontRef idx="minor">
-            <a:schemeClr val="lt1"/>
-          </a:fontRef>
-        </p:style>
-        <p:txBody>
-          <a:bodyPr rtlCol="0" anchor="ctr" lIns="0" rIns="0" tIns="0" bIns="0"/>
-          <a:lstStyle/>
-          <a:p>
-            <a:pPr algn="ctr"/>
-            <a:r>
-              <a:rPr sz="1500" b="1">
-                <a:solidFill>
-                  <a:srgbClr val="202122"/>
-                </a:solidFill>
-                <a:latin typeface="Calibri"/>
-              </a:rPr>
-              <a:t>3</a:t>
-            </a:r>
-          </a:p>
-        </p:txBody>
-      </p:sp>
-      <p:sp>
-        <p:nvSpPr>
-          <p:cNvPr id="16" name="TextBox 15"/>
-          <p:cNvSpPr txBox="1"/>
-          <p:nvPr/>
-        </p:nvSpPr>
-        <p:spPr>
-          <a:xfrm>
-            <a:off x="1371600" y="4224528"/>
-            <a:ext cx="4404207" cy="512064"/>
-          </a:xfrm>
-          <a:prstGeom prst="rect">
-            <a:avLst/>
-          </a:prstGeom>
-          <a:noFill/>
-        </p:spPr>
-        <p:txBody>
-          <a:bodyPr wrap="square" anchor="ctr" lIns="0" rIns="0" tIns="0" bIns="0"/>
-          <a:lstStyle/>
-          <a:p>
-            <a:pPr algn="l"/>
-            <a:r>
-              <a:rPr sz="1900" b="1" i="0">
-                <a:solidFill>
-                  <a:srgbClr val="03306E"/>
-                </a:solidFill>
-                <a:latin typeface="Calibri"/>
-              </a:rPr>
-              <a:t>Internal stakeholders</a:t>
-            </a:r>
-          </a:p>
-        </p:txBody>
-      </p:sp>
-      <p:sp>
-        <p:nvSpPr>
-          <p:cNvPr id="17" name="TextBox 16"/>
-          <p:cNvSpPr txBox="1"/>
-          <p:nvPr/>
-        </p:nvSpPr>
-        <p:spPr>
-          <a:xfrm>
-            <a:off x="777240" y="4892040"/>
-            <a:ext cx="4952847" cy="1143000"/>
-          </a:xfrm>
-          <a:prstGeom prst="rect">
-            <a:avLst/>
-          </a:prstGeom>
-          <a:noFill/>
-        </p:spPr>
-        <p:txBody>
-          <a:bodyPr wrap="square" anchor="t" lIns="0" rIns="0" tIns="0" bIns="0"/>
-          <a:lstStyle/>
-          <a:p>
-            <a:pPr algn="l"/>
-            <a:r>
-              <a:rPr sz="2000" b="0" i="0">
-                <a:solidFill>
-                  <a:srgbClr val="202122"/>
-                </a:solidFill>
-                <a:latin typeface="Calibri"/>
-              </a:rPr>
-              <a:t>Owners, directors and employees.</a:t>
-            </a:r>
-          </a:p>
-        </p:txBody>
-      </p:sp>
-      <p:sp>
-        <p:nvSpPr>
-          <p:cNvPr id="18" name="Rounded Rectangle 17"/>
-          <p:cNvSpPr/>
-          <p:nvPr/>
-        </p:nvSpPr>
-        <p:spPr>
-          <a:xfrm>
-            <a:off x="6233007" y="4023360"/>
-            <a:ext cx="5410047" cy="2148840"/>
-          </a:xfrm>
-          <a:prstGeom prst="roundRect">
-            <a:avLst>
-              <a:gd name="adj" fmla="val 6000"/>
-            </a:avLst>
-          </a:prstGeom>
-          <a:solidFill>
-            <a:srgbClr val="EAF3FF"/>
-          </a:solidFill>
-          <a:ln>
-            <a:noFill/>
-          </a:ln>
-          <a:effectLst/>
-        </p:spPr>
-        <p:style>
-          <a:lnRef idx="1">
-            <a:schemeClr val="accent1"/>
-          </a:lnRef>
-          <a:fillRef idx="3">
-            <a:schemeClr val="accent1"/>
-          </a:fillRef>
-          <a:effectRef idx="2">
-            <a:schemeClr val="accent1"/>
-          </a:effectRef>
-          <a:fontRef idx="minor">
-            <a:schemeClr val="lt1"/>
-          </a:fontRef>
-        </p:style>
-        <p:txBody>
-          <a:bodyPr rtlCol="0" anchor="ctr"/>
-          <a:lstStyle/>
-          <a:p/>
-        </p:txBody>
-      </p:sp>
-      <p:sp>
-        <p:nvSpPr>
-          <p:cNvPr id="19" name="Oval 18"/>
-          <p:cNvSpPr/>
-          <p:nvPr/>
-        </p:nvSpPr>
-        <p:spPr>
-          <a:xfrm>
-            <a:off x="6461607" y="4251960"/>
-            <a:ext cx="457200" cy="457200"/>
-          </a:xfrm>
-          <a:prstGeom prst="ellipse">
-            <a:avLst/>
-          </a:prstGeom>
-          <a:solidFill>
-            <a:srgbClr val="F2B705"/>
-          </a:solidFill>
-          <a:ln>
-            <a:noFill/>
-          </a:ln>
-          <a:effectLst/>
-        </p:spPr>
-        <p:style>
-          <a:lnRef idx="1">
-            <a:schemeClr val="accent1"/>
-          </a:lnRef>
-          <a:fillRef idx="3">
-            <a:schemeClr val="accent1"/>
-          </a:fillRef>
-          <a:effectRef idx="2">
-            <a:schemeClr val="accent1"/>
-          </a:effectRef>
-          <a:fontRef idx="minor">
-            <a:schemeClr val="lt1"/>
-          </a:fontRef>
-        </p:style>
-        <p:txBody>
-          <a:bodyPr rtlCol="0" anchor="ctr" lIns="0" rIns="0" tIns="0" bIns="0"/>
-          <a:lstStyle/>
-          <a:p>
-            <a:pPr algn="ctr"/>
-            <a:r>
-              <a:rPr sz="1500" b="1">
-                <a:solidFill>
-                  <a:srgbClr val="202122"/>
-                </a:solidFill>
-                <a:latin typeface="Calibri"/>
-              </a:rPr>
-              <a:t>4</a:t>
-            </a:r>
-          </a:p>
-        </p:txBody>
-      </p:sp>
-      <p:sp>
-        <p:nvSpPr>
-          <p:cNvPr id="20" name="TextBox 19"/>
-          <p:cNvSpPr txBox="1"/>
-          <p:nvPr/>
-        </p:nvSpPr>
-        <p:spPr>
-          <a:xfrm>
-            <a:off x="7055967" y="4224528"/>
-            <a:ext cx="4404207" cy="512064"/>
-          </a:xfrm>
-          <a:prstGeom prst="rect">
-            <a:avLst/>
-          </a:prstGeom>
-          <a:noFill/>
-        </p:spPr>
-        <p:txBody>
-          <a:bodyPr wrap="square" anchor="ctr" lIns="0" rIns="0" tIns="0" bIns="0"/>
-          <a:lstStyle/>
-          <a:p>
-            <a:pPr algn="l"/>
-            <a:r>
-              <a:rPr sz="1900" b="1" i="0">
-                <a:solidFill>
-                  <a:srgbClr val="03306E"/>
-                </a:solidFill>
-                <a:latin typeface="Calibri"/>
-              </a:rPr>
-              <a:t>External stakeholders</a:t>
-            </a:r>
-          </a:p>
-        </p:txBody>
-      </p:sp>
-      <p:sp>
-        <p:nvSpPr>
-          <p:cNvPr id="21" name="TextBox 20"/>
-          <p:cNvSpPr txBox="1"/>
-          <p:nvPr/>
-        </p:nvSpPr>
-        <p:spPr>
-          <a:xfrm>
-            <a:off x="6461607" y="4892040"/>
-            <a:ext cx="4952847" cy="1143000"/>
-          </a:xfrm>
-          <a:prstGeom prst="rect">
-            <a:avLst/>
-          </a:prstGeom>
-          <a:noFill/>
-        </p:spPr>
-        <p:txBody>
-          <a:bodyPr wrap="square" anchor="t" lIns="0" rIns="0" tIns="0" bIns="0"/>
-          <a:lstStyle/>
-          <a:p>
-            <a:pPr algn="l"/>
-            <a:r>
-              <a:rPr sz="2000" b="0" i="0">
-                <a:solidFill>
-                  <a:srgbClr val="202122"/>
-                </a:solidFill>
-                <a:latin typeface="Calibri"/>
-              </a:rPr>
-              <a:t>Customers, suppliers, shareholders, outsourced services, investors, government.</a:t>
+              <a:rPr sz="1900" b="0" i="0">
+                <a:solidFill>
+                  <a:srgbClr val="FFFFFF"/>
+                </a:solidFill>
+                <a:latin typeface="Cambria"/>
+              </a:rPr>
+              <a:t>A company selling accounting software to small firms is private sector and B2B.</a:t>
             </a:r>
           </a:p>
         </p:txBody>
@@ -6036,7 +9235,7 @@
                 </a:solidFill>
                 <a:latin typeface="Cambria"/>
               </a:rPr>
-              <a:t>Digital value across the business</a:t>
+              <a:t>The business environment</a:t>
             </a:r>
           </a:p>
         </p:txBody>
@@ -6103,6 +9302,1265 @@
                 <a:latin typeface="Calibri"/>
               </a:rPr>
               <a:t>4</a:t>
+            </a:r>
+          </a:p>
+        </p:txBody>
+      </p:sp>
+      <p:sp>
+        <p:nvSpPr>
+          <p:cNvPr id="6" name="Rounded Rectangle 5"/>
+          <p:cNvSpPr/>
+          <p:nvPr/>
+        </p:nvSpPr>
+        <p:spPr>
+          <a:xfrm>
+            <a:off x="548640" y="1600200"/>
+            <a:ext cx="5410047" cy="2148840"/>
+          </a:xfrm>
+          <a:prstGeom prst="roundRect">
+            <a:avLst>
+              <a:gd name="adj" fmla="val 6000"/>
+            </a:avLst>
+          </a:prstGeom>
+          <a:solidFill>
+            <a:srgbClr val="EAF3FF"/>
+          </a:solidFill>
+          <a:ln>
+            <a:noFill/>
+          </a:ln>
+          <a:effectLst/>
+        </p:spPr>
+        <p:style>
+          <a:lnRef idx="1">
+            <a:schemeClr val="accent1"/>
+          </a:lnRef>
+          <a:fillRef idx="3">
+            <a:schemeClr val="accent1"/>
+          </a:fillRef>
+          <a:effectRef idx="2">
+            <a:schemeClr val="accent1"/>
+          </a:effectRef>
+          <a:fontRef idx="minor">
+            <a:schemeClr val="lt1"/>
+          </a:fontRef>
+        </p:style>
+        <p:txBody>
+          <a:bodyPr rtlCol="0" anchor="ctr"/>
+          <a:lstStyle/>
+          <a:p/>
+        </p:txBody>
+      </p:sp>
+      <p:sp>
+        <p:nvSpPr>
+          <p:cNvPr id="7" name="Oval 6"/>
+          <p:cNvSpPr/>
+          <p:nvPr/>
+        </p:nvSpPr>
+        <p:spPr>
+          <a:xfrm>
+            <a:off x="777240" y="1828800"/>
+            <a:ext cx="457200" cy="457200"/>
+          </a:xfrm>
+          <a:prstGeom prst="ellipse">
+            <a:avLst/>
+          </a:prstGeom>
+          <a:solidFill>
+            <a:srgbClr val="F2B705"/>
+          </a:solidFill>
+          <a:ln>
+            <a:noFill/>
+          </a:ln>
+          <a:effectLst/>
+        </p:spPr>
+        <p:style>
+          <a:lnRef idx="1">
+            <a:schemeClr val="accent1"/>
+          </a:lnRef>
+          <a:fillRef idx="3">
+            <a:schemeClr val="accent1"/>
+          </a:fillRef>
+          <a:effectRef idx="2">
+            <a:schemeClr val="accent1"/>
+          </a:effectRef>
+          <a:fontRef idx="minor">
+            <a:schemeClr val="lt1"/>
+          </a:fontRef>
+        </p:style>
+        <p:txBody>
+          <a:bodyPr rtlCol="0" anchor="ctr" lIns="0" rIns="0" tIns="0" bIns="0"/>
+          <a:lstStyle/>
+          <a:p>
+            <a:pPr algn="ctr"/>
+            <a:r>
+              <a:rPr sz="1500" b="1">
+                <a:solidFill>
+                  <a:srgbClr val="202122"/>
+                </a:solidFill>
+                <a:latin typeface="Calibri"/>
+              </a:rPr>
+              <a:t>1</a:t>
+            </a:r>
+          </a:p>
+        </p:txBody>
+      </p:sp>
+      <p:sp>
+        <p:nvSpPr>
+          <p:cNvPr id="8" name="TextBox 7"/>
+          <p:cNvSpPr txBox="1"/>
+          <p:nvPr/>
+        </p:nvSpPr>
+        <p:spPr>
+          <a:xfrm>
+            <a:off x="1371600" y="1801368"/>
+            <a:ext cx="4404207" cy="512064"/>
+          </a:xfrm>
+          <a:prstGeom prst="rect">
+            <a:avLst/>
+          </a:prstGeom>
+          <a:noFill/>
+        </p:spPr>
+        <p:txBody>
+          <a:bodyPr wrap="square" anchor="ctr" lIns="0" rIns="0" tIns="0" bIns="0"/>
+          <a:lstStyle/>
+          <a:p>
+            <a:pPr algn="l"/>
+            <a:r>
+              <a:rPr sz="1900" b="1" i="0">
+                <a:solidFill>
+                  <a:srgbClr val="03306E"/>
+                </a:solidFill>
+                <a:latin typeface="Calibri"/>
+              </a:rPr>
+              <a:t>Sectors</a:t>
+            </a:r>
+          </a:p>
+        </p:txBody>
+      </p:sp>
+      <p:sp>
+        <p:nvSpPr>
+          <p:cNvPr id="9" name="TextBox 8"/>
+          <p:cNvSpPr txBox="1"/>
+          <p:nvPr/>
+        </p:nvSpPr>
+        <p:spPr>
+          <a:xfrm>
+            <a:off x="777240" y="2468880"/>
+            <a:ext cx="4952847" cy="1143000"/>
+          </a:xfrm>
+          <a:prstGeom prst="rect">
+            <a:avLst/>
+          </a:prstGeom>
+          <a:noFill/>
+        </p:spPr>
+        <p:txBody>
+          <a:bodyPr wrap="square" anchor="t" lIns="0" rIns="0" tIns="0" bIns="0"/>
+          <a:lstStyle/>
+          <a:p>
+            <a:pPr algn="l"/>
+            <a:r>
+              <a:rPr sz="2000" b="0" i="0">
+                <a:solidFill>
+                  <a:srgbClr val="202122"/>
+                </a:solidFill>
+                <a:latin typeface="Calibri"/>
+              </a:rPr>
+              <a:t>Private (SME, large enterprise, NGO), public, and voluntary or charity.</a:t>
+            </a:r>
+          </a:p>
+        </p:txBody>
+      </p:sp>
+      <p:sp>
+        <p:nvSpPr>
+          <p:cNvPr id="10" name="Rounded Rectangle 9"/>
+          <p:cNvSpPr/>
+          <p:nvPr/>
+        </p:nvSpPr>
+        <p:spPr>
+          <a:xfrm>
+            <a:off x="6233007" y="1600200"/>
+            <a:ext cx="5410047" cy="2148840"/>
+          </a:xfrm>
+          <a:prstGeom prst="roundRect">
+            <a:avLst>
+              <a:gd name="adj" fmla="val 6000"/>
+            </a:avLst>
+          </a:prstGeom>
+          <a:solidFill>
+            <a:srgbClr val="EAF3FF"/>
+          </a:solidFill>
+          <a:ln>
+            <a:noFill/>
+          </a:ln>
+          <a:effectLst/>
+        </p:spPr>
+        <p:style>
+          <a:lnRef idx="1">
+            <a:schemeClr val="accent1"/>
+          </a:lnRef>
+          <a:fillRef idx="3">
+            <a:schemeClr val="accent1"/>
+          </a:fillRef>
+          <a:effectRef idx="2">
+            <a:schemeClr val="accent1"/>
+          </a:effectRef>
+          <a:fontRef idx="minor">
+            <a:schemeClr val="lt1"/>
+          </a:fontRef>
+        </p:style>
+        <p:txBody>
+          <a:bodyPr rtlCol="0" anchor="ctr"/>
+          <a:lstStyle/>
+          <a:p/>
+        </p:txBody>
+      </p:sp>
+      <p:sp>
+        <p:nvSpPr>
+          <p:cNvPr id="11" name="Oval 10"/>
+          <p:cNvSpPr/>
+          <p:nvPr/>
+        </p:nvSpPr>
+        <p:spPr>
+          <a:xfrm>
+            <a:off x="6461607" y="1828800"/>
+            <a:ext cx="457200" cy="457200"/>
+          </a:xfrm>
+          <a:prstGeom prst="ellipse">
+            <a:avLst/>
+          </a:prstGeom>
+          <a:solidFill>
+            <a:srgbClr val="F2B705"/>
+          </a:solidFill>
+          <a:ln>
+            <a:noFill/>
+          </a:ln>
+          <a:effectLst/>
+        </p:spPr>
+        <p:style>
+          <a:lnRef idx="1">
+            <a:schemeClr val="accent1"/>
+          </a:lnRef>
+          <a:fillRef idx="3">
+            <a:schemeClr val="accent1"/>
+          </a:fillRef>
+          <a:effectRef idx="2">
+            <a:schemeClr val="accent1"/>
+          </a:effectRef>
+          <a:fontRef idx="minor">
+            <a:schemeClr val="lt1"/>
+          </a:fontRef>
+        </p:style>
+        <p:txBody>
+          <a:bodyPr rtlCol="0" anchor="ctr" lIns="0" rIns="0" tIns="0" bIns="0"/>
+          <a:lstStyle/>
+          <a:p>
+            <a:pPr algn="ctr"/>
+            <a:r>
+              <a:rPr sz="1500" b="1">
+                <a:solidFill>
+                  <a:srgbClr val="202122"/>
+                </a:solidFill>
+                <a:latin typeface="Calibri"/>
+              </a:rPr>
+              <a:t>2</a:t>
+            </a:r>
+          </a:p>
+        </p:txBody>
+      </p:sp>
+      <p:sp>
+        <p:nvSpPr>
+          <p:cNvPr id="12" name="TextBox 11"/>
+          <p:cNvSpPr txBox="1"/>
+          <p:nvPr/>
+        </p:nvSpPr>
+        <p:spPr>
+          <a:xfrm>
+            <a:off x="7055967" y="1801368"/>
+            <a:ext cx="4404207" cy="512064"/>
+          </a:xfrm>
+          <a:prstGeom prst="rect">
+            <a:avLst/>
+          </a:prstGeom>
+          <a:noFill/>
+        </p:spPr>
+        <p:txBody>
+          <a:bodyPr wrap="square" anchor="ctr" lIns="0" rIns="0" tIns="0" bIns="0"/>
+          <a:lstStyle/>
+          <a:p>
+            <a:pPr algn="l"/>
+            <a:r>
+              <a:rPr sz="1900" b="1" i="0">
+                <a:solidFill>
+                  <a:srgbClr val="03306E"/>
+                </a:solidFill>
+                <a:latin typeface="Calibri"/>
+              </a:rPr>
+              <a:t>Business models</a:t>
+            </a:r>
+          </a:p>
+        </p:txBody>
+      </p:sp>
+      <p:sp>
+        <p:nvSpPr>
+          <p:cNvPr id="13" name="TextBox 12"/>
+          <p:cNvSpPr txBox="1"/>
+          <p:nvPr/>
+        </p:nvSpPr>
+        <p:spPr>
+          <a:xfrm>
+            <a:off x="6461607" y="2468880"/>
+            <a:ext cx="4952847" cy="1143000"/>
+          </a:xfrm>
+          <a:prstGeom prst="rect">
+            <a:avLst/>
+          </a:prstGeom>
+          <a:noFill/>
+        </p:spPr>
+        <p:txBody>
+          <a:bodyPr wrap="square" anchor="t" lIns="0" rIns="0" tIns="0" bIns="0"/>
+          <a:lstStyle/>
+          <a:p>
+            <a:pPr algn="l"/>
+            <a:r>
+              <a:rPr sz="2000" b="0" i="0">
+                <a:solidFill>
+                  <a:srgbClr val="202122"/>
+                </a:solidFill>
+                <a:latin typeface="Calibri"/>
+              </a:rPr>
+              <a:t>B2C sells to consumers, B2B to businesses, B2M to a mass market.</a:t>
+            </a:r>
+          </a:p>
+        </p:txBody>
+      </p:sp>
+      <p:sp>
+        <p:nvSpPr>
+          <p:cNvPr id="14" name="Rounded Rectangle 13"/>
+          <p:cNvSpPr/>
+          <p:nvPr/>
+        </p:nvSpPr>
+        <p:spPr>
+          <a:xfrm>
+            <a:off x="548640" y="4023360"/>
+            <a:ext cx="5410047" cy="2148840"/>
+          </a:xfrm>
+          <a:prstGeom prst="roundRect">
+            <a:avLst>
+              <a:gd name="adj" fmla="val 6000"/>
+            </a:avLst>
+          </a:prstGeom>
+          <a:solidFill>
+            <a:srgbClr val="EAF3FF"/>
+          </a:solidFill>
+          <a:ln>
+            <a:noFill/>
+          </a:ln>
+          <a:effectLst/>
+        </p:spPr>
+        <p:style>
+          <a:lnRef idx="1">
+            <a:schemeClr val="accent1"/>
+          </a:lnRef>
+          <a:fillRef idx="3">
+            <a:schemeClr val="accent1"/>
+          </a:fillRef>
+          <a:effectRef idx="2">
+            <a:schemeClr val="accent1"/>
+          </a:effectRef>
+          <a:fontRef idx="minor">
+            <a:schemeClr val="lt1"/>
+          </a:fontRef>
+        </p:style>
+        <p:txBody>
+          <a:bodyPr rtlCol="0" anchor="ctr"/>
+          <a:lstStyle/>
+          <a:p/>
+        </p:txBody>
+      </p:sp>
+      <p:sp>
+        <p:nvSpPr>
+          <p:cNvPr id="15" name="Oval 14"/>
+          <p:cNvSpPr/>
+          <p:nvPr/>
+        </p:nvSpPr>
+        <p:spPr>
+          <a:xfrm>
+            <a:off x="777240" y="4251960"/>
+            <a:ext cx="457200" cy="457200"/>
+          </a:xfrm>
+          <a:prstGeom prst="ellipse">
+            <a:avLst/>
+          </a:prstGeom>
+          <a:solidFill>
+            <a:srgbClr val="F2B705"/>
+          </a:solidFill>
+          <a:ln>
+            <a:noFill/>
+          </a:ln>
+          <a:effectLst/>
+        </p:spPr>
+        <p:style>
+          <a:lnRef idx="1">
+            <a:schemeClr val="accent1"/>
+          </a:lnRef>
+          <a:fillRef idx="3">
+            <a:schemeClr val="accent1"/>
+          </a:fillRef>
+          <a:effectRef idx="2">
+            <a:schemeClr val="accent1"/>
+          </a:effectRef>
+          <a:fontRef idx="minor">
+            <a:schemeClr val="lt1"/>
+          </a:fontRef>
+        </p:style>
+        <p:txBody>
+          <a:bodyPr rtlCol="0" anchor="ctr" lIns="0" rIns="0" tIns="0" bIns="0"/>
+          <a:lstStyle/>
+          <a:p>
+            <a:pPr algn="ctr"/>
+            <a:r>
+              <a:rPr sz="1500" b="1">
+                <a:solidFill>
+                  <a:srgbClr val="202122"/>
+                </a:solidFill>
+                <a:latin typeface="Calibri"/>
+              </a:rPr>
+              <a:t>3</a:t>
+            </a:r>
+          </a:p>
+        </p:txBody>
+      </p:sp>
+      <p:sp>
+        <p:nvSpPr>
+          <p:cNvPr id="16" name="TextBox 15"/>
+          <p:cNvSpPr txBox="1"/>
+          <p:nvPr/>
+        </p:nvSpPr>
+        <p:spPr>
+          <a:xfrm>
+            <a:off x="1371600" y="4224528"/>
+            <a:ext cx="4404207" cy="512064"/>
+          </a:xfrm>
+          <a:prstGeom prst="rect">
+            <a:avLst/>
+          </a:prstGeom>
+          <a:noFill/>
+        </p:spPr>
+        <p:txBody>
+          <a:bodyPr wrap="square" anchor="ctr" lIns="0" rIns="0" tIns="0" bIns="0"/>
+          <a:lstStyle/>
+          <a:p>
+            <a:pPr algn="l"/>
+            <a:r>
+              <a:rPr sz="1900" b="1" i="0">
+                <a:solidFill>
+                  <a:srgbClr val="03306E"/>
+                </a:solidFill>
+                <a:latin typeface="Calibri"/>
+              </a:rPr>
+              <a:t>Internal stakeholders</a:t>
+            </a:r>
+          </a:p>
+        </p:txBody>
+      </p:sp>
+      <p:sp>
+        <p:nvSpPr>
+          <p:cNvPr id="17" name="TextBox 16"/>
+          <p:cNvSpPr txBox="1"/>
+          <p:nvPr/>
+        </p:nvSpPr>
+        <p:spPr>
+          <a:xfrm>
+            <a:off x="777240" y="4892040"/>
+            <a:ext cx="4952847" cy="1143000"/>
+          </a:xfrm>
+          <a:prstGeom prst="rect">
+            <a:avLst/>
+          </a:prstGeom>
+          <a:noFill/>
+        </p:spPr>
+        <p:txBody>
+          <a:bodyPr wrap="square" anchor="t" lIns="0" rIns="0" tIns="0" bIns="0"/>
+          <a:lstStyle/>
+          <a:p>
+            <a:pPr algn="l"/>
+            <a:r>
+              <a:rPr sz="2000" b="0" i="0">
+                <a:solidFill>
+                  <a:srgbClr val="202122"/>
+                </a:solidFill>
+                <a:latin typeface="Calibri"/>
+              </a:rPr>
+              <a:t>Owners, directors and employees.</a:t>
+            </a:r>
+          </a:p>
+        </p:txBody>
+      </p:sp>
+      <p:sp>
+        <p:nvSpPr>
+          <p:cNvPr id="18" name="Rounded Rectangle 17"/>
+          <p:cNvSpPr/>
+          <p:nvPr/>
+        </p:nvSpPr>
+        <p:spPr>
+          <a:xfrm>
+            <a:off x="6233007" y="4023360"/>
+            <a:ext cx="5410047" cy="2148840"/>
+          </a:xfrm>
+          <a:prstGeom prst="roundRect">
+            <a:avLst>
+              <a:gd name="adj" fmla="val 6000"/>
+            </a:avLst>
+          </a:prstGeom>
+          <a:solidFill>
+            <a:srgbClr val="EAF3FF"/>
+          </a:solidFill>
+          <a:ln>
+            <a:noFill/>
+          </a:ln>
+          <a:effectLst/>
+        </p:spPr>
+        <p:style>
+          <a:lnRef idx="1">
+            <a:schemeClr val="accent1"/>
+          </a:lnRef>
+          <a:fillRef idx="3">
+            <a:schemeClr val="accent1"/>
+          </a:fillRef>
+          <a:effectRef idx="2">
+            <a:schemeClr val="accent1"/>
+          </a:effectRef>
+          <a:fontRef idx="minor">
+            <a:schemeClr val="lt1"/>
+          </a:fontRef>
+        </p:style>
+        <p:txBody>
+          <a:bodyPr rtlCol="0" anchor="ctr"/>
+          <a:lstStyle/>
+          <a:p/>
+        </p:txBody>
+      </p:sp>
+      <p:sp>
+        <p:nvSpPr>
+          <p:cNvPr id="19" name="Oval 18"/>
+          <p:cNvSpPr/>
+          <p:nvPr/>
+        </p:nvSpPr>
+        <p:spPr>
+          <a:xfrm>
+            <a:off x="6461607" y="4251960"/>
+            <a:ext cx="457200" cy="457200"/>
+          </a:xfrm>
+          <a:prstGeom prst="ellipse">
+            <a:avLst/>
+          </a:prstGeom>
+          <a:solidFill>
+            <a:srgbClr val="F2B705"/>
+          </a:solidFill>
+          <a:ln>
+            <a:noFill/>
+          </a:ln>
+          <a:effectLst/>
+        </p:spPr>
+        <p:style>
+          <a:lnRef idx="1">
+            <a:schemeClr val="accent1"/>
+          </a:lnRef>
+          <a:fillRef idx="3">
+            <a:schemeClr val="accent1"/>
+          </a:fillRef>
+          <a:effectRef idx="2">
+            <a:schemeClr val="accent1"/>
+          </a:effectRef>
+          <a:fontRef idx="minor">
+            <a:schemeClr val="lt1"/>
+          </a:fontRef>
+        </p:style>
+        <p:txBody>
+          <a:bodyPr rtlCol="0" anchor="ctr" lIns="0" rIns="0" tIns="0" bIns="0"/>
+          <a:lstStyle/>
+          <a:p>
+            <a:pPr algn="ctr"/>
+            <a:r>
+              <a:rPr sz="1500" b="1">
+                <a:solidFill>
+                  <a:srgbClr val="202122"/>
+                </a:solidFill>
+                <a:latin typeface="Calibri"/>
+              </a:rPr>
+              <a:t>4</a:t>
+            </a:r>
+          </a:p>
+        </p:txBody>
+      </p:sp>
+      <p:sp>
+        <p:nvSpPr>
+          <p:cNvPr id="20" name="TextBox 19"/>
+          <p:cNvSpPr txBox="1"/>
+          <p:nvPr/>
+        </p:nvSpPr>
+        <p:spPr>
+          <a:xfrm>
+            <a:off x="7055967" y="4224528"/>
+            <a:ext cx="4404207" cy="512064"/>
+          </a:xfrm>
+          <a:prstGeom prst="rect">
+            <a:avLst/>
+          </a:prstGeom>
+          <a:noFill/>
+        </p:spPr>
+        <p:txBody>
+          <a:bodyPr wrap="square" anchor="ctr" lIns="0" rIns="0" tIns="0" bIns="0"/>
+          <a:lstStyle/>
+          <a:p>
+            <a:pPr algn="l"/>
+            <a:r>
+              <a:rPr sz="1900" b="1" i="0">
+                <a:solidFill>
+                  <a:srgbClr val="03306E"/>
+                </a:solidFill>
+                <a:latin typeface="Calibri"/>
+              </a:rPr>
+              <a:t>External stakeholders</a:t>
+            </a:r>
+          </a:p>
+        </p:txBody>
+      </p:sp>
+      <p:sp>
+        <p:nvSpPr>
+          <p:cNvPr id="21" name="TextBox 20"/>
+          <p:cNvSpPr txBox="1"/>
+          <p:nvPr/>
+        </p:nvSpPr>
+        <p:spPr>
+          <a:xfrm>
+            <a:off x="6461607" y="4892040"/>
+            <a:ext cx="4952847" cy="1143000"/>
+          </a:xfrm>
+          <a:prstGeom prst="rect">
+            <a:avLst/>
+          </a:prstGeom>
+          <a:noFill/>
+        </p:spPr>
+        <p:txBody>
+          <a:bodyPr wrap="square" anchor="t" lIns="0" rIns="0" tIns="0" bIns="0"/>
+          <a:lstStyle/>
+          <a:p>
+            <a:pPr algn="l"/>
+            <a:r>
+              <a:rPr sz="2000" b="0" i="0">
+                <a:solidFill>
+                  <a:srgbClr val="202122"/>
+                </a:solidFill>
+                <a:latin typeface="Calibri"/>
+              </a:rPr>
+              <a:t>Customers, suppliers, shareholders, outsourced services, investors, government.</a:t>
+            </a:r>
+          </a:p>
+        </p:txBody>
+      </p:sp>
+    </p:spTree>
+  </p:cSld>
+  <p:clrMapOvr>
+    <a:masterClrMapping/>
+  </p:clrMapOvr>
+</p:sld>
+</file>
+
+<file path=ppt/slides/slide5.xml><?xml version="1.0" encoding="utf-8"?>
+<p:sld xmlns:a="http://schemas.openxmlformats.org/drawingml/2006/main" xmlns:p="http://schemas.openxmlformats.org/presentationml/2006/main" xmlns:r="http://schemas.openxmlformats.org/officeDocument/2006/relationships">
+  <p:cSld>
+    <p:bg>
+      <p:bgPr>
+        <a:solidFill>
+          <a:srgbClr val="FFFFFF"/>
+        </a:solidFill>
+        <a:effectLst/>
+      </p:bgPr>
+    </p:bg>
+    <p:spTree>
+      <p:nvGrpSpPr>
+        <p:cNvPr id="1" name=""/>
+        <p:cNvGrpSpPr/>
+        <p:nvPr/>
+      </p:nvGrpSpPr>
+      <p:grpSpPr/>
+      <p:sp>
+        <p:nvSpPr>
+          <p:cNvPr id="2" name="TextBox 1"/>
+          <p:cNvSpPr txBox="1"/>
+          <p:nvPr/>
+        </p:nvSpPr>
+        <p:spPr>
+          <a:xfrm>
+            <a:off x="548640" y="320040"/>
+            <a:ext cx="11094415" cy="274320"/>
+          </a:xfrm>
+          <a:prstGeom prst="rect">
+            <a:avLst/>
+          </a:prstGeom>
+          <a:noFill/>
+        </p:spPr>
+        <p:txBody>
+          <a:bodyPr wrap="square" anchor="t" lIns="0" rIns="0" tIns="0" bIns="0"/>
+          <a:lstStyle/>
+          <a:p>
+            <a:pPr algn="l"/>
+            <a:r>
+              <a:rPr sz="1100" b="1" i="0">
+                <a:solidFill>
+                  <a:srgbClr val="54595D"/>
+                </a:solidFill>
+                <a:latin typeface="Calibri"/>
+              </a:rPr>
+              <a:t>CORE COMPONENT  ·  Core Paper 2</a:t>
+            </a:r>
+          </a:p>
+        </p:txBody>
+      </p:sp>
+      <p:sp>
+        <p:nvSpPr>
+          <p:cNvPr id="3" name="TextBox 2"/>
+          <p:cNvSpPr txBox="1"/>
+          <p:nvPr/>
+        </p:nvSpPr>
+        <p:spPr>
+          <a:xfrm>
+            <a:off x="548640" y="566928"/>
+            <a:ext cx="11094415" cy="822960"/>
+          </a:xfrm>
+          <a:prstGeom prst="rect">
+            <a:avLst/>
+          </a:prstGeom>
+          <a:noFill/>
+        </p:spPr>
+        <p:txBody>
+          <a:bodyPr wrap="square" anchor="ctr" lIns="0" rIns="0" tIns="0" bIns="0"/>
+          <a:lstStyle/>
+          <a:p>
+            <a:pPr algn="l"/>
+            <a:r>
+              <a:rPr sz="3200" b="1" i="0">
+                <a:solidFill>
+                  <a:srgbClr val="03306E"/>
+                </a:solidFill>
+                <a:latin typeface="Cambria"/>
+              </a:rPr>
+              <a:t>Quick check: The business environment</a:t>
+            </a:r>
+          </a:p>
+        </p:txBody>
+      </p:sp>
+      <p:sp>
+        <p:nvSpPr>
+          <p:cNvPr id="4" name="TextBox 3"/>
+          <p:cNvSpPr txBox="1"/>
+          <p:nvPr/>
+        </p:nvSpPr>
+        <p:spPr>
+          <a:xfrm>
+            <a:off x="548640" y="6446520"/>
+            <a:ext cx="8229600" cy="274320"/>
+          </a:xfrm>
+          <a:prstGeom prst="rect">
+            <a:avLst/>
+          </a:prstGeom>
+          <a:noFill/>
+        </p:spPr>
+        <p:txBody>
+          <a:bodyPr wrap="square" anchor="t" lIns="0" rIns="0" tIns="0" bIns="0"/>
+          <a:lstStyle/>
+          <a:p>
+            <a:pPr algn="l"/>
+            <a:r>
+              <a:rPr sz="1000" b="0" i="0">
+                <a:solidFill>
+                  <a:srgbClr val="54595D"/>
+                </a:solidFill>
+                <a:latin typeface="Calibri"/>
+              </a:rPr>
+              <a:t>Digital Software Development T Level  ·  The Business Context</a:t>
+            </a:r>
+          </a:p>
+        </p:txBody>
+      </p:sp>
+      <p:sp>
+        <p:nvSpPr>
+          <p:cNvPr id="5" name="TextBox 4"/>
+          <p:cNvSpPr txBox="1"/>
+          <p:nvPr/>
+        </p:nvSpPr>
+        <p:spPr>
+          <a:xfrm>
+            <a:off x="10728655" y="6446520"/>
+            <a:ext cx="914400" cy="274320"/>
+          </a:xfrm>
+          <a:prstGeom prst="rect">
+            <a:avLst/>
+          </a:prstGeom>
+          <a:noFill/>
+        </p:spPr>
+        <p:txBody>
+          <a:bodyPr wrap="square" anchor="t" lIns="0" rIns="0" tIns="0" bIns="0"/>
+          <a:lstStyle/>
+          <a:p>
+            <a:pPr algn="r"/>
+            <a:r>
+              <a:rPr sz="1000" b="0" i="0">
+                <a:solidFill>
+                  <a:srgbClr val="54595D"/>
+                </a:solidFill>
+                <a:latin typeface="Calibri"/>
+              </a:rPr>
+              <a:t>5</a:t>
+            </a:r>
+          </a:p>
+        </p:txBody>
+      </p:sp>
+      <p:sp>
+        <p:nvSpPr>
+          <p:cNvPr id="6" name="Oval 5"/>
+          <p:cNvSpPr/>
+          <p:nvPr/>
+        </p:nvSpPr>
+        <p:spPr>
+          <a:xfrm>
+            <a:off x="548640" y="1691640"/>
+            <a:ext cx="502920" cy="502920"/>
+          </a:xfrm>
+          <a:prstGeom prst="ellipse">
+            <a:avLst/>
+          </a:prstGeom>
+          <a:solidFill>
+            <a:srgbClr val="F2B705"/>
+          </a:solidFill>
+          <a:ln>
+            <a:noFill/>
+          </a:ln>
+          <a:effectLst/>
+        </p:spPr>
+        <p:style>
+          <a:lnRef idx="1">
+            <a:schemeClr val="accent1"/>
+          </a:lnRef>
+          <a:fillRef idx="3">
+            <a:schemeClr val="accent1"/>
+          </a:fillRef>
+          <a:effectRef idx="2">
+            <a:schemeClr val="accent1"/>
+          </a:effectRef>
+          <a:fontRef idx="minor">
+            <a:schemeClr val="lt1"/>
+          </a:fontRef>
+        </p:style>
+        <p:txBody>
+          <a:bodyPr rtlCol="0" anchor="ctr" lIns="0" rIns="0" tIns="0" bIns="0"/>
+          <a:lstStyle/>
+          <a:p>
+            <a:pPr algn="ctr"/>
+            <a:r>
+              <a:rPr sz="1600" b="1">
+                <a:solidFill>
+                  <a:srgbClr val="202122"/>
+                </a:solidFill>
+                <a:latin typeface="Calibri"/>
+              </a:rPr>
+              <a:t>1</a:t>
+            </a:r>
+          </a:p>
+        </p:txBody>
+      </p:sp>
+      <p:sp>
+        <p:nvSpPr>
+          <p:cNvPr id="7" name="TextBox 6"/>
+          <p:cNvSpPr txBox="1"/>
+          <p:nvPr/>
+        </p:nvSpPr>
+        <p:spPr>
+          <a:xfrm>
+            <a:off x="1371600" y="1645920"/>
+            <a:ext cx="10271455" cy="1188720"/>
+          </a:xfrm>
+          <a:prstGeom prst="rect">
+            <a:avLst/>
+          </a:prstGeom>
+          <a:noFill/>
+        </p:spPr>
+        <p:txBody>
+          <a:bodyPr wrap="square" anchor="t" lIns="0" rIns="0" tIns="0" bIns="0"/>
+          <a:lstStyle/>
+          <a:p>
+            <a:pPr algn="l"/>
+            <a:r>
+              <a:rPr sz="2400" b="0" i="0">
+                <a:solidFill>
+                  <a:srgbClr val="202122"/>
+                </a:solidFill>
+                <a:latin typeface="Calibri"/>
+              </a:rPr>
+              <a:t>What does B2C mean?</a:t>
+            </a:r>
+          </a:p>
+        </p:txBody>
+      </p:sp>
+      <p:sp>
+        <p:nvSpPr>
+          <p:cNvPr id="8" name="Oval 7"/>
+          <p:cNvSpPr/>
+          <p:nvPr/>
+        </p:nvSpPr>
+        <p:spPr>
+          <a:xfrm>
+            <a:off x="548640" y="3108960"/>
+            <a:ext cx="502920" cy="502920"/>
+          </a:xfrm>
+          <a:prstGeom prst="ellipse">
+            <a:avLst/>
+          </a:prstGeom>
+          <a:solidFill>
+            <a:srgbClr val="F2B705"/>
+          </a:solidFill>
+          <a:ln>
+            <a:noFill/>
+          </a:ln>
+          <a:effectLst/>
+        </p:spPr>
+        <p:style>
+          <a:lnRef idx="1">
+            <a:schemeClr val="accent1"/>
+          </a:lnRef>
+          <a:fillRef idx="3">
+            <a:schemeClr val="accent1"/>
+          </a:fillRef>
+          <a:effectRef idx="2">
+            <a:schemeClr val="accent1"/>
+          </a:effectRef>
+          <a:fontRef idx="minor">
+            <a:schemeClr val="lt1"/>
+          </a:fontRef>
+        </p:style>
+        <p:txBody>
+          <a:bodyPr rtlCol="0" anchor="ctr" lIns="0" rIns="0" tIns="0" bIns="0"/>
+          <a:lstStyle/>
+          <a:p>
+            <a:pPr algn="ctr"/>
+            <a:r>
+              <a:rPr sz="1600" b="1">
+                <a:solidFill>
+                  <a:srgbClr val="202122"/>
+                </a:solidFill>
+                <a:latin typeface="Calibri"/>
+              </a:rPr>
+              <a:t>2</a:t>
+            </a:r>
+          </a:p>
+        </p:txBody>
+      </p:sp>
+      <p:sp>
+        <p:nvSpPr>
+          <p:cNvPr id="9" name="TextBox 8"/>
+          <p:cNvSpPr txBox="1"/>
+          <p:nvPr/>
+        </p:nvSpPr>
+        <p:spPr>
+          <a:xfrm>
+            <a:off x="1371600" y="3063240"/>
+            <a:ext cx="10271455" cy="1188720"/>
+          </a:xfrm>
+          <a:prstGeom prst="rect">
+            <a:avLst/>
+          </a:prstGeom>
+          <a:noFill/>
+        </p:spPr>
+        <p:txBody>
+          <a:bodyPr wrap="square" anchor="t" lIns="0" rIns="0" tIns="0" bIns="0"/>
+          <a:lstStyle/>
+          <a:p>
+            <a:pPr algn="l"/>
+            <a:r>
+              <a:rPr sz="2400" b="0" i="0">
+                <a:solidFill>
+                  <a:srgbClr val="202122"/>
+                </a:solidFill>
+                <a:latin typeface="Calibri"/>
+              </a:rPr>
+              <a:t>Is a supplier an internal or external stakeholder?</a:t>
+            </a:r>
+          </a:p>
+        </p:txBody>
+      </p:sp>
+      <p:sp>
+        <p:nvSpPr>
+          <p:cNvPr id="10" name="Oval 9"/>
+          <p:cNvSpPr/>
+          <p:nvPr/>
+        </p:nvSpPr>
+        <p:spPr>
+          <a:xfrm>
+            <a:off x="548640" y="4526280"/>
+            <a:ext cx="502920" cy="502920"/>
+          </a:xfrm>
+          <a:prstGeom prst="ellipse">
+            <a:avLst/>
+          </a:prstGeom>
+          <a:solidFill>
+            <a:srgbClr val="F2B705"/>
+          </a:solidFill>
+          <a:ln>
+            <a:noFill/>
+          </a:ln>
+          <a:effectLst/>
+        </p:spPr>
+        <p:style>
+          <a:lnRef idx="1">
+            <a:schemeClr val="accent1"/>
+          </a:lnRef>
+          <a:fillRef idx="3">
+            <a:schemeClr val="accent1"/>
+          </a:fillRef>
+          <a:effectRef idx="2">
+            <a:schemeClr val="accent1"/>
+          </a:effectRef>
+          <a:fontRef idx="minor">
+            <a:schemeClr val="lt1"/>
+          </a:fontRef>
+        </p:style>
+        <p:txBody>
+          <a:bodyPr rtlCol="0" anchor="ctr" lIns="0" rIns="0" tIns="0" bIns="0"/>
+          <a:lstStyle/>
+          <a:p>
+            <a:pPr algn="ctr"/>
+            <a:r>
+              <a:rPr sz="1600" b="1">
+                <a:solidFill>
+                  <a:srgbClr val="202122"/>
+                </a:solidFill>
+                <a:latin typeface="Calibri"/>
+              </a:rPr>
+              <a:t>3</a:t>
+            </a:r>
+          </a:p>
+        </p:txBody>
+      </p:sp>
+      <p:sp>
+        <p:nvSpPr>
+          <p:cNvPr id="11" name="TextBox 10"/>
+          <p:cNvSpPr txBox="1"/>
+          <p:nvPr/>
+        </p:nvSpPr>
+        <p:spPr>
+          <a:xfrm>
+            <a:off x="1371600" y="4480560"/>
+            <a:ext cx="10271455" cy="1188720"/>
+          </a:xfrm>
+          <a:prstGeom prst="rect">
+            <a:avLst/>
+          </a:prstGeom>
+          <a:noFill/>
+        </p:spPr>
+        <p:txBody>
+          <a:bodyPr wrap="square" anchor="t" lIns="0" rIns="0" tIns="0" bIns="0"/>
+          <a:lstStyle/>
+          <a:p>
+            <a:pPr algn="l"/>
+            <a:r>
+              <a:rPr sz="2400" b="0" i="0">
+                <a:solidFill>
+                  <a:srgbClr val="202122"/>
+                </a:solidFill>
+                <a:latin typeface="Calibri"/>
+              </a:rPr>
+              <a:t>Which sector is not for profit?</a:t>
+            </a:r>
+          </a:p>
+        </p:txBody>
+      </p:sp>
+      <p:sp>
+        <p:nvSpPr>
+          <p:cNvPr id="12" name="TextBox 11"/>
+          <p:cNvSpPr txBox="1"/>
+          <p:nvPr/>
+        </p:nvSpPr>
+        <p:spPr>
+          <a:xfrm>
+            <a:off x="548640" y="5852160"/>
+            <a:ext cx="11094415" cy="365760"/>
+          </a:xfrm>
+          <a:prstGeom prst="rect">
+            <a:avLst/>
+          </a:prstGeom>
+          <a:noFill/>
+        </p:spPr>
+        <p:txBody>
+          <a:bodyPr wrap="square" anchor="t" lIns="0" rIns="0" tIns="0" bIns="0"/>
+          <a:lstStyle/>
+          <a:p>
+            <a:pPr algn="l"/>
+            <a:r>
+              <a:rPr sz="1300" b="0" i="1">
+                <a:solidFill>
+                  <a:srgbClr val="54595D"/>
+                </a:solidFill>
+                <a:latin typeface="Calibri"/>
+              </a:rPr>
+              <a:t>Answer on mini whiteboards or in your book. Answers are in the speaker notes.</a:t>
+            </a:r>
+          </a:p>
+        </p:txBody>
+      </p:sp>
+    </p:spTree>
+  </p:cSld>
+  <p:clrMapOvr>
+    <a:masterClrMapping/>
+  </p:clrMapOvr>
+</p:sld>
+</file>
+
+<file path=ppt/slides/slide6.xml><?xml version="1.0" encoding="utf-8"?>
+<p:sld xmlns:a="http://schemas.openxmlformats.org/drawingml/2006/main" xmlns:p="http://schemas.openxmlformats.org/presentationml/2006/main" xmlns:r="http://schemas.openxmlformats.org/officeDocument/2006/relationships">
+  <p:cSld>
+    <p:bg>
+      <p:bgPr>
+        <a:solidFill>
+          <a:srgbClr val="FFFFFF"/>
+        </a:solidFill>
+        <a:effectLst/>
+      </p:bgPr>
+    </p:bg>
+    <p:spTree>
+      <p:nvGrpSpPr>
+        <p:cNvPr id="1" name=""/>
+        <p:cNvGrpSpPr/>
+        <p:nvPr/>
+      </p:nvGrpSpPr>
+      <p:grpSpPr/>
+      <p:sp>
+        <p:nvSpPr>
+          <p:cNvPr id="2" name="TextBox 1"/>
+          <p:cNvSpPr txBox="1"/>
+          <p:nvPr/>
+        </p:nvSpPr>
+        <p:spPr>
+          <a:xfrm>
+            <a:off x="548640" y="320040"/>
+            <a:ext cx="11094415" cy="274320"/>
+          </a:xfrm>
+          <a:prstGeom prst="rect">
+            <a:avLst/>
+          </a:prstGeom>
+          <a:noFill/>
+        </p:spPr>
+        <p:txBody>
+          <a:bodyPr wrap="square" anchor="t" lIns="0" rIns="0" tIns="0" bIns="0"/>
+          <a:lstStyle/>
+          <a:p>
+            <a:pPr algn="l"/>
+            <a:r>
+              <a:rPr sz="1100" b="1" i="0">
+                <a:solidFill>
+                  <a:srgbClr val="54595D"/>
+                </a:solidFill>
+                <a:latin typeface="Calibri"/>
+              </a:rPr>
+              <a:t>CORE COMPONENT  ·  Core Paper 2</a:t>
+            </a:r>
+          </a:p>
+        </p:txBody>
+      </p:sp>
+      <p:sp>
+        <p:nvSpPr>
+          <p:cNvPr id="3" name="TextBox 2"/>
+          <p:cNvSpPr txBox="1"/>
+          <p:nvPr/>
+        </p:nvSpPr>
+        <p:spPr>
+          <a:xfrm>
+            <a:off x="548640" y="566928"/>
+            <a:ext cx="11094415" cy="822960"/>
+          </a:xfrm>
+          <a:prstGeom prst="rect">
+            <a:avLst/>
+          </a:prstGeom>
+          <a:noFill/>
+        </p:spPr>
+        <p:txBody>
+          <a:bodyPr wrap="square" anchor="ctr" lIns="0" rIns="0" tIns="0" bIns="0"/>
+          <a:lstStyle/>
+          <a:p>
+            <a:pPr algn="l"/>
+            <a:r>
+              <a:rPr sz="3200" b="1" i="0">
+                <a:solidFill>
+                  <a:srgbClr val="03306E"/>
+                </a:solidFill>
+                <a:latin typeface="Cambria"/>
+              </a:rPr>
+              <a:t>Digital value across the business</a:t>
+            </a:r>
+          </a:p>
+        </p:txBody>
+      </p:sp>
+      <p:sp>
+        <p:nvSpPr>
+          <p:cNvPr id="4" name="TextBox 3"/>
+          <p:cNvSpPr txBox="1"/>
+          <p:nvPr/>
+        </p:nvSpPr>
+        <p:spPr>
+          <a:xfrm>
+            <a:off x="548640" y="6446520"/>
+            <a:ext cx="8229600" cy="274320"/>
+          </a:xfrm>
+          <a:prstGeom prst="rect">
+            <a:avLst/>
+          </a:prstGeom>
+          <a:noFill/>
+        </p:spPr>
+        <p:txBody>
+          <a:bodyPr wrap="square" anchor="t" lIns="0" rIns="0" tIns="0" bIns="0"/>
+          <a:lstStyle/>
+          <a:p>
+            <a:pPr algn="l"/>
+            <a:r>
+              <a:rPr sz="1000" b="0" i="0">
+                <a:solidFill>
+                  <a:srgbClr val="54595D"/>
+                </a:solidFill>
+                <a:latin typeface="Calibri"/>
+              </a:rPr>
+              <a:t>Digital Software Development T Level  ·  The Business Context</a:t>
+            </a:r>
+          </a:p>
+        </p:txBody>
+      </p:sp>
+      <p:sp>
+        <p:nvSpPr>
+          <p:cNvPr id="5" name="TextBox 4"/>
+          <p:cNvSpPr txBox="1"/>
+          <p:nvPr/>
+        </p:nvSpPr>
+        <p:spPr>
+          <a:xfrm>
+            <a:off x="10728655" y="6446520"/>
+            <a:ext cx="914400" cy="274320"/>
+          </a:xfrm>
+          <a:prstGeom prst="rect">
+            <a:avLst/>
+          </a:prstGeom>
+          <a:noFill/>
+        </p:spPr>
+        <p:txBody>
+          <a:bodyPr wrap="square" anchor="t" lIns="0" rIns="0" tIns="0" bIns="0"/>
+          <a:lstStyle/>
+          <a:p>
+            <a:pPr algn="r"/>
+            <a:r>
+              <a:rPr sz="1000" b="0" i="0">
+                <a:solidFill>
+                  <a:srgbClr val="54595D"/>
+                </a:solidFill>
+                <a:latin typeface="Calibri"/>
+              </a:rPr>
+              <a:t>6</a:t>
             </a:r>
           </a:p>
         </p:txBody>
@@ -6463,1798 +10921,6 @@
 </p:sld>
 </file>
 
-<file path=ppt/slides/slide5.xml><?xml version="1.0" encoding="utf-8"?>
-<p:sld xmlns:a="http://schemas.openxmlformats.org/drawingml/2006/main" xmlns:p="http://schemas.openxmlformats.org/presentationml/2006/main" xmlns:r="http://schemas.openxmlformats.org/officeDocument/2006/relationships">
-  <p:cSld>
-    <p:bg>
-      <p:bgPr>
-        <a:solidFill>
-          <a:srgbClr val="FFFFFF"/>
-        </a:solidFill>
-        <a:effectLst/>
-      </p:bgPr>
-    </p:bg>
-    <p:spTree>
-      <p:nvGrpSpPr>
-        <p:cNvPr id="1" name=""/>
-        <p:cNvGrpSpPr/>
-        <p:nvPr/>
-      </p:nvGrpSpPr>
-      <p:grpSpPr/>
-      <p:sp>
-        <p:nvSpPr>
-          <p:cNvPr id="2" name="TextBox 1"/>
-          <p:cNvSpPr txBox="1"/>
-          <p:nvPr/>
-        </p:nvSpPr>
-        <p:spPr>
-          <a:xfrm>
-            <a:off x="548640" y="320040"/>
-            <a:ext cx="11094415" cy="274320"/>
-          </a:xfrm>
-          <a:prstGeom prst="rect">
-            <a:avLst/>
-          </a:prstGeom>
-          <a:noFill/>
-        </p:spPr>
-        <p:txBody>
-          <a:bodyPr wrap="square" anchor="t" lIns="0" rIns="0" tIns="0" bIns="0"/>
-          <a:lstStyle/>
-          <a:p>
-            <a:pPr algn="l"/>
-            <a:r>
-              <a:rPr sz="1100" b="1" i="0">
-                <a:solidFill>
-                  <a:srgbClr val="54595D"/>
-                </a:solidFill>
-                <a:latin typeface="Calibri"/>
-              </a:rPr>
-              <a:t>CORE COMPONENT  ·  Core Paper 2</a:t>
-            </a:r>
-          </a:p>
-        </p:txBody>
-      </p:sp>
-      <p:sp>
-        <p:nvSpPr>
-          <p:cNvPr id="3" name="TextBox 2"/>
-          <p:cNvSpPr txBox="1"/>
-          <p:nvPr/>
-        </p:nvSpPr>
-        <p:spPr>
-          <a:xfrm>
-            <a:off x="548640" y="566928"/>
-            <a:ext cx="11094415" cy="822960"/>
-          </a:xfrm>
-          <a:prstGeom prst="rect">
-            <a:avLst/>
-          </a:prstGeom>
-          <a:noFill/>
-        </p:spPr>
-        <p:txBody>
-          <a:bodyPr wrap="square" anchor="ctr" lIns="0" rIns="0" tIns="0" bIns="0"/>
-          <a:lstStyle/>
-          <a:p>
-            <a:pPr algn="l"/>
-            <a:r>
-              <a:rPr sz="3200" b="1" i="0">
-                <a:solidFill>
-                  <a:srgbClr val="03306E"/>
-                </a:solidFill>
-                <a:latin typeface="Cambria"/>
-              </a:rPr>
-              <a:t>What users expect from software</a:t>
-            </a:r>
-          </a:p>
-        </p:txBody>
-      </p:sp>
-      <p:sp>
-        <p:nvSpPr>
-          <p:cNvPr id="4" name="TextBox 3"/>
-          <p:cNvSpPr txBox="1"/>
-          <p:nvPr/>
-        </p:nvSpPr>
-        <p:spPr>
-          <a:xfrm>
-            <a:off x="548640" y="6446520"/>
-            <a:ext cx="8229600" cy="274320"/>
-          </a:xfrm>
-          <a:prstGeom prst="rect">
-            <a:avLst/>
-          </a:prstGeom>
-          <a:noFill/>
-        </p:spPr>
-        <p:txBody>
-          <a:bodyPr wrap="square" anchor="t" lIns="0" rIns="0" tIns="0" bIns="0"/>
-          <a:lstStyle/>
-          <a:p>
-            <a:pPr algn="l"/>
-            <a:r>
-              <a:rPr sz="1000" b="0" i="0">
-                <a:solidFill>
-                  <a:srgbClr val="54595D"/>
-                </a:solidFill>
-                <a:latin typeface="Calibri"/>
-              </a:rPr>
-              <a:t>Digital Software Development T Level  ·  The Business Context</a:t>
-            </a:r>
-          </a:p>
-        </p:txBody>
-      </p:sp>
-      <p:sp>
-        <p:nvSpPr>
-          <p:cNvPr id="5" name="TextBox 4"/>
-          <p:cNvSpPr txBox="1"/>
-          <p:nvPr/>
-        </p:nvSpPr>
-        <p:spPr>
-          <a:xfrm>
-            <a:off x="10728655" y="6446520"/>
-            <a:ext cx="914400" cy="274320"/>
-          </a:xfrm>
-          <a:prstGeom prst="rect">
-            <a:avLst/>
-          </a:prstGeom>
-          <a:noFill/>
-        </p:spPr>
-        <p:txBody>
-          <a:bodyPr wrap="square" anchor="t" lIns="0" rIns="0" tIns="0" bIns="0"/>
-          <a:lstStyle/>
-          <a:p>
-            <a:pPr algn="r"/>
-            <a:r>
-              <a:rPr sz="1000" b="0" i="0">
-                <a:solidFill>
-                  <a:srgbClr val="54595D"/>
-                </a:solidFill>
-                <a:latin typeface="Calibri"/>
-              </a:rPr>
-              <a:t>5</a:t>
-            </a:r>
-          </a:p>
-        </p:txBody>
-      </p:sp>
-      <p:sp>
-        <p:nvSpPr>
-          <p:cNvPr id="6" name="Rounded Rectangle 5"/>
-          <p:cNvSpPr/>
-          <p:nvPr/>
-        </p:nvSpPr>
-        <p:spPr>
-          <a:xfrm>
-            <a:off x="548640" y="1600200"/>
-            <a:ext cx="3515258" cy="2148840"/>
-          </a:xfrm>
-          <a:prstGeom prst="roundRect">
-            <a:avLst>
-              <a:gd name="adj" fmla="val 6000"/>
-            </a:avLst>
-          </a:prstGeom>
-          <a:solidFill>
-            <a:srgbClr val="EAF3FF"/>
-          </a:solidFill>
-          <a:ln>
-            <a:noFill/>
-          </a:ln>
-          <a:effectLst/>
-        </p:spPr>
-        <p:style>
-          <a:lnRef idx="1">
-            <a:schemeClr val="accent1"/>
-          </a:lnRef>
-          <a:fillRef idx="3">
-            <a:schemeClr val="accent1"/>
-          </a:fillRef>
-          <a:effectRef idx="2">
-            <a:schemeClr val="accent1"/>
-          </a:effectRef>
-          <a:fontRef idx="minor">
-            <a:schemeClr val="lt1"/>
-          </a:fontRef>
-        </p:style>
-        <p:txBody>
-          <a:bodyPr rtlCol="0" anchor="ctr"/>
-          <a:lstStyle/>
-          <a:p/>
-        </p:txBody>
-      </p:sp>
-      <p:sp>
-        <p:nvSpPr>
-          <p:cNvPr id="7" name="Oval 6"/>
-          <p:cNvSpPr/>
-          <p:nvPr/>
-        </p:nvSpPr>
-        <p:spPr>
-          <a:xfrm>
-            <a:off x="777240" y="1828800"/>
-            <a:ext cx="457200" cy="457200"/>
-          </a:xfrm>
-          <a:prstGeom prst="ellipse">
-            <a:avLst/>
-          </a:prstGeom>
-          <a:solidFill>
-            <a:srgbClr val="F2B705"/>
-          </a:solidFill>
-          <a:ln>
-            <a:noFill/>
-          </a:ln>
-          <a:effectLst/>
-        </p:spPr>
-        <p:style>
-          <a:lnRef idx="1">
-            <a:schemeClr val="accent1"/>
-          </a:lnRef>
-          <a:fillRef idx="3">
-            <a:schemeClr val="accent1"/>
-          </a:fillRef>
-          <a:effectRef idx="2">
-            <a:schemeClr val="accent1"/>
-          </a:effectRef>
-          <a:fontRef idx="minor">
-            <a:schemeClr val="lt1"/>
-          </a:fontRef>
-        </p:style>
-        <p:txBody>
-          <a:bodyPr rtlCol="0" anchor="ctr" lIns="0" rIns="0" tIns="0" bIns="0"/>
-          <a:lstStyle/>
-          <a:p>
-            <a:pPr algn="ctr"/>
-            <a:r>
-              <a:rPr sz="1500" b="1">
-                <a:solidFill>
-                  <a:srgbClr val="202122"/>
-                </a:solidFill>
-                <a:latin typeface="Calibri"/>
-              </a:rPr>
-              <a:t>1</a:t>
-            </a:r>
-          </a:p>
-        </p:txBody>
-      </p:sp>
-      <p:sp>
-        <p:nvSpPr>
-          <p:cNvPr id="8" name="TextBox 7"/>
-          <p:cNvSpPr txBox="1"/>
-          <p:nvPr/>
-        </p:nvSpPr>
-        <p:spPr>
-          <a:xfrm>
-            <a:off x="1371600" y="1801368"/>
-            <a:ext cx="2509418" cy="512064"/>
-          </a:xfrm>
-          <a:prstGeom prst="rect">
-            <a:avLst/>
-          </a:prstGeom>
-          <a:noFill/>
-        </p:spPr>
-        <p:txBody>
-          <a:bodyPr wrap="square" anchor="ctr" lIns="0" rIns="0" tIns="0" bIns="0"/>
-          <a:lstStyle/>
-          <a:p>
-            <a:pPr algn="l"/>
-            <a:r>
-              <a:rPr sz="1900" b="1" i="0">
-                <a:solidFill>
-                  <a:srgbClr val="03306E"/>
-                </a:solidFill>
-                <a:latin typeface="Calibri"/>
-              </a:rPr>
-              <a:t>Functionality</a:t>
-            </a:r>
-          </a:p>
-        </p:txBody>
-      </p:sp>
-      <p:sp>
-        <p:nvSpPr>
-          <p:cNvPr id="9" name="TextBox 8"/>
-          <p:cNvSpPr txBox="1"/>
-          <p:nvPr/>
-        </p:nvSpPr>
-        <p:spPr>
-          <a:xfrm>
-            <a:off x="777240" y="2468880"/>
-            <a:ext cx="3058058" cy="1143000"/>
-          </a:xfrm>
-          <a:prstGeom prst="rect">
-            <a:avLst/>
-          </a:prstGeom>
-          <a:noFill/>
-        </p:spPr>
-        <p:txBody>
-          <a:bodyPr wrap="square" anchor="t" lIns="0" rIns="0" tIns="0" bIns="0"/>
-          <a:lstStyle/>
-          <a:p>
-            <a:pPr algn="l"/>
-            <a:r>
-              <a:rPr sz="2000" b="0" i="0">
-                <a:solidFill>
-                  <a:srgbClr val="202122"/>
-                </a:solidFill>
-                <a:latin typeface="Calibri"/>
-              </a:rPr>
-              <a:t>Does the job well.</a:t>
-            </a:r>
-          </a:p>
-        </p:txBody>
-      </p:sp>
-      <p:sp>
-        <p:nvSpPr>
-          <p:cNvPr id="10" name="Rounded Rectangle 9"/>
-          <p:cNvSpPr/>
-          <p:nvPr/>
-        </p:nvSpPr>
-        <p:spPr>
-          <a:xfrm>
-            <a:off x="4338218" y="1600200"/>
-            <a:ext cx="3515258" cy="2148840"/>
-          </a:xfrm>
-          <a:prstGeom prst="roundRect">
-            <a:avLst>
-              <a:gd name="adj" fmla="val 6000"/>
-            </a:avLst>
-          </a:prstGeom>
-          <a:solidFill>
-            <a:srgbClr val="EAF3FF"/>
-          </a:solidFill>
-          <a:ln>
-            <a:noFill/>
-          </a:ln>
-          <a:effectLst/>
-        </p:spPr>
-        <p:style>
-          <a:lnRef idx="1">
-            <a:schemeClr val="accent1"/>
-          </a:lnRef>
-          <a:fillRef idx="3">
-            <a:schemeClr val="accent1"/>
-          </a:fillRef>
-          <a:effectRef idx="2">
-            <a:schemeClr val="accent1"/>
-          </a:effectRef>
-          <a:fontRef idx="minor">
-            <a:schemeClr val="lt1"/>
-          </a:fontRef>
-        </p:style>
-        <p:txBody>
-          <a:bodyPr rtlCol="0" anchor="ctr"/>
-          <a:lstStyle/>
-          <a:p/>
-        </p:txBody>
-      </p:sp>
-      <p:sp>
-        <p:nvSpPr>
-          <p:cNvPr id="11" name="Oval 10"/>
-          <p:cNvSpPr/>
-          <p:nvPr/>
-        </p:nvSpPr>
-        <p:spPr>
-          <a:xfrm>
-            <a:off x="4566818" y="1828800"/>
-            <a:ext cx="457200" cy="457200"/>
-          </a:xfrm>
-          <a:prstGeom prst="ellipse">
-            <a:avLst/>
-          </a:prstGeom>
-          <a:solidFill>
-            <a:srgbClr val="F2B705"/>
-          </a:solidFill>
-          <a:ln>
-            <a:noFill/>
-          </a:ln>
-          <a:effectLst/>
-        </p:spPr>
-        <p:style>
-          <a:lnRef idx="1">
-            <a:schemeClr val="accent1"/>
-          </a:lnRef>
-          <a:fillRef idx="3">
-            <a:schemeClr val="accent1"/>
-          </a:fillRef>
-          <a:effectRef idx="2">
-            <a:schemeClr val="accent1"/>
-          </a:effectRef>
-          <a:fontRef idx="minor">
-            <a:schemeClr val="lt1"/>
-          </a:fontRef>
-        </p:style>
-        <p:txBody>
-          <a:bodyPr rtlCol="0" anchor="ctr" lIns="0" rIns="0" tIns="0" bIns="0"/>
-          <a:lstStyle/>
-          <a:p>
-            <a:pPr algn="ctr"/>
-            <a:r>
-              <a:rPr sz="1500" b="1">
-                <a:solidFill>
-                  <a:srgbClr val="202122"/>
-                </a:solidFill>
-                <a:latin typeface="Calibri"/>
-              </a:rPr>
-              <a:t>2</a:t>
-            </a:r>
-          </a:p>
-        </p:txBody>
-      </p:sp>
-      <p:sp>
-        <p:nvSpPr>
-          <p:cNvPr id="12" name="TextBox 11"/>
-          <p:cNvSpPr txBox="1"/>
-          <p:nvPr/>
-        </p:nvSpPr>
-        <p:spPr>
-          <a:xfrm>
-            <a:off x="5161178" y="1801368"/>
-            <a:ext cx="2509418" cy="512064"/>
-          </a:xfrm>
-          <a:prstGeom prst="rect">
-            <a:avLst/>
-          </a:prstGeom>
-          <a:noFill/>
-        </p:spPr>
-        <p:txBody>
-          <a:bodyPr wrap="square" anchor="ctr" lIns="0" rIns="0" tIns="0" bIns="0"/>
-          <a:lstStyle/>
-          <a:p>
-            <a:pPr algn="l"/>
-            <a:r>
-              <a:rPr sz="1900" b="1" i="0">
-                <a:solidFill>
-                  <a:srgbClr val="03306E"/>
-                </a:solidFill>
-                <a:latin typeface="Calibri"/>
-              </a:rPr>
-              <a:t>Fewer pain points</a:t>
-            </a:r>
-          </a:p>
-        </p:txBody>
-      </p:sp>
-      <p:sp>
-        <p:nvSpPr>
-          <p:cNvPr id="13" name="TextBox 12"/>
-          <p:cNvSpPr txBox="1"/>
-          <p:nvPr/>
-        </p:nvSpPr>
-        <p:spPr>
-          <a:xfrm>
-            <a:off x="4566818" y="2468880"/>
-            <a:ext cx="3058058" cy="1143000"/>
-          </a:xfrm>
-          <a:prstGeom prst="rect">
-            <a:avLst/>
-          </a:prstGeom>
-          <a:noFill/>
-        </p:spPr>
-        <p:txBody>
-          <a:bodyPr wrap="square" anchor="t" lIns="0" rIns="0" tIns="0" bIns="0"/>
-          <a:lstStyle/>
-          <a:p>
-            <a:pPr algn="l"/>
-            <a:r>
-              <a:rPr sz="2000" b="0" i="0">
-                <a:solidFill>
-                  <a:srgbClr val="202122"/>
-                </a:solidFill>
-                <a:latin typeface="Calibri"/>
-              </a:rPr>
-              <a:t>Fast response, simple tasks.</a:t>
-            </a:r>
-          </a:p>
-        </p:txBody>
-      </p:sp>
-      <p:sp>
-        <p:nvSpPr>
-          <p:cNvPr id="14" name="Rounded Rectangle 13"/>
-          <p:cNvSpPr/>
-          <p:nvPr/>
-        </p:nvSpPr>
-        <p:spPr>
-          <a:xfrm>
-            <a:off x="8127796" y="1600200"/>
-            <a:ext cx="3515258" cy="2148840"/>
-          </a:xfrm>
-          <a:prstGeom prst="roundRect">
-            <a:avLst>
-              <a:gd name="adj" fmla="val 6000"/>
-            </a:avLst>
-          </a:prstGeom>
-          <a:solidFill>
-            <a:srgbClr val="EAF3FF"/>
-          </a:solidFill>
-          <a:ln>
-            <a:noFill/>
-          </a:ln>
-          <a:effectLst/>
-        </p:spPr>
-        <p:style>
-          <a:lnRef idx="1">
-            <a:schemeClr val="accent1"/>
-          </a:lnRef>
-          <a:fillRef idx="3">
-            <a:schemeClr val="accent1"/>
-          </a:fillRef>
-          <a:effectRef idx="2">
-            <a:schemeClr val="accent1"/>
-          </a:effectRef>
-          <a:fontRef idx="minor">
-            <a:schemeClr val="lt1"/>
-          </a:fontRef>
-        </p:style>
-        <p:txBody>
-          <a:bodyPr rtlCol="0" anchor="ctr"/>
-          <a:lstStyle/>
-          <a:p/>
-        </p:txBody>
-      </p:sp>
-      <p:sp>
-        <p:nvSpPr>
-          <p:cNvPr id="15" name="Oval 14"/>
-          <p:cNvSpPr/>
-          <p:nvPr/>
-        </p:nvSpPr>
-        <p:spPr>
-          <a:xfrm>
-            <a:off x="8356396" y="1828800"/>
-            <a:ext cx="457200" cy="457200"/>
-          </a:xfrm>
-          <a:prstGeom prst="ellipse">
-            <a:avLst/>
-          </a:prstGeom>
-          <a:solidFill>
-            <a:srgbClr val="F2B705"/>
-          </a:solidFill>
-          <a:ln>
-            <a:noFill/>
-          </a:ln>
-          <a:effectLst/>
-        </p:spPr>
-        <p:style>
-          <a:lnRef idx="1">
-            <a:schemeClr val="accent1"/>
-          </a:lnRef>
-          <a:fillRef idx="3">
-            <a:schemeClr val="accent1"/>
-          </a:fillRef>
-          <a:effectRef idx="2">
-            <a:schemeClr val="accent1"/>
-          </a:effectRef>
-          <a:fontRef idx="minor">
-            <a:schemeClr val="lt1"/>
-          </a:fontRef>
-        </p:style>
-        <p:txBody>
-          <a:bodyPr rtlCol="0" anchor="ctr" lIns="0" rIns="0" tIns="0" bIns="0"/>
-          <a:lstStyle/>
-          <a:p>
-            <a:pPr algn="ctr"/>
-            <a:r>
-              <a:rPr sz="1500" b="1">
-                <a:solidFill>
-                  <a:srgbClr val="202122"/>
-                </a:solidFill>
-                <a:latin typeface="Calibri"/>
-              </a:rPr>
-              <a:t>3</a:t>
-            </a:r>
-          </a:p>
-        </p:txBody>
-      </p:sp>
-      <p:sp>
-        <p:nvSpPr>
-          <p:cNvPr id="16" name="TextBox 15"/>
-          <p:cNvSpPr txBox="1"/>
-          <p:nvPr/>
-        </p:nvSpPr>
-        <p:spPr>
-          <a:xfrm>
-            <a:off x="8950756" y="1801368"/>
-            <a:ext cx="2509418" cy="512064"/>
-          </a:xfrm>
-          <a:prstGeom prst="rect">
-            <a:avLst/>
-          </a:prstGeom>
-          <a:noFill/>
-        </p:spPr>
-        <p:txBody>
-          <a:bodyPr wrap="square" anchor="ctr" lIns="0" rIns="0" tIns="0" bIns="0"/>
-          <a:lstStyle/>
-          <a:p>
-            <a:pPr algn="l"/>
-            <a:r>
-              <a:rPr sz="1900" b="1" i="0">
-                <a:solidFill>
-                  <a:srgbClr val="03306E"/>
-                </a:solidFill>
-                <a:latin typeface="Calibri"/>
-              </a:rPr>
-              <a:t>Accessibility</a:t>
-            </a:r>
-          </a:p>
-        </p:txBody>
-      </p:sp>
-      <p:sp>
-        <p:nvSpPr>
-          <p:cNvPr id="17" name="TextBox 16"/>
-          <p:cNvSpPr txBox="1"/>
-          <p:nvPr/>
-        </p:nvSpPr>
-        <p:spPr>
-          <a:xfrm>
-            <a:off x="8356396" y="2468880"/>
-            <a:ext cx="3058058" cy="1143000"/>
-          </a:xfrm>
-          <a:prstGeom prst="rect">
-            <a:avLst/>
-          </a:prstGeom>
-          <a:noFill/>
-        </p:spPr>
-        <p:txBody>
-          <a:bodyPr wrap="square" anchor="t" lIns="0" rIns="0" tIns="0" bIns="0"/>
-          <a:lstStyle/>
-          <a:p>
-            <a:pPr algn="l"/>
-            <a:r>
-              <a:rPr sz="2000" b="0" i="0">
-                <a:solidFill>
-                  <a:srgbClr val="202122"/>
-                </a:solidFill>
-                <a:latin typeface="Calibri"/>
-              </a:rPr>
-              <a:t>Usable by everyone.</a:t>
-            </a:r>
-          </a:p>
-        </p:txBody>
-      </p:sp>
-      <p:sp>
-        <p:nvSpPr>
-          <p:cNvPr id="18" name="Rounded Rectangle 17"/>
-          <p:cNvSpPr/>
-          <p:nvPr/>
-        </p:nvSpPr>
-        <p:spPr>
-          <a:xfrm>
-            <a:off x="548640" y="4023360"/>
-            <a:ext cx="3515258" cy="2148840"/>
-          </a:xfrm>
-          <a:prstGeom prst="roundRect">
-            <a:avLst>
-              <a:gd name="adj" fmla="val 6000"/>
-            </a:avLst>
-          </a:prstGeom>
-          <a:solidFill>
-            <a:srgbClr val="EAF3FF"/>
-          </a:solidFill>
-          <a:ln>
-            <a:noFill/>
-          </a:ln>
-          <a:effectLst/>
-        </p:spPr>
-        <p:style>
-          <a:lnRef idx="1">
-            <a:schemeClr val="accent1"/>
-          </a:lnRef>
-          <a:fillRef idx="3">
-            <a:schemeClr val="accent1"/>
-          </a:fillRef>
-          <a:effectRef idx="2">
-            <a:schemeClr val="accent1"/>
-          </a:effectRef>
-          <a:fontRef idx="minor">
-            <a:schemeClr val="lt1"/>
-          </a:fontRef>
-        </p:style>
-        <p:txBody>
-          <a:bodyPr rtlCol="0" anchor="ctr"/>
-          <a:lstStyle/>
-          <a:p/>
-        </p:txBody>
-      </p:sp>
-      <p:sp>
-        <p:nvSpPr>
-          <p:cNvPr id="19" name="Oval 18"/>
-          <p:cNvSpPr/>
-          <p:nvPr/>
-        </p:nvSpPr>
-        <p:spPr>
-          <a:xfrm>
-            <a:off x="777240" y="4251960"/>
-            <a:ext cx="457200" cy="457200"/>
-          </a:xfrm>
-          <a:prstGeom prst="ellipse">
-            <a:avLst/>
-          </a:prstGeom>
-          <a:solidFill>
-            <a:srgbClr val="F2B705"/>
-          </a:solidFill>
-          <a:ln>
-            <a:noFill/>
-          </a:ln>
-          <a:effectLst/>
-        </p:spPr>
-        <p:style>
-          <a:lnRef idx="1">
-            <a:schemeClr val="accent1"/>
-          </a:lnRef>
-          <a:fillRef idx="3">
-            <a:schemeClr val="accent1"/>
-          </a:fillRef>
-          <a:effectRef idx="2">
-            <a:schemeClr val="accent1"/>
-          </a:effectRef>
-          <a:fontRef idx="minor">
-            <a:schemeClr val="lt1"/>
-          </a:fontRef>
-        </p:style>
-        <p:txBody>
-          <a:bodyPr rtlCol="0" anchor="ctr" lIns="0" rIns="0" tIns="0" bIns="0"/>
-          <a:lstStyle/>
-          <a:p>
-            <a:pPr algn="ctr"/>
-            <a:r>
-              <a:rPr sz="1500" b="1">
-                <a:solidFill>
-                  <a:srgbClr val="202122"/>
-                </a:solidFill>
-                <a:latin typeface="Calibri"/>
-              </a:rPr>
-              <a:t>4</a:t>
-            </a:r>
-          </a:p>
-        </p:txBody>
-      </p:sp>
-      <p:sp>
-        <p:nvSpPr>
-          <p:cNvPr id="20" name="TextBox 19"/>
-          <p:cNvSpPr txBox="1"/>
-          <p:nvPr/>
-        </p:nvSpPr>
-        <p:spPr>
-          <a:xfrm>
-            <a:off x="1371600" y="4224528"/>
-            <a:ext cx="2509418" cy="512064"/>
-          </a:xfrm>
-          <a:prstGeom prst="rect">
-            <a:avLst/>
-          </a:prstGeom>
-          <a:noFill/>
-        </p:spPr>
-        <p:txBody>
-          <a:bodyPr wrap="square" anchor="ctr" lIns="0" rIns="0" tIns="0" bIns="0"/>
-          <a:lstStyle/>
-          <a:p>
-            <a:pPr algn="l"/>
-            <a:r>
-              <a:rPr sz="1900" b="1" i="0">
-                <a:solidFill>
-                  <a:srgbClr val="03306E"/>
-                </a:solidFill>
-                <a:latin typeface="Calibri"/>
-              </a:rPr>
-              <a:t>Compatibility</a:t>
-            </a:r>
-          </a:p>
-        </p:txBody>
-      </p:sp>
-      <p:sp>
-        <p:nvSpPr>
-          <p:cNvPr id="21" name="TextBox 20"/>
-          <p:cNvSpPr txBox="1"/>
-          <p:nvPr/>
-        </p:nvSpPr>
-        <p:spPr>
-          <a:xfrm>
-            <a:off x="777240" y="4892040"/>
-            <a:ext cx="3058058" cy="1143000"/>
-          </a:xfrm>
-          <a:prstGeom prst="rect">
-            <a:avLst/>
-          </a:prstGeom>
-          <a:noFill/>
-        </p:spPr>
-        <p:txBody>
-          <a:bodyPr wrap="square" anchor="t" lIns="0" rIns="0" tIns="0" bIns="0"/>
-          <a:lstStyle/>
-          <a:p>
-            <a:pPr algn="l"/>
-            <a:r>
-              <a:rPr sz="2000" b="0" i="0">
-                <a:solidFill>
-                  <a:srgbClr val="202122"/>
-                </a:solidFill>
-                <a:latin typeface="Calibri"/>
-              </a:rPr>
-              <a:t>Works with legacy, future and external systems.</a:t>
-            </a:r>
-          </a:p>
-        </p:txBody>
-      </p:sp>
-      <p:sp>
-        <p:nvSpPr>
-          <p:cNvPr id="22" name="Rounded Rectangle 21"/>
-          <p:cNvSpPr/>
-          <p:nvPr/>
-        </p:nvSpPr>
-        <p:spPr>
-          <a:xfrm>
-            <a:off x="4338218" y="4023360"/>
-            <a:ext cx="3515258" cy="2148840"/>
-          </a:xfrm>
-          <a:prstGeom prst="roundRect">
-            <a:avLst>
-              <a:gd name="adj" fmla="val 6000"/>
-            </a:avLst>
-          </a:prstGeom>
-          <a:solidFill>
-            <a:srgbClr val="EAF3FF"/>
-          </a:solidFill>
-          <a:ln>
-            <a:noFill/>
-          </a:ln>
-          <a:effectLst/>
-        </p:spPr>
-        <p:style>
-          <a:lnRef idx="1">
-            <a:schemeClr val="accent1"/>
-          </a:lnRef>
-          <a:fillRef idx="3">
-            <a:schemeClr val="accent1"/>
-          </a:fillRef>
-          <a:effectRef idx="2">
-            <a:schemeClr val="accent1"/>
-          </a:effectRef>
-          <a:fontRef idx="minor">
-            <a:schemeClr val="lt1"/>
-          </a:fontRef>
-        </p:style>
-        <p:txBody>
-          <a:bodyPr rtlCol="0" anchor="ctr"/>
-          <a:lstStyle/>
-          <a:p/>
-        </p:txBody>
-      </p:sp>
-      <p:sp>
-        <p:nvSpPr>
-          <p:cNvPr id="23" name="Oval 22"/>
-          <p:cNvSpPr/>
-          <p:nvPr/>
-        </p:nvSpPr>
-        <p:spPr>
-          <a:xfrm>
-            <a:off x="4566818" y="4251960"/>
-            <a:ext cx="457200" cy="457200"/>
-          </a:xfrm>
-          <a:prstGeom prst="ellipse">
-            <a:avLst/>
-          </a:prstGeom>
-          <a:solidFill>
-            <a:srgbClr val="F2B705"/>
-          </a:solidFill>
-          <a:ln>
-            <a:noFill/>
-          </a:ln>
-          <a:effectLst/>
-        </p:spPr>
-        <p:style>
-          <a:lnRef idx="1">
-            <a:schemeClr val="accent1"/>
-          </a:lnRef>
-          <a:fillRef idx="3">
-            <a:schemeClr val="accent1"/>
-          </a:fillRef>
-          <a:effectRef idx="2">
-            <a:schemeClr val="accent1"/>
-          </a:effectRef>
-          <a:fontRef idx="minor">
-            <a:schemeClr val="lt1"/>
-          </a:fontRef>
-        </p:style>
-        <p:txBody>
-          <a:bodyPr rtlCol="0" anchor="ctr" lIns="0" rIns="0" tIns="0" bIns="0"/>
-          <a:lstStyle/>
-          <a:p>
-            <a:pPr algn="ctr"/>
-            <a:r>
-              <a:rPr sz="1500" b="1">
-                <a:solidFill>
-                  <a:srgbClr val="202122"/>
-                </a:solidFill>
-                <a:latin typeface="Calibri"/>
-              </a:rPr>
-              <a:t>5</a:t>
-            </a:r>
-          </a:p>
-        </p:txBody>
-      </p:sp>
-      <p:sp>
-        <p:nvSpPr>
-          <p:cNvPr id="24" name="TextBox 23"/>
-          <p:cNvSpPr txBox="1"/>
-          <p:nvPr/>
-        </p:nvSpPr>
-        <p:spPr>
-          <a:xfrm>
-            <a:off x="5161178" y="4224528"/>
-            <a:ext cx="2509418" cy="512064"/>
-          </a:xfrm>
-          <a:prstGeom prst="rect">
-            <a:avLst/>
-          </a:prstGeom>
-          <a:noFill/>
-        </p:spPr>
-        <p:txBody>
-          <a:bodyPr wrap="square" anchor="ctr" lIns="0" rIns="0" tIns="0" bIns="0"/>
-          <a:lstStyle/>
-          <a:p>
-            <a:pPr algn="l"/>
-            <a:r>
-              <a:rPr sz="1900" b="1" i="0">
-                <a:solidFill>
-                  <a:srgbClr val="03306E"/>
-                </a:solidFill>
-                <a:latin typeface="Calibri"/>
-              </a:rPr>
-              <a:t>Availability</a:t>
-            </a:r>
-          </a:p>
-        </p:txBody>
-      </p:sp>
-      <p:sp>
-        <p:nvSpPr>
-          <p:cNvPr id="25" name="TextBox 24"/>
-          <p:cNvSpPr txBox="1"/>
-          <p:nvPr/>
-        </p:nvSpPr>
-        <p:spPr>
-          <a:xfrm>
-            <a:off x="4566818" y="4892040"/>
-            <a:ext cx="3058058" cy="1143000"/>
-          </a:xfrm>
-          <a:prstGeom prst="rect">
-            <a:avLst/>
-          </a:prstGeom>
-          <a:noFill/>
-        </p:spPr>
-        <p:txBody>
-          <a:bodyPr wrap="square" anchor="t" lIns="0" rIns="0" tIns="0" bIns="0"/>
-          <a:lstStyle/>
-          <a:p>
-            <a:pPr algn="l"/>
-            <a:r>
-              <a:rPr sz="2000" b="0" i="0">
-                <a:solidFill>
-                  <a:srgbClr val="202122"/>
-                </a:solidFill>
-                <a:latin typeface="Calibri"/>
-              </a:rPr>
-              <a:t>Minimal downtime.</a:t>
-            </a:r>
-          </a:p>
-        </p:txBody>
-      </p:sp>
-      <p:sp>
-        <p:nvSpPr>
-          <p:cNvPr id="26" name="Rounded Rectangle 25"/>
-          <p:cNvSpPr/>
-          <p:nvPr/>
-        </p:nvSpPr>
-        <p:spPr>
-          <a:xfrm>
-            <a:off x="8127796" y="4023360"/>
-            <a:ext cx="3515258" cy="2148840"/>
-          </a:xfrm>
-          <a:prstGeom prst="roundRect">
-            <a:avLst>
-              <a:gd name="adj" fmla="val 6000"/>
-            </a:avLst>
-          </a:prstGeom>
-          <a:solidFill>
-            <a:srgbClr val="EAF3FF"/>
-          </a:solidFill>
-          <a:ln>
-            <a:noFill/>
-          </a:ln>
-          <a:effectLst/>
-        </p:spPr>
-        <p:style>
-          <a:lnRef idx="1">
-            <a:schemeClr val="accent1"/>
-          </a:lnRef>
-          <a:fillRef idx="3">
-            <a:schemeClr val="accent1"/>
-          </a:fillRef>
-          <a:effectRef idx="2">
-            <a:schemeClr val="accent1"/>
-          </a:effectRef>
-          <a:fontRef idx="minor">
-            <a:schemeClr val="lt1"/>
-          </a:fontRef>
-        </p:style>
-        <p:txBody>
-          <a:bodyPr rtlCol="0" anchor="ctr"/>
-          <a:lstStyle/>
-          <a:p/>
-        </p:txBody>
-      </p:sp>
-      <p:sp>
-        <p:nvSpPr>
-          <p:cNvPr id="27" name="Oval 26"/>
-          <p:cNvSpPr/>
-          <p:nvPr/>
-        </p:nvSpPr>
-        <p:spPr>
-          <a:xfrm>
-            <a:off x="8356396" y="4251960"/>
-            <a:ext cx="457200" cy="457200"/>
-          </a:xfrm>
-          <a:prstGeom prst="ellipse">
-            <a:avLst/>
-          </a:prstGeom>
-          <a:solidFill>
-            <a:srgbClr val="F2B705"/>
-          </a:solidFill>
-          <a:ln>
-            <a:noFill/>
-          </a:ln>
-          <a:effectLst/>
-        </p:spPr>
-        <p:style>
-          <a:lnRef idx="1">
-            <a:schemeClr val="accent1"/>
-          </a:lnRef>
-          <a:fillRef idx="3">
-            <a:schemeClr val="accent1"/>
-          </a:fillRef>
-          <a:effectRef idx="2">
-            <a:schemeClr val="accent1"/>
-          </a:effectRef>
-          <a:fontRef idx="minor">
-            <a:schemeClr val="lt1"/>
-          </a:fontRef>
-        </p:style>
-        <p:txBody>
-          <a:bodyPr rtlCol="0" anchor="ctr" lIns="0" rIns="0" tIns="0" bIns="0"/>
-          <a:lstStyle/>
-          <a:p>
-            <a:pPr algn="ctr"/>
-            <a:r>
-              <a:rPr sz="1500" b="1">
-                <a:solidFill>
-                  <a:srgbClr val="202122"/>
-                </a:solidFill>
-                <a:latin typeface="Calibri"/>
-              </a:rPr>
-              <a:t>6</a:t>
-            </a:r>
-          </a:p>
-        </p:txBody>
-      </p:sp>
-      <p:sp>
-        <p:nvSpPr>
-          <p:cNvPr id="28" name="TextBox 27"/>
-          <p:cNvSpPr txBox="1"/>
-          <p:nvPr/>
-        </p:nvSpPr>
-        <p:spPr>
-          <a:xfrm>
-            <a:off x="8950756" y="4224528"/>
-            <a:ext cx="2509418" cy="512064"/>
-          </a:xfrm>
-          <a:prstGeom prst="rect">
-            <a:avLst/>
-          </a:prstGeom>
-          <a:noFill/>
-        </p:spPr>
-        <p:txBody>
-          <a:bodyPr wrap="square" anchor="ctr" lIns="0" rIns="0" tIns="0" bIns="0"/>
-          <a:lstStyle/>
-          <a:p>
-            <a:pPr algn="l"/>
-            <a:r>
-              <a:rPr sz="1900" b="1" i="0">
-                <a:solidFill>
-                  <a:srgbClr val="03306E"/>
-                </a:solidFill>
-                <a:latin typeface="Calibri"/>
-              </a:rPr>
-              <a:t>Support</a:t>
-            </a:r>
-          </a:p>
-        </p:txBody>
-      </p:sp>
-      <p:sp>
-        <p:nvSpPr>
-          <p:cNvPr id="29" name="TextBox 28"/>
-          <p:cNvSpPr txBox="1"/>
-          <p:nvPr/>
-        </p:nvSpPr>
-        <p:spPr>
-          <a:xfrm>
-            <a:off x="8356396" y="4892040"/>
-            <a:ext cx="3058058" cy="1143000"/>
-          </a:xfrm>
-          <a:prstGeom prst="rect">
-            <a:avLst/>
-          </a:prstGeom>
-          <a:noFill/>
-        </p:spPr>
-        <p:txBody>
-          <a:bodyPr wrap="square" anchor="t" lIns="0" rIns="0" tIns="0" bIns="0"/>
-          <a:lstStyle/>
-          <a:p>
-            <a:pPr algn="l"/>
-            <a:r>
-              <a:rPr sz="2000" b="0" i="0">
-                <a:solidFill>
-                  <a:srgbClr val="202122"/>
-                </a:solidFill>
-                <a:latin typeface="Calibri"/>
-              </a:rPr>
-              <a:t>Good end-user support and easy installation.</a:t>
-            </a:r>
-          </a:p>
-        </p:txBody>
-      </p:sp>
-    </p:spTree>
-  </p:cSld>
-  <p:clrMapOvr>
-    <a:masterClrMapping/>
-  </p:clrMapOvr>
-</p:sld>
-</file>
-
-<file path=ppt/slides/slide6.xml><?xml version="1.0" encoding="utf-8"?>
-<p:sld xmlns:a="http://schemas.openxmlformats.org/drawingml/2006/main" xmlns:p="http://schemas.openxmlformats.org/presentationml/2006/main" xmlns:r="http://schemas.openxmlformats.org/officeDocument/2006/relationships">
-  <p:cSld>
-    <p:bg>
-      <p:bgPr>
-        <a:solidFill>
-          <a:srgbClr val="FFFFFF"/>
-        </a:solidFill>
-        <a:effectLst/>
-      </p:bgPr>
-    </p:bg>
-    <p:spTree>
-      <p:nvGrpSpPr>
-        <p:cNvPr id="1" name=""/>
-        <p:cNvGrpSpPr/>
-        <p:nvPr/>
-      </p:nvGrpSpPr>
-      <p:grpSpPr/>
-      <p:sp>
-        <p:nvSpPr>
-          <p:cNvPr id="2" name="TextBox 1"/>
-          <p:cNvSpPr txBox="1"/>
-          <p:nvPr/>
-        </p:nvSpPr>
-        <p:spPr>
-          <a:xfrm>
-            <a:off x="548640" y="320040"/>
-            <a:ext cx="11094415" cy="274320"/>
-          </a:xfrm>
-          <a:prstGeom prst="rect">
-            <a:avLst/>
-          </a:prstGeom>
-          <a:noFill/>
-        </p:spPr>
-        <p:txBody>
-          <a:bodyPr wrap="square" anchor="t" lIns="0" rIns="0" tIns="0" bIns="0"/>
-          <a:lstStyle/>
-          <a:p>
-            <a:pPr algn="l"/>
-            <a:r>
-              <a:rPr sz="1100" b="1" i="0">
-                <a:solidFill>
-                  <a:srgbClr val="54595D"/>
-                </a:solidFill>
-                <a:latin typeface="Calibri"/>
-              </a:rPr>
-              <a:t>CORE COMPONENT  ·  Core Paper 2</a:t>
-            </a:r>
-          </a:p>
-        </p:txBody>
-      </p:sp>
-      <p:sp>
-        <p:nvSpPr>
-          <p:cNvPr id="3" name="TextBox 2"/>
-          <p:cNvSpPr txBox="1"/>
-          <p:nvPr/>
-        </p:nvSpPr>
-        <p:spPr>
-          <a:xfrm>
-            <a:off x="548640" y="566928"/>
-            <a:ext cx="11094415" cy="822960"/>
-          </a:xfrm>
-          <a:prstGeom prst="rect">
-            <a:avLst/>
-          </a:prstGeom>
-          <a:noFill/>
-        </p:spPr>
-        <p:txBody>
-          <a:bodyPr wrap="square" anchor="ctr" lIns="0" rIns="0" tIns="0" bIns="0"/>
-          <a:lstStyle/>
-          <a:p>
-            <a:pPr algn="l"/>
-            <a:r>
-              <a:rPr sz="3200" b="1" i="0">
-                <a:solidFill>
-                  <a:srgbClr val="03306E"/>
-                </a:solidFill>
-                <a:latin typeface="Cambria"/>
-              </a:rPr>
-              <a:t>Risks and impacts</a:t>
-            </a:r>
-          </a:p>
-        </p:txBody>
-      </p:sp>
-      <p:sp>
-        <p:nvSpPr>
-          <p:cNvPr id="4" name="TextBox 3"/>
-          <p:cNvSpPr txBox="1"/>
-          <p:nvPr/>
-        </p:nvSpPr>
-        <p:spPr>
-          <a:xfrm>
-            <a:off x="548640" y="6446520"/>
-            <a:ext cx="8229600" cy="274320"/>
-          </a:xfrm>
-          <a:prstGeom prst="rect">
-            <a:avLst/>
-          </a:prstGeom>
-          <a:noFill/>
-        </p:spPr>
-        <p:txBody>
-          <a:bodyPr wrap="square" anchor="t" lIns="0" rIns="0" tIns="0" bIns="0"/>
-          <a:lstStyle/>
-          <a:p>
-            <a:pPr algn="l"/>
-            <a:r>
-              <a:rPr sz="1000" b="0" i="0">
-                <a:solidFill>
-                  <a:srgbClr val="54595D"/>
-                </a:solidFill>
-                <a:latin typeface="Calibri"/>
-              </a:rPr>
-              <a:t>Digital Software Development T Level  ·  The Business Context</a:t>
-            </a:r>
-          </a:p>
-        </p:txBody>
-      </p:sp>
-      <p:sp>
-        <p:nvSpPr>
-          <p:cNvPr id="5" name="TextBox 4"/>
-          <p:cNvSpPr txBox="1"/>
-          <p:nvPr/>
-        </p:nvSpPr>
-        <p:spPr>
-          <a:xfrm>
-            <a:off x="10728655" y="6446520"/>
-            <a:ext cx="914400" cy="274320"/>
-          </a:xfrm>
-          <a:prstGeom prst="rect">
-            <a:avLst/>
-          </a:prstGeom>
-          <a:noFill/>
-        </p:spPr>
-        <p:txBody>
-          <a:bodyPr wrap="square" anchor="t" lIns="0" rIns="0" tIns="0" bIns="0"/>
-          <a:lstStyle/>
-          <a:p>
-            <a:pPr algn="r"/>
-            <a:r>
-              <a:rPr sz="1000" b="0" i="0">
-                <a:solidFill>
-                  <a:srgbClr val="54595D"/>
-                </a:solidFill>
-                <a:latin typeface="Calibri"/>
-              </a:rPr>
-              <a:t>6</a:t>
-            </a:r>
-          </a:p>
-        </p:txBody>
-      </p:sp>
-      <p:sp>
-        <p:nvSpPr>
-          <p:cNvPr id="6" name="Rounded Rectangle 5"/>
-          <p:cNvSpPr/>
-          <p:nvPr/>
-        </p:nvSpPr>
-        <p:spPr>
-          <a:xfrm>
-            <a:off x="548640" y="1600200"/>
-            <a:ext cx="5364327" cy="640080"/>
-          </a:xfrm>
-          <a:prstGeom prst="roundRect">
-            <a:avLst>
-              <a:gd name="adj" fmla="val 15000"/>
-            </a:avLst>
-          </a:prstGeom>
-          <a:solidFill>
-            <a:srgbClr val="03306E"/>
-          </a:solidFill>
-          <a:ln>
-            <a:noFill/>
-          </a:ln>
-          <a:effectLst/>
-        </p:spPr>
-        <p:style>
-          <a:lnRef idx="1">
-            <a:schemeClr val="accent1"/>
-          </a:lnRef>
-          <a:fillRef idx="3">
-            <a:schemeClr val="accent1"/>
-          </a:fillRef>
-          <a:effectRef idx="2">
-            <a:schemeClr val="accent1"/>
-          </a:effectRef>
-          <a:fontRef idx="minor">
-            <a:schemeClr val="lt1"/>
-          </a:fontRef>
-        </p:style>
-        <p:txBody>
-          <a:bodyPr rtlCol="0" anchor="ctr"/>
-          <a:lstStyle/>
-          <a:p/>
-        </p:txBody>
-      </p:sp>
-      <p:sp>
-        <p:nvSpPr>
-          <p:cNvPr id="7" name="TextBox 6"/>
-          <p:cNvSpPr txBox="1"/>
-          <p:nvPr/>
-        </p:nvSpPr>
-        <p:spPr>
-          <a:xfrm>
-            <a:off x="777240" y="1600200"/>
-            <a:ext cx="4907127" cy="640080"/>
-          </a:xfrm>
-          <a:prstGeom prst="rect">
-            <a:avLst/>
-          </a:prstGeom>
-          <a:noFill/>
-        </p:spPr>
-        <p:txBody>
-          <a:bodyPr wrap="square" anchor="ctr" lIns="0" rIns="0" tIns="0" bIns="0"/>
-          <a:lstStyle/>
-          <a:p>
-            <a:pPr algn="l"/>
-            <a:r>
-              <a:rPr sz="2000" b="1" i="0">
-                <a:solidFill>
-                  <a:srgbClr val="FFFFFF"/>
-                </a:solidFill>
-                <a:latin typeface="Calibri"/>
-              </a:rPr>
-              <a:t>Risks</a:t>
-            </a:r>
-          </a:p>
-        </p:txBody>
-      </p:sp>
-      <p:sp>
-        <p:nvSpPr>
-          <p:cNvPr id="8" name="Rounded Rectangle 7"/>
-          <p:cNvSpPr/>
-          <p:nvPr/>
-        </p:nvSpPr>
-        <p:spPr>
-          <a:xfrm>
-            <a:off x="548640" y="2377440"/>
-            <a:ext cx="5364327" cy="3794760"/>
-          </a:xfrm>
-          <a:prstGeom prst="roundRect">
-            <a:avLst>
-              <a:gd name="adj" fmla="val 4000"/>
-            </a:avLst>
-          </a:prstGeom>
-          <a:solidFill>
-            <a:srgbClr val="EAF3FF"/>
-          </a:solidFill>
-          <a:ln>
-            <a:noFill/>
-          </a:ln>
-          <a:effectLst/>
-        </p:spPr>
-        <p:style>
-          <a:lnRef idx="1">
-            <a:schemeClr val="accent1"/>
-          </a:lnRef>
-          <a:fillRef idx="3">
-            <a:schemeClr val="accent1"/>
-          </a:fillRef>
-          <a:effectRef idx="2">
-            <a:schemeClr val="accent1"/>
-          </a:effectRef>
-          <a:fontRef idx="minor">
-            <a:schemeClr val="lt1"/>
-          </a:fontRef>
-        </p:style>
-        <p:txBody>
-          <a:bodyPr rtlCol="0" anchor="ctr"/>
-          <a:lstStyle/>
-          <a:p/>
-        </p:txBody>
-      </p:sp>
-      <p:sp>
-        <p:nvSpPr>
-          <p:cNvPr id="9" name="TextBox 8"/>
-          <p:cNvSpPr txBox="1"/>
-          <p:nvPr/>
-        </p:nvSpPr>
-        <p:spPr>
-          <a:xfrm>
-            <a:off x="822959" y="2606040"/>
-            <a:ext cx="4815687" cy="3337560"/>
-          </a:xfrm>
-          <a:prstGeom prst="rect">
-            <a:avLst/>
-          </a:prstGeom>
-          <a:noFill/>
-        </p:spPr>
-        <p:txBody>
-          <a:bodyPr wrap="square" lIns="0" rIns="0" tIns="0" bIns="0">
-            <a:spAutoFit/>
-          </a:bodyPr>
-          <a:lstStyle/>
-          <a:p>
-            <a:pPr marL="274320" indent="-274320">
-              <a:spcAft>
-                <a:spcPts val="945"/>
-              </a:spcAft>
-              <a:buClr>
-                <a:srgbClr val="0645AD"/>
-              </a:buClr>
-              <a:buFont typeface="Arial"/>
-              <a:buChar char="•"/>
-            </a:pPr>
-            <a:r>
-              <a:rPr sz="2100" b="0">
-                <a:solidFill>
-                  <a:srgbClr val="202122"/>
-                </a:solidFill>
-                <a:latin typeface="Calibri"/>
-              </a:rPr>
-              <a:t>Security and privacy breaches</a:t>
-            </a:r>
-          </a:p>
-          <a:p>
-            <a:pPr marL="274320" indent="-274320">
-              <a:spcAft>
-                <a:spcPts val="945"/>
-              </a:spcAft>
-              <a:buClr>
-                <a:srgbClr val="0645AD"/>
-              </a:buClr>
-              <a:buFont typeface="Arial"/>
-              <a:buChar char="•"/>
-            </a:pPr>
-            <a:r>
-              <a:rPr sz="2100" b="0">
-                <a:solidFill>
-                  <a:srgbClr val="202122"/>
-                </a:solidFill>
-                <a:latin typeface="Calibri"/>
-              </a:rPr>
-              <a:t>Legal or regulatory non-compliance</a:t>
-            </a:r>
-          </a:p>
-          <a:p>
-            <a:pPr marL="274320" indent="-274320">
-              <a:spcAft>
-                <a:spcPts val="945"/>
-              </a:spcAft>
-              <a:buClr>
-                <a:srgbClr val="0645AD"/>
-              </a:buClr>
-              <a:buFont typeface="Arial"/>
-              <a:buChar char="•"/>
-            </a:pPr>
-            <a:r>
-              <a:rPr sz="2100" b="0">
-                <a:solidFill>
-                  <a:srgbClr val="202122"/>
-                </a:solidFill>
-                <a:latin typeface="Calibri"/>
-              </a:rPr>
-              <a:t>Excluding users through bias or poor UX</a:t>
-            </a:r>
-          </a:p>
-          <a:p>
-            <a:pPr marL="274320" indent="-274320">
-              <a:spcAft>
-                <a:spcPts val="945"/>
-              </a:spcAft>
-              <a:buClr>
-                <a:srgbClr val="0645AD"/>
-              </a:buClr>
-              <a:buFont typeface="Arial"/>
-              <a:buChar char="•"/>
-            </a:pPr>
-            <a:r>
-              <a:rPr sz="2100" b="0">
-                <a:solidFill>
-                  <a:srgbClr val="202122"/>
-                </a:solidFill>
-                <a:latin typeface="Calibri"/>
-              </a:rPr>
-              <a:t>Rival technologies</a:t>
-            </a:r>
-          </a:p>
-          <a:p>
-            <a:pPr marL="274320" indent="-274320">
-              <a:spcAft>
-                <a:spcPts val="945"/>
-              </a:spcAft>
-              <a:buClr>
-                <a:srgbClr val="0645AD"/>
-              </a:buClr>
-              <a:buFont typeface="Arial"/>
-              <a:buChar char="•"/>
-            </a:pPr>
-            <a:r>
-              <a:rPr sz="2100" b="0">
-                <a:solidFill>
-                  <a:srgbClr val="202122"/>
-                </a:solidFill>
-                <a:latin typeface="Calibri"/>
-              </a:rPr>
-              <a:t>Over-reliance, failure or systems unfit for purpose</a:t>
-            </a:r>
-          </a:p>
-        </p:txBody>
-      </p:sp>
-      <p:sp>
-        <p:nvSpPr>
-          <p:cNvPr id="10" name="Rounded Rectangle 9"/>
-          <p:cNvSpPr/>
-          <p:nvPr/>
-        </p:nvSpPr>
-        <p:spPr>
-          <a:xfrm>
-            <a:off x="6278727" y="1600200"/>
-            <a:ext cx="5364327" cy="640080"/>
-          </a:xfrm>
-          <a:prstGeom prst="roundRect">
-            <a:avLst>
-              <a:gd name="adj" fmla="val 15000"/>
-            </a:avLst>
-          </a:prstGeom>
-          <a:solidFill>
-            <a:srgbClr val="0645AD"/>
-          </a:solidFill>
-          <a:ln>
-            <a:noFill/>
-          </a:ln>
-          <a:effectLst/>
-        </p:spPr>
-        <p:style>
-          <a:lnRef idx="1">
-            <a:schemeClr val="accent1"/>
-          </a:lnRef>
-          <a:fillRef idx="3">
-            <a:schemeClr val="accent1"/>
-          </a:fillRef>
-          <a:effectRef idx="2">
-            <a:schemeClr val="accent1"/>
-          </a:effectRef>
-          <a:fontRef idx="minor">
-            <a:schemeClr val="lt1"/>
-          </a:fontRef>
-        </p:style>
-        <p:txBody>
-          <a:bodyPr rtlCol="0" anchor="ctr"/>
-          <a:lstStyle/>
-          <a:p/>
-        </p:txBody>
-      </p:sp>
-      <p:sp>
-        <p:nvSpPr>
-          <p:cNvPr id="11" name="TextBox 10"/>
-          <p:cNvSpPr txBox="1"/>
-          <p:nvPr/>
-        </p:nvSpPr>
-        <p:spPr>
-          <a:xfrm>
-            <a:off x="6507327" y="1600200"/>
-            <a:ext cx="4907127" cy="640080"/>
-          </a:xfrm>
-          <a:prstGeom prst="rect">
-            <a:avLst/>
-          </a:prstGeom>
-          <a:noFill/>
-        </p:spPr>
-        <p:txBody>
-          <a:bodyPr wrap="square" anchor="ctr" lIns="0" rIns="0" tIns="0" bIns="0"/>
-          <a:lstStyle/>
-          <a:p>
-            <a:pPr algn="l"/>
-            <a:r>
-              <a:rPr sz="2000" b="1" i="0">
-                <a:solidFill>
-                  <a:srgbClr val="FFFFFF"/>
-                </a:solidFill>
-                <a:latin typeface="Calibri"/>
-              </a:rPr>
-              <a:t>Impacts</a:t>
-            </a:r>
-          </a:p>
-        </p:txBody>
-      </p:sp>
-      <p:sp>
-        <p:nvSpPr>
-          <p:cNvPr id="12" name="Rounded Rectangle 11"/>
-          <p:cNvSpPr/>
-          <p:nvPr/>
-        </p:nvSpPr>
-        <p:spPr>
-          <a:xfrm>
-            <a:off x="6278727" y="2377440"/>
-            <a:ext cx="5364327" cy="3794760"/>
-          </a:xfrm>
-          <a:prstGeom prst="roundRect">
-            <a:avLst>
-              <a:gd name="adj" fmla="val 4000"/>
-            </a:avLst>
-          </a:prstGeom>
-          <a:solidFill>
-            <a:srgbClr val="EAF3FF"/>
-          </a:solidFill>
-          <a:ln>
-            <a:noFill/>
-          </a:ln>
-          <a:effectLst/>
-        </p:spPr>
-        <p:style>
-          <a:lnRef idx="1">
-            <a:schemeClr val="accent1"/>
-          </a:lnRef>
-          <a:fillRef idx="3">
-            <a:schemeClr val="accent1"/>
-          </a:fillRef>
-          <a:effectRef idx="2">
-            <a:schemeClr val="accent1"/>
-          </a:effectRef>
-          <a:fontRef idx="minor">
-            <a:schemeClr val="lt1"/>
-          </a:fontRef>
-        </p:style>
-        <p:txBody>
-          <a:bodyPr rtlCol="0" anchor="ctr"/>
-          <a:lstStyle/>
-          <a:p/>
-        </p:txBody>
-      </p:sp>
-      <p:sp>
-        <p:nvSpPr>
-          <p:cNvPr id="13" name="TextBox 12"/>
-          <p:cNvSpPr txBox="1"/>
-          <p:nvPr/>
-        </p:nvSpPr>
-        <p:spPr>
-          <a:xfrm>
-            <a:off x="6553047" y="2606040"/>
-            <a:ext cx="4815687" cy="3337560"/>
-          </a:xfrm>
-          <a:prstGeom prst="rect">
-            <a:avLst/>
-          </a:prstGeom>
-          <a:noFill/>
-        </p:spPr>
-        <p:txBody>
-          <a:bodyPr wrap="square" lIns="0" rIns="0" tIns="0" bIns="0">
-            <a:spAutoFit/>
-          </a:bodyPr>
-          <a:lstStyle/>
-          <a:p>
-            <a:pPr marL="274320" indent="-274320">
-              <a:spcAft>
-                <a:spcPts val="990"/>
-              </a:spcAft>
-              <a:buClr>
-                <a:srgbClr val="0645AD"/>
-              </a:buClr>
-              <a:buFont typeface="Arial"/>
-              <a:buChar char="•"/>
-            </a:pPr>
-            <a:r>
-              <a:rPr sz="2200" b="0">
-                <a:solidFill>
-                  <a:srgbClr val="202122"/>
-                </a:solidFill>
-                <a:latin typeface="Calibri"/>
-              </a:rPr>
-              <a:t>Legal action</a:t>
-            </a:r>
-          </a:p>
-          <a:p>
-            <a:pPr marL="274320" indent="-274320">
-              <a:spcAft>
-                <a:spcPts val="990"/>
-              </a:spcAft>
-              <a:buClr>
-                <a:srgbClr val="0645AD"/>
-              </a:buClr>
-              <a:buFont typeface="Arial"/>
-              <a:buChar char="•"/>
-            </a:pPr>
-            <a:r>
-              <a:rPr sz="2200" b="0">
-                <a:solidFill>
-                  <a:srgbClr val="202122"/>
-                </a:solidFill>
-                <a:latin typeface="Calibri"/>
-              </a:rPr>
-              <a:t>Fines</a:t>
-            </a:r>
-          </a:p>
-          <a:p>
-            <a:pPr marL="274320" indent="-274320">
-              <a:spcAft>
-                <a:spcPts val="990"/>
-              </a:spcAft>
-              <a:buClr>
-                <a:srgbClr val="0645AD"/>
-              </a:buClr>
-              <a:buFont typeface="Arial"/>
-              <a:buChar char="•"/>
-            </a:pPr>
-            <a:r>
-              <a:rPr sz="2200" b="0">
-                <a:solidFill>
-                  <a:srgbClr val="202122"/>
-                </a:solidFill>
-                <a:latin typeface="Calibri"/>
-              </a:rPr>
-              <a:t>Reputational damage</a:t>
-            </a:r>
-          </a:p>
-          <a:p>
-            <a:pPr marL="274320" indent="-274320">
-              <a:spcAft>
-                <a:spcPts val="990"/>
-              </a:spcAft>
-              <a:buClr>
-                <a:srgbClr val="0645AD"/>
-              </a:buClr>
-              <a:buFont typeface="Arial"/>
-              <a:buChar char="•"/>
-            </a:pPr>
-            <a:r>
-              <a:rPr sz="2200" b="0">
-                <a:solidFill>
-                  <a:srgbClr val="202122"/>
-                </a:solidFill>
-                <a:latin typeface="Calibri"/>
-              </a:rPr>
-              <a:t>Loss of licence to practise</a:t>
-            </a:r>
-          </a:p>
-          <a:p>
-            <a:pPr marL="274320" indent="-274320">
-              <a:spcAft>
-                <a:spcPts val="990"/>
-              </a:spcAft>
-              <a:buClr>
-                <a:srgbClr val="0645AD"/>
-              </a:buClr>
-              <a:buFont typeface="Arial"/>
-              <a:buChar char="•"/>
-            </a:pPr>
-            <a:r>
-              <a:rPr sz="2200" b="0">
-                <a:solidFill>
-                  <a:srgbClr val="202122"/>
-                </a:solidFill>
-                <a:latin typeface="Calibri"/>
-              </a:rPr>
-              <a:t>Lost business</a:t>
-            </a:r>
-          </a:p>
-        </p:txBody>
-      </p:sp>
-    </p:spTree>
-  </p:cSld>
-  <p:clrMapOvr>
-    <a:masterClrMapping/>
-  </p:clrMapOvr>
-</p:sld>
-</file>
-
 <file path=ppt/slides/slide7.xml><?xml version="1.0" encoding="utf-8"?>
 <p:sld xmlns:a="http://schemas.openxmlformats.org/drawingml/2006/main" xmlns:p="http://schemas.openxmlformats.org/presentationml/2006/main" xmlns:r="http://schemas.openxmlformats.org/officeDocument/2006/relationships">
   <p:cSld>
@@ -8334,7 +11000,7 @@
                 </a:solidFill>
                 <a:latin typeface="Cambria"/>
               </a:rPr>
-              <a:t>Check your understanding</a:t>
+              <a:t>What users expect from software</a:t>
             </a:r>
           </a:p>
         </p:txBody>
@@ -8407,14 +11073,138 @@
       </p:sp>
       <p:sp>
         <p:nvSpPr>
-          <p:cNvPr id="6" name="Oval 5"/>
+          <p:cNvPr id="6" name="TextBox 5"/>
+          <p:cNvSpPr txBox="1"/>
+          <p:nvPr/>
+        </p:nvSpPr>
+        <p:spPr>
+          <a:xfrm>
+            <a:off x="548640" y="1554480"/>
+            <a:ext cx="6720840" cy="4617720"/>
+          </a:xfrm>
+          <a:prstGeom prst="rect">
+            <a:avLst/>
+          </a:prstGeom>
+          <a:noFill/>
+        </p:spPr>
+        <p:txBody>
+          <a:bodyPr wrap="square" lIns="0" rIns="0" tIns="0" bIns="0">
+            <a:spAutoFit/>
+          </a:bodyPr>
+          <a:lstStyle/>
+          <a:p>
+            <a:pPr>
+              <a:spcAft>
+                <a:spcPts val="1320"/>
+              </a:spcAft>
+            </a:pPr>
+            <a:r>
+              <a:rPr sz="2200" b="0">
+                <a:solidFill>
+                  <a:srgbClr val="202122"/>
+                </a:solidFill>
+                <a:latin typeface="Calibri"/>
+              </a:rPr>
+              <a:t>Software must meet users' needs and quality expectations to add value.</a:t>
+            </a:r>
+          </a:p>
+          <a:p>
+            <a:pPr>
+              <a:spcAft>
+                <a:spcPts val="1320"/>
+              </a:spcAft>
+            </a:pPr>
+            <a:r>
+              <a:rPr sz="2200" b="1">
+                <a:solidFill>
+                  <a:srgbClr val="202122"/>
+                </a:solidFill>
+                <a:latin typeface="Calibri"/>
+              </a:rPr>
+              <a:t>Functionality:</a:t>
+            </a:r>
+            <a:r>
+              <a:rPr sz="2200" b="0">
+                <a:solidFill>
+                  <a:srgbClr val="202122"/>
+                </a:solidFill>
+                <a:latin typeface="Calibri"/>
+              </a:rPr>
+              <a:t> it does the job properly. Fewer pain points: fast responses and simple tasks. Accessibility: usable by everyone. Compatibility: works with older (legacy) systems, future systems and external services. Availability: minimal downtime. Support: good help for users and easy installation.</a:t>
+            </a:r>
+          </a:p>
+          <a:p>
+            <a:pPr>
+              <a:spcAft>
+                <a:spcPts val="1320"/>
+              </a:spcAft>
+            </a:pPr>
+            <a:r>
+              <a:rPr sz="2200" b="0">
+                <a:solidFill>
+                  <a:srgbClr val="202122"/>
+                </a:solidFill>
+                <a:latin typeface="Calibri"/>
+              </a:rPr>
+              <a:t>Software that misses these gets abandoned, however clever its code.</a:t>
+            </a:r>
+          </a:p>
+        </p:txBody>
+      </p:sp>
+      <p:sp>
+        <p:nvSpPr>
+          <p:cNvPr id="7" name="Rounded Rectangle 6"/>
           <p:cNvSpPr/>
           <p:nvPr/>
         </p:nvSpPr>
         <p:spPr>
           <a:xfrm>
-            <a:off x="548640" y="1618488"/>
-            <a:ext cx="411480" cy="411480"/>
+            <a:off x="7772400" y="1554480"/>
+            <a:ext cx="3867912" cy="4526280"/>
+          </a:xfrm>
+          <a:prstGeom prst="roundRect">
+            <a:avLst>
+              <a:gd name="adj" fmla="val 8000"/>
+            </a:avLst>
+          </a:prstGeom>
+          <a:solidFill>
+            <a:srgbClr val="03306E"/>
+          </a:solidFill>
+          <a:ln>
+            <a:noFill/>
+          </a:ln>
+          <a:effectLst/>
+        </p:spPr>
+        <p:style>
+          <a:lnRef idx="1">
+            <a:schemeClr val="accent1"/>
+          </a:lnRef>
+          <a:fillRef idx="3">
+            <a:schemeClr val="accent1"/>
+          </a:fillRef>
+          <a:effectRef idx="2">
+            <a:schemeClr val="accent1"/>
+          </a:effectRef>
+          <a:fontRef idx="minor">
+            <a:schemeClr val="lt1"/>
+          </a:fontRef>
+        </p:style>
+        <p:txBody>
+          <a:bodyPr rtlCol="0" anchor="ctr"/>
+          <a:lstStyle/>
+          <a:p/>
+        </p:txBody>
+      </p:sp>
+      <p:sp>
+        <p:nvSpPr>
+          <p:cNvPr id="8" name="Oval 7"/>
+          <p:cNvSpPr/>
+          <p:nvPr/>
+        </p:nvSpPr>
+        <p:spPr>
+          <a:xfrm>
+            <a:off x="8046720" y="1828800"/>
+            <a:ext cx="548640" cy="548640"/>
           </a:xfrm>
           <a:prstGeom prst="ellipse">
             <a:avLst/>
@@ -8447,27 +11237,27 @@
           <a:p>
             <a:pPr algn="ctr"/>
             <a:r>
-              <a:rPr sz="1400" b="1">
+              <a:rPr sz="1300" b="1">
                 <a:solidFill>
                   <a:srgbClr val="202122"/>
                 </a:solidFill>
                 <a:latin typeface="Calibri"/>
               </a:rPr>
-              <a:t>1</a:t>
-            </a:r>
-          </a:p>
-        </p:txBody>
-      </p:sp>
-      <p:sp>
-        <p:nvSpPr>
-          <p:cNvPr id="7" name="TextBox 6"/>
-          <p:cNvSpPr txBox="1"/>
-          <p:nvPr/>
-        </p:nvSpPr>
-        <p:spPr>
-          <a:xfrm>
-            <a:off x="1234440" y="1600200"/>
-            <a:ext cx="10408615" cy="1030986"/>
+              <a:t>e.g.</a:t>
+            </a:r>
+          </a:p>
+        </p:txBody>
+      </p:sp>
+      <p:sp>
+        <p:nvSpPr>
+          <p:cNvPr id="9" name="TextBox 8"/>
+          <p:cNvSpPr txBox="1"/>
+          <p:nvPr/>
+        </p:nvSpPr>
+        <p:spPr>
+          <a:xfrm>
+            <a:off x="8046720" y="2560320"/>
+            <a:ext cx="3291840" cy="365760"/>
           </a:xfrm>
           <a:prstGeom prst="rect">
             <a:avLst/>
@@ -8480,80 +11270,27 @@
           <a:p>
             <a:pPr algn="l"/>
             <a:r>
-              <a:rPr sz="2200" b="0" i="0">
-                <a:solidFill>
-                  <a:srgbClr val="202122"/>
-                </a:solidFill>
-                <a:latin typeface="Calibri"/>
-              </a:rPr>
-              <a:t>What does B2C mean?</a:t>
-            </a:r>
-          </a:p>
-        </p:txBody>
-      </p:sp>
-      <p:sp>
-        <p:nvSpPr>
-          <p:cNvPr id="8" name="Oval 7"/>
-          <p:cNvSpPr/>
-          <p:nvPr/>
-        </p:nvSpPr>
-        <p:spPr>
-          <a:xfrm>
-            <a:off x="548640" y="2814066"/>
-            <a:ext cx="411480" cy="411480"/>
-          </a:xfrm>
-          <a:prstGeom prst="ellipse">
-            <a:avLst/>
-          </a:prstGeom>
-          <a:solidFill>
-            <a:srgbClr val="F2B705"/>
-          </a:solidFill>
-          <a:ln>
-            <a:noFill/>
-          </a:ln>
-          <a:effectLst/>
-        </p:spPr>
-        <p:style>
-          <a:lnRef idx="1">
-            <a:schemeClr val="accent1"/>
-          </a:lnRef>
-          <a:fillRef idx="3">
-            <a:schemeClr val="accent1"/>
-          </a:fillRef>
-          <a:effectRef idx="2">
-            <a:schemeClr val="accent1"/>
-          </a:effectRef>
-          <a:fontRef idx="minor">
-            <a:schemeClr val="lt1"/>
-          </a:fontRef>
-        </p:style>
-        <p:txBody>
-          <a:bodyPr rtlCol="0" anchor="ctr" lIns="0" rIns="0" tIns="0" bIns="0"/>
-          <a:lstStyle/>
-          <a:p>
-            <a:pPr algn="ctr"/>
-            <a:r>
-              <a:rPr sz="1400" b="1">
-                <a:solidFill>
-                  <a:srgbClr val="202122"/>
-                </a:solidFill>
-                <a:latin typeface="Calibri"/>
-              </a:rPr>
-              <a:t>2</a:t>
-            </a:r>
-          </a:p>
-        </p:txBody>
-      </p:sp>
-      <p:sp>
-        <p:nvSpPr>
-          <p:cNvPr id="9" name="TextBox 8"/>
-          <p:cNvSpPr txBox="1"/>
-          <p:nvPr/>
-        </p:nvSpPr>
-        <p:spPr>
-          <a:xfrm>
-            <a:off x="1234440" y="2795778"/>
-            <a:ext cx="10408615" cy="1030986"/>
+              <a:rPr sz="1300" b="1" i="0">
+                <a:solidFill>
+                  <a:srgbClr val="A9C8F0"/>
+                </a:solidFill>
+                <a:latin typeface="Calibri"/>
+              </a:rPr>
+              <a:t>EXAMPLE</a:t>
+            </a:r>
+          </a:p>
+        </p:txBody>
+      </p:sp>
+      <p:sp>
+        <p:nvSpPr>
+          <p:cNvPr id="10" name="TextBox 9"/>
+          <p:cNvSpPr txBox="1"/>
+          <p:nvPr/>
+        </p:nvSpPr>
+        <p:spPr>
+          <a:xfrm>
+            <a:off x="8046720" y="2971800"/>
+            <a:ext cx="3291840" cy="2971800"/>
           </a:xfrm>
           <a:prstGeom prst="rect">
             <a:avLst/>
@@ -8566,185 +11303,13 @@
           <a:p>
             <a:pPr algn="l"/>
             <a:r>
-              <a:rPr sz="2200" b="0" i="0">
-                <a:solidFill>
-                  <a:srgbClr val="202122"/>
-                </a:solidFill>
-                <a:latin typeface="Calibri"/>
-              </a:rPr>
-              <a:t>Is a shareholder an internal or external stakeholder?</a:t>
-            </a:r>
-          </a:p>
-        </p:txBody>
-      </p:sp>
-      <p:sp>
-        <p:nvSpPr>
-          <p:cNvPr id="10" name="Oval 9"/>
-          <p:cNvSpPr/>
-          <p:nvPr/>
-        </p:nvSpPr>
-        <p:spPr>
-          <a:xfrm>
-            <a:off x="548640" y="4009644"/>
-            <a:ext cx="411480" cy="411480"/>
-          </a:xfrm>
-          <a:prstGeom prst="ellipse">
-            <a:avLst/>
-          </a:prstGeom>
-          <a:solidFill>
-            <a:srgbClr val="F2B705"/>
-          </a:solidFill>
-          <a:ln>
-            <a:noFill/>
-          </a:ln>
-          <a:effectLst/>
-        </p:spPr>
-        <p:style>
-          <a:lnRef idx="1">
-            <a:schemeClr val="accent1"/>
-          </a:lnRef>
-          <a:fillRef idx="3">
-            <a:schemeClr val="accent1"/>
-          </a:fillRef>
-          <a:effectRef idx="2">
-            <a:schemeClr val="accent1"/>
-          </a:effectRef>
-          <a:fontRef idx="minor">
-            <a:schemeClr val="lt1"/>
-          </a:fontRef>
-        </p:style>
-        <p:txBody>
-          <a:bodyPr rtlCol="0" anchor="ctr" lIns="0" rIns="0" tIns="0" bIns="0"/>
-          <a:lstStyle/>
-          <a:p>
-            <a:pPr algn="ctr"/>
-            <a:r>
-              <a:rPr sz="1400" b="1">
-                <a:solidFill>
-                  <a:srgbClr val="202122"/>
-                </a:solidFill>
-                <a:latin typeface="Calibri"/>
-              </a:rPr>
-              <a:t>3</a:t>
-            </a:r>
-          </a:p>
-        </p:txBody>
-      </p:sp>
-      <p:sp>
-        <p:nvSpPr>
-          <p:cNvPr id="11" name="TextBox 10"/>
-          <p:cNvSpPr txBox="1"/>
-          <p:nvPr/>
-        </p:nvSpPr>
-        <p:spPr>
-          <a:xfrm>
-            <a:off x="1234440" y="3991356"/>
-            <a:ext cx="10408615" cy="1030986"/>
-          </a:xfrm>
-          <a:prstGeom prst="rect">
-            <a:avLst/>
-          </a:prstGeom>
-          <a:noFill/>
-        </p:spPr>
-        <p:txBody>
-          <a:bodyPr wrap="square" anchor="t" lIns="0" rIns="0" tIns="0" bIns="0"/>
-          <a:lstStyle/>
-          <a:p>
-            <a:pPr algn="l"/>
-            <a:r>
-              <a:rPr sz="2200" b="0" i="0">
-                <a:solidFill>
-                  <a:srgbClr val="202122"/>
-                </a:solidFill>
-                <a:latin typeface="Calibri"/>
-              </a:rPr>
-              <a:t>What is a 'pain point'?</a:t>
-            </a:r>
-          </a:p>
-        </p:txBody>
-      </p:sp>
-      <p:sp>
-        <p:nvSpPr>
-          <p:cNvPr id="12" name="Oval 11"/>
-          <p:cNvSpPr/>
-          <p:nvPr/>
-        </p:nvSpPr>
-        <p:spPr>
-          <a:xfrm>
-            <a:off x="548640" y="5205221"/>
-            <a:ext cx="411480" cy="411480"/>
-          </a:xfrm>
-          <a:prstGeom prst="ellipse">
-            <a:avLst/>
-          </a:prstGeom>
-          <a:solidFill>
-            <a:srgbClr val="F2B705"/>
-          </a:solidFill>
-          <a:ln>
-            <a:noFill/>
-          </a:ln>
-          <a:effectLst/>
-        </p:spPr>
-        <p:style>
-          <a:lnRef idx="1">
-            <a:schemeClr val="accent1"/>
-          </a:lnRef>
-          <a:fillRef idx="3">
-            <a:schemeClr val="accent1"/>
-          </a:fillRef>
-          <a:effectRef idx="2">
-            <a:schemeClr val="accent1"/>
-          </a:effectRef>
-          <a:fontRef idx="minor">
-            <a:schemeClr val="lt1"/>
-          </a:fontRef>
-        </p:style>
-        <p:txBody>
-          <a:bodyPr rtlCol="0" anchor="ctr" lIns="0" rIns="0" tIns="0" bIns="0"/>
-          <a:lstStyle/>
-          <a:p>
-            <a:pPr algn="ctr"/>
-            <a:r>
-              <a:rPr sz="1400" b="1">
-                <a:solidFill>
-                  <a:srgbClr val="202122"/>
-                </a:solidFill>
-                <a:latin typeface="Calibri"/>
-              </a:rPr>
-              <a:t>4</a:t>
-            </a:r>
-          </a:p>
-        </p:txBody>
-      </p:sp>
-      <p:sp>
-        <p:nvSpPr>
-          <p:cNvPr id="13" name="TextBox 12"/>
-          <p:cNvSpPr txBox="1"/>
-          <p:nvPr/>
-        </p:nvSpPr>
-        <p:spPr>
-          <a:xfrm>
-            <a:off x="1234440" y="5186933"/>
-            <a:ext cx="10408615" cy="1030986"/>
-          </a:xfrm>
-          <a:prstGeom prst="rect">
-            <a:avLst/>
-          </a:prstGeom>
-          <a:noFill/>
-        </p:spPr>
-        <p:txBody>
-          <a:bodyPr wrap="square" anchor="t" lIns="0" rIns="0" tIns="0" bIns="0"/>
-          <a:lstStyle/>
-          <a:p>
-            <a:pPr algn="l"/>
-            <a:r>
-              <a:rPr sz="2200" b="0" i="0">
-                <a:solidFill>
-                  <a:srgbClr val="202122"/>
-                </a:solidFill>
-                <a:latin typeface="Calibri"/>
-              </a:rPr>
-              <a:t>Name two impacts of a data breach.</a:t>
+              <a:rPr sz="1900" b="0" i="0">
+                <a:solidFill>
+                  <a:srgbClr val="FFFFFF"/>
+                </a:solidFill>
+                <a:latin typeface="Cambria"/>
+              </a:rPr>
+              <a:t>A banking app that takes 10 seconds to log in has a pain point. Users switch to a rival even if every feature works.</a:t>
             </a:r>
           </a:p>
         </p:txBody>
@@ -8836,7 +11401,7 @@
                 </a:solidFill>
                 <a:latin typeface="Cambria"/>
               </a:rPr>
-              <a:t>Answers</a:t>
+              <a:t>What users expect from software</a:t>
             </a:r>
           </a:p>
         </p:txBody>
@@ -8909,14 +11474,58 @@
       </p:sp>
       <p:sp>
         <p:nvSpPr>
-          <p:cNvPr id="6" name="Oval 5"/>
+          <p:cNvPr id="6" name="Rounded Rectangle 5"/>
           <p:cNvSpPr/>
           <p:nvPr/>
         </p:nvSpPr>
         <p:spPr>
           <a:xfrm>
-            <a:off x="548640" y="1618488"/>
-            <a:ext cx="411480" cy="411480"/>
+            <a:off x="548640" y="1600200"/>
+            <a:ext cx="3515258" cy="2148840"/>
+          </a:xfrm>
+          <a:prstGeom prst="roundRect">
+            <a:avLst>
+              <a:gd name="adj" fmla="val 6000"/>
+            </a:avLst>
+          </a:prstGeom>
+          <a:solidFill>
+            <a:srgbClr val="EAF3FF"/>
+          </a:solidFill>
+          <a:ln>
+            <a:noFill/>
+          </a:ln>
+          <a:effectLst/>
+        </p:spPr>
+        <p:style>
+          <a:lnRef idx="1">
+            <a:schemeClr val="accent1"/>
+          </a:lnRef>
+          <a:fillRef idx="3">
+            <a:schemeClr val="accent1"/>
+          </a:fillRef>
+          <a:effectRef idx="2">
+            <a:schemeClr val="accent1"/>
+          </a:effectRef>
+          <a:fontRef idx="minor">
+            <a:schemeClr val="lt1"/>
+          </a:fontRef>
+        </p:style>
+        <p:txBody>
+          <a:bodyPr rtlCol="0" anchor="ctr"/>
+          <a:lstStyle/>
+          <a:p/>
+        </p:txBody>
+      </p:sp>
+      <p:sp>
+        <p:nvSpPr>
+          <p:cNvPr id="7" name="Oval 6"/>
+          <p:cNvSpPr/>
+          <p:nvPr/>
+        </p:nvSpPr>
+        <p:spPr>
+          <a:xfrm>
+            <a:off x="777240" y="1828800"/>
+            <a:ext cx="457200" cy="457200"/>
           </a:xfrm>
           <a:prstGeom prst="ellipse">
             <a:avLst/>
@@ -8949,7 +11558,7 @@
           <a:p>
             <a:pPr algn="ctr"/>
             <a:r>
-              <a:rPr sz="1400" b="1">
+              <a:rPr sz="1500" b="1">
                 <a:solidFill>
                   <a:srgbClr val="202122"/>
                 </a:solidFill>
@@ -8962,14 +11571,47 @@
       </p:sp>
       <p:sp>
         <p:nvSpPr>
-          <p:cNvPr id="7" name="TextBox 6"/>
-          <p:cNvSpPr txBox="1"/>
-          <p:nvPr/>
-        </p:nvSpPr>
-        <p:spPr>
-          <a:xfrm>
-            <a:off x="1234440" y="1600200"/>
-            <a:ext cx="10408615" cy="1030986"/>
+          <p:cNvPr id="8" name="TextBox 7"/>
+          <p:cNvSpPr txBox="1"/>
+          <p:nvPr/>
+        </p:nvSpPr>
+        <p:spPr>
+          <a:xfrm>
+            <a:off x="1371600" y="1801368"/>
+            <a:ext cx="2509418" cy="512064"/>
+          </a:xfrm>
+          <a:prstGeom prst="rect">
+            <a:avLst/>
+          </a:prstGeom>
+          <a:noFill/>
+        </p:spPr>
+        <p:txBody>
+          <a:bodyPr wrap="square" anchor="ctr" lIns="0" rIns="0" tIns="0" bIns="0"/>
+          <a:lstStyle/>
+          <a:p>
+            <a:pPr algn="l"/>
+            <a:r>
+              <a:rPr sz="1900" b="1" i="0">
+                <a:solidFill>
+                  <a:srgbClr val="03306E"/>
+                </a:solidFill>
+                <a:latin typeface="Calibri"/>
+              </a:rPr>
+              <a:t>Functionality</a:t>
+            </a:r>
+          </a:p>
+        </p:txBody>
+      </p:sp>
+      <p:sp>
+        <p:nvSpPr>
+          <p:cNvPr id="9" name="TextBox 8"/>
+          <p:cNvSpPr txBox="1"/>
+          <p:nvPr/>
+        </p:nvSpPr>
+        <p:spPr>
+          <a:xfrm>
+            <a:off x="777240" y="2468880"/>
+            <a:ext cx="3058058" cy="1143000"/>
           </a:xfrm>
           <a:prstGeom prst="rect">
             <a:avLst/>
@@ -8982,38 +11624,71 @@
           <a:p>
             <a:pPr algn="l"/>
             <a:r>
-              <a:rPr sz="1800" b="0" i="0">
-                <a:solidFill>
-                  <a:srgbClr val="54595D"/>
-                </a:solidFill>
-                <a:latin typeface="Calibri"/>
-              </a:rPr>
-              <a:t>What does B2C mean?</a:t>
-            </a:r>
-          </a:p>
-          <a:p>
-            <a:r>
-              <a:rPr sz="1800" b="1">
-                <a:solidFill>
-                  <a:srgbClr val="03306E"/>
-                </a:solidFill>
-                <a:latin typeface="Calibri"/>
-              </a:rPr>
-              <a:t>Business to consumer.</a:t>
-            </a:r>
-          </a:p>
-        </p:txBody>
-      </p:sp>
-      <p:sp>
-        <p:nvSpPr>
-          <p:cNvPr id="8" name="Oval 7"/>
+              <a:rPr sz="2000" b="0" i="0">
+                <a:solidFill>
+                  <a:srgbClr val="202122"/>
+                </a:solidFill>
+                <a:latin typeface="Calibri"/>
+              </a:rPr>
+              <a:t>Does the job well.</a:t>
+            </a:r>
+          </a:p>
+        </p:txBody>
+      </p:sp>
+      <p:sp>
+        <p:nvSpPr>
+          <p:cNvPr id="10" name="Rounded Rectangle 9"/>
           <p:cNvSpPr/>
           <p:nvPr/>
         </p:nvSpPr>
         <p:spPr>
           <a:xfrm>
-            <a:off x="548640" y="2814066"/>
-            <a:ext cx="411480" cy="411480"/>
+            <a:off x="4338218" y="1600200"/>
+            <a:ext cx="3515258" cy="2148840"/>
+          </a:xfrm>
+          <a:prstGeom prst="roundRect">
+            <a:avLst>
+              <a:gd name="adj" fmla="val 6000"/>
+            </a:avLst>
+          </a:prstGeom>
+          <a:solidFill>
+            <a:srgbClr val="EAF3FF"/>
+          </a:solidFill>
+          <a:ln>
+            <a:noFill/>
+          </a:ln>
+          <a:effectLst/>
+        </p:spPr>
+        <p:style>
+          <a:lnRef idx="1">
+            <a:schemeClr val="accent1"/>
+          </a:lnRef>
+          <a:fillRef idx="3">
+            <a:schemeClr val="accent1"/>
+          </a:fillRef>
+          <a:effectRef idx="2">
+            <a:schemeClr val="accent1"/>
+          </a:effectRef>
+          <a:fontRef idx="minor">
+            <a:schemeClr val="lt1"/>
+          </a:fontRef>
+        </p:style>
+        <p:txBody>
+          <a:bodyPr rtlCol="0" anchor="ctr"/>
+          <a:lstStyle/>
+          <a:p/>
+        </p:txBody>
+      </p:sp>
+      <p:sp>
+        <p:nvSpPr>
+          <p:cNvPr id="11" name="Oval 10"/>
+          <p:cNvSpPr/>
+          <p:nvPr/>
+        </p:nvSpPr>
+        <p:spPr>
+          <a:xfrm>
+            <a:off x="4566818" y="1828800"/>
+            <a:ext cx="457200" cy="457200"/>
           </a:xfrm>
           <a:prstGeom prst="ellipse">
             <a:avLst/>
@@ -9046,7 +11721,7 @@
           <a:p>
             <a:pPr algn="ctr"/>
             <a:r>
-              <a:rPr sz="1400" b="1">
+              <a:rPr sz="1500" b="1">
                 <a:solidFill>
                   <a:srgbClr val="202122"/>
                 </a:solidFill>
@@ -9059,14 +11734,47 @@
       </p:sp>
       <p:sp>
         <p:nvSpPr>
-          <p:cNvPr id="9" name="TextBox 8"/>
-          <p:cNvSpPr txBox="1"/>
-          <p:nvPr/>
-        </p:nvSpPr>
-        <p:spPr>
-          <a:xfrm>
-            <a:off x="1234440" y="2795778"/>
-            <a:ext cx="10408615" cy="1030986"/>
+          <p:cNvPr id="12" name="TextBox 11"/>
+          <p:cNvSpPr txBox="1"/>
+          <p:nvPr/>
+        </p:nvSpPr>
+        <p:spPr>
+          <a:xfrm>
+            <a:off x="5161178" y="1801368"/>
+            <a:ext cx="2509418" cy="512064"/>
+          </a:xfrm>
+          <a:prstGeom prst="rect">
+            <a:avLst/>
+          </a:prstGeom>
+          <a:noFill/>
+        </p:spPr>
+        <p:txBody>
+          <a:bodyPr wrap="square" anchor="ctr" lIns="0" rIns="0" tIns="0" bIns="0"/>
+          <a:lstStyle/>
+          <a:p>
+            <a:pPr algn="l"/>
+            <a:r>
+              <a:rPr sz="1900" b="1" i="0">
+                <a:solidFill>
+                  <a:srgbClr val="03306E"/>
+                </a:solidFill>
+                <a:latin typeface="Calibri"/>
+              </a:rPr>
+              <a:t>Fewer pain points</a:t>
+            </a:r>
+          </a:p>
+        </p:txBody>
+      </p:sp>
+      <p:sp>
+        <p:nvSpPr>
+          <p:cNvPr id="13" name="TextBox 12"/>
+          <p:cNvSpPr txBox="1"/>
+          <p:nvPr/>
+        </p:nvSpPr>
+        <p:spPr>
+          <a:xfrm>
+            <a:off x="4566818" y="2468880"/>
+            <a:ext cx="3058058" cy="1143000"/>
           </a:xfrm>
           <a:prstGeom prst="rect">
             <a:avLst/>
@@ -9079,38 +11787,71 @@
           <a:p>
             <a:pPr algn="l"/>
             <a:r>
-              <a:rPr sz="1800" b="0" i="0">
-                <a:solidFill>
-                  <a:srgbClr val="54595D"/>
-                </a:solidFill>
-                <a:latin typeface="Calibri"/>
-              </a:rPr>
-              <a:t>Is a shareholder an internal or external stakeholder?</a:t>
-            </a:r>
-          </a:p>
-          <a:p>
-            <a:r>
-              <a:rPr sz="1800" b="1">
-                <a:solidFill>
-                  <a:srgbClr val="03306E"/>
-                </a:solidFill>
-                <a:latin typeface="Calibri"/>
-              </a:rPr>
-              <a:t>External.</a:t>
-            </a:r>
-          </a:p>
-        </p:txBody>
-      </p:sp>
-      <p:sp>
-        <p:nvSpPr>
-          <p:cNvPr id="10" name="Oval 9"/>
+              <a:rPr sz="2000" b="0" i="0">
+                <a:solidFill>
+                  <a:srgbClr val="202122"/>
+                </a:solidFill>
+                <a:latin typeface="Calibri"/>
+              </a:rPr>
+              <a:t>Fast response, simple tasks.</a:t>
+            </a:r>
+          </a:p>
+        </p:txBody>
+      </p:sp>
+      <p:sp>
+        <p:nvSpPr>
+          <p:cNvPr id="14" name="Rounded Rectangle 13"/>
           <p:cNvSpPr/>
           <p:nvPr/>
         </p:nvSpPr>
         <p:spPr>
           <a:xfrm>
-            <a:off x="548640" y="4009644"/>
-            <a:ext cx="411480" cy="411480"/>
+            <a:off x="8127796" y="1600200"/>
+            <a:ext cx="3515258" cy="2148840"/>
+          </a:xfrm>
+          <a:prstGeom prst="roundRect">
+            <a:avLst>
+              <a:gd name="adj" fmla="val 6000"/>
+            </a:avLst>
+          </a:prstGeom>
+          <a:solidFill>
+            <a:srgbClr val="EAF3FF"/>
+          </a:solidFill>
+          <a:ln>
+            <a:noFill/>
+          </a:ln>
+          <a:effectLst/>
+        </p:spPr>
+        <p:style>
+          <a:lnRef idx="1">
+            <a:schemeClr val="accent1"/>
+          </a:lnRef>
+          <a:fillRef idx="3">
+            <a:schemeClr val="accent1"/>
+          </a:fillRef>
+          <a:effectRef idx="2">
+            <a:schemeClr val="accent1"/>
+          </a:effectRef>
+          <a:fontRef idx="minor">
+            <a:schemeClr val="lt1"/>
+          </a:fontRef>
+        </p:style>
+        <p:txBody>
+          <a:bodyPr rtlCol="0" anchor="ctr"/>
+          <a:lstStyle/>
+          <a:p/>
+        </p:txBody>
+      </p:sp>
+      <p:sp>
+        <p:nvSpPr>
+          <p:cNvPr id="15" name="Oval 14"/>
+          <p:cNvSpPr/>
+          <p:nvPr/>
+        </p:nvSpPr>
+        <p:spPr>
+          <a:xfrm>
+            <a:off x="8356396" y="1828800"/>
+            <a:ext cx="457200" cy="457200"/>
           </a:xfrm>
           <a:prstGeom prst="ellipse">
             <a:avLst/>
@@ -9143,7 +11884,7 @@
           <a:p>
             <a:pPr algn="ctr"/>
             <a:r>
-              <a:rPr sz="1400" b="1">
+              <a:rPr sz="1500" b="1">
                 <a:solidFill>
                   <a:srgbClr val="202122"/>
                 </a:solidFill>
@@ -9156,14 +11897,47 @@
       </p:sp>
       <p:sp>
         <p:nvSpPr>
-          <p:cNvPr id="11" name="TextBox 10"/>
-          <p:cNvSpPr txBox="1"/>
-          <p:nvPr/>
-        </p:nvSpPr>
-        <p:spPr>
-          <a:xfrm>
-            <a:off x="1234440" y="3991356"/>
-            <a:ext cx="10408615" cy="1030986"/>
+          <p:cNvPr id="16" name="TextBox 15"/>
+          <p:cNvSpPr txBox="1"/>
+          <p:nvPr/>
+        </p:nvSpPr>
+        <p:spPr>
+          <a:xfrm>
+            <a:off x="8950756" y="1801368"/>
+            <a:ext cx="2509418" cy="512064"/>
+          </a:xfrm>
+          <a:prstGeom prst="rect">
+            <a:avLst/>
+          </a:prstGeom>
+          <a:noFill/>
+        </p:spPr>
+        <p:txBody>
+          <a:bodyPr wrap="square" anchor="ctr" lIns="0" rIns="0" tIns="0" bIns="0"/>
+          <a:lstStyle/>
+          <a:p>
+            <a:pPr algn="l"/>
+            <a:r>
+              <a:rPr sz="1900" b="1" i="0">
+                <a:solidFill>
+                  <a:srgbClr val="03306E"/>
+                </a:solidFill>
+                <a:latin typeface="Calibri"/>
+              </a:rPr>
+              <a:t>Accessibility</a:t>
+            </a:r>
+          </a:p>
+        </p:txBody>
+      </p:sp>
+      <p:sp>
+        <p:nvSpPr>
+          <p:cNvPr id="17" name="TextBox 16"/>
+          <p:cNvSpPr txBox="1"/>
+          <p:nvPr/>
+        </p:nvSpPr>
+        <p:spPr>
+          <a:xfrm>
+            <a:off x="8356396" y="2468880"/>
+            <a:ext cx="3058058" cy="1143000"/>
           </a:xfrm>
           <a:prstGeom prst="rect">
             <a:avLst/>
@@ -9176,38 +11950,71 @@
           <a:p>
             <a:pPr algn="l"/>
             <a:r>
-              <a:rPr sz="1800" b="0" i="0">
-                <a:solidFill>
-                  <a:srgbClr val="54595D"/>
-                </a:solidFill>
-                <a:latin typeface="Calibri"/>
-              </a:rPr>
-              <a:t>What is a 'pain point'?</a:t>
-            </a:r>
-          </a:p>
-          <a:p>
-            <a:r>
-              <a:rPr sz="1800" b="1">
-                <a:solidFill>
-                  <a:srgbClr val="03306E"/>
-                </a:solidFill>
-                <a:latin typeface="Calibri"/>
-              </a:rPr>
-              <a:t>Something that frustrates users, such as slow response or complex tasks.</a:t>
-            </a:r>
-          </a:p>
-        </p:txBody>
-      </p:sp>
-      <p:sp>
-        <p:nvSpPr>
-          <p:cNvPr id="12" name="Oval 11"/>
+              <a:rPr sz="2000" b="0" i="0">
+                <a:solidFill>
+                  <a:srgbClr val="202122"/>
+                </a:solidFill>
+                <a:latin typeface="Calibri"/>
+              </a:rPr>
+              <a:t>Usable by everyone.</a:t>
+            </a:r>
+          </a:p>
+        </p:txBody>
+      </p:sp>
+      <p:sp>
+        <p:nvSpPr>
+          <p:cNvPr id="18" name="Rounded Rectangle 17"/>
           <p:cNvSpPr/>
           <p:nvPr/>
         </p:nvSpPr>
         <p:spPr>
           <a:xfrm>
-            <a:off x="548640" y="5205221"/>
-            <a:ext cx="411480" cy="411480"/>
+            <a:off x="548640" y="4023360"/>
+            <a:ext cx="3515258" cy="2148840"/>
+          </a:xfrm>
+          <a:prstGeom prst="roundRect">
+            <a:avLst>
+              <a:gd name="adj" fmla="val 6000"/>
+            </a:avLst>
+          </a:prstGeom>
+          <a:solidFill>
+            <a:srgbClr val="EAF3FF"/>
+          </a:solidFill>
+          <a:ln>
+            <a:noFill/>
+          </a:ln>
+          <a:effectLst/>
+        </p:spPr>
+        <p:style>
+          <a:lnRef idx="1">
+            <a:schemeClr val="accent1"/>
+          </a:lnRef>
+          <a:fillRef idx="3">
+            <a:schemeClr val="accent1"/>
+          </a:fillRef>
+          <a:effectRef idx="2">
+            <a:schemeClr val="accent1"/>
+          </a:effectRef>
+          <a:fontRef idx="minor">
+            <a:schemeClr val="lt1"/>
+          </a:fontRef>
+        </p:style>
+        <p:txBody>
+          <a:bodyPr rtlCol="0" anchor="ctr"/>
+          <a:lstStyle/>
+          <a:p/>
+        </p:txBody>
+      </p:sp>
+      <p:sp>
+        <p:nvSpPr>
+          <p:cNvPr id="19" name="Oval 18"/>
+          <p:cNvSpPr/>
+          <p:nvPr/>
+        </p:nvSpPr>
+        <p:spPr>
+          <a:xfrm>
+            <a:off x="777240" y="4251960"/>
+            <a:ext cx="457200" cy="457200"/>
           </a:xfrm>
           <a:prstGeom prst="ellipse">
             <a:avLst/>
@@ -9240,7 +12047,7 @@
           <a:p>
             <a:pPr algn="ctr"/>
             <a:r>
-              <a:rPr sz="1400" b="1">
+              <a:rPr sz="1500" b="1">
                 <a:solidFill>
                   <a:srgbClr val="202122"/>
                 </a:solidFill>
@@ -9253,14 +12060,47 @@
       </p:sp>
       <p:sp>
         <p:nvSpPr>
-          <p:cNvPr id="13" name="TextBox 12"/>
-          <p:cNvSpPr txBox="1"/>
-          <p:nvPr/>
-        </p:nvSpPr>
-        <p:spPr>
-          <a:xfrm>
-            <a:off x="1234440" y="5186933"/>
-            <a:ext cx="10408615" cy="1030986"/>
+          <p:cNvPr id="20" name="TextBox 19"/>
+          <p:cNvSpPr txBox="1"/>
+          <p:nvPr/>
+        </p:nvSpPr>
+        <p:spPr>
+          <a:xfrm>
+            <a:off x="1371600" y="4224528"/>
+            <a:ext cx="2509418" cy="512064"/>
+          </a:xfrm>
+          <a:prstGeom prst="rect">
+            <a:avLst/>
+          </a:prstGeom>
+          <a:noFill/>
+        </p:spPr>
+        <p:txBody>
+          <a:bodyPr wrap="square" anchor="ctr" lIns="0" rIns="0" tIns="0" bIns="0"/>
+          <a:lstStyle/>
+          <a:p>
+            <a:pPr algn="l"/>
+            <a:r>
+              <a:rPr sz="1900" b="1" i="0">
+                <a:solidFill>
+                  <a:srgbClr val="03306E"/>
+                </a:solidFill>
+                <a:latin typeface="Calibri"/>
+              </a:rPr>
+              <a:t>Compatibility</a:t>
+            </a:r>
+          </a:p>
+        </p:txBody>
+      </p:sp>
+      <p:sp>
+        <p:nvSpPr>
+          <p:cNvPr id="21" name="TextBox 20"/>
+          <p:cNvSpPr txBox="1"/>
+          <p:nvPr/>
+        </p:nvSpPr>
+        <p:spPr>
+          <a:xfrm>
+            <a:off x="777240" y="4892040"/>
+            <a:ext cx="3058058" cy="1143000"/>
           </a:xfrm>
           <a:prstGeom prst="rect">
             <a:avLst/>
@@ -9273,24 +12113,339 @@
           <a:p>
             <a:pPr algn="l"/>
             <a:r>
-              <a:rPr sz="1800" b="0" i="0">
-                <a:solidFill>
-                  <a:srgbClr val="54595D"/>
-                </a:solidFill>
-                <a:latin typeface="Calibri"/>
-              </a:rPr>
-              <a:t>Name two impacts of a data breach.</a:t>
-            </a:r>
-          </a:p>
-          <a:p>
-            <a:r>
-              <a:rPr sz="1800" b="1">
+              <a:rPr sz="2000" b="0" i="0">
+                <a:solidFill>
+                  <a:srgbClr val="202122"/>
+                </a:solidFill>
+                <a:latin typeface="Calibri"/>
+              </a:rPr>
+              <a:t>Works with legacy, future and external systems.</a:t>
+            </a:r>
+          </a:p>
+        </p:txBody>
+      </p:sp>
+      <p:sp>
+        <p:nvSpPr>
+          <p:cNvPr id="22" name="Rounded Rectangle 21"/>
+          <p:cNvSpPr/>
+          <p:nvPr/>
+        </p:nvSpPr>
+        <p:spPr>
+          <a:xfrm>
+            <a:off x="4338218" y="4023360"/>
+            <a:ext cx="3515258" cy="2148840"/>
+          </a:xfrm>
+          <a:prstGeom prst="roundRect">
+            <a:avLst>
+              <a:gd name="adj" fmla="val 6000"/>
+            </a:avLst>
+          </a:prstGeom>
+          <a:solidFill>
+            <a:srgbClr val="EAF3FF"/>
+          </a:solidFill>
+          <a:ln>
+            <a:noFill/>
+          </a:ln>
+          <a:effectLst/>
+        </p:spPr>
+        <p:style>
+          <a:lnRef idx="1">
+            <a:schemeClr val="accent1"/>
+          </a:lnRef>
+          <a:fillRef idx="3">
+            <a:schemeClr val="accent1"/>
+          </a:fillRef>
+          <a:effectRef idx="2">
+            <a:schemeClr val="accent1"/>
+          </a:effectRef>
+          <a:fontRef idx="minor">
+            <a:schemeClr val="lt1"/>
+          </a:fontRef>
+        </p:style>
+        <p:txBody>
+          <a:bodyPr rtlCol="0" anchor="ctr"/>
+          <a:lstStyle/>
+          <a:p/>
+        </p:txBody>
+      </p:sp>
+      <p:sp>
+        <p:nvSpPr>
+          <p:cNvPr id="23" name="Oval 22"/>
+          <p:cNvSpPr/>
+          <p:nvPr/>
+        </p:nvSpPr>
+        <p:spPr>
+          <a:xfrm>
+            <a:off x="4566818" y="4251960"/>
+            <a:ext cx="457200" cy="457200"/>
+          </a:xfrm>
+          <a:prstGeom prst="ellipse">
+            <a:avLst/>
+          </a:prstGeom>
+          <a:solidFill>
+            <a:srgbClr val="F2B705"/>
+          </a:solidFill>
+          <a:ln>
+            <a:noFill/>
+          </a:ln>
+          <a:effectLst/>
+        </p:spPr>
+        <p:style>
+          <a:lnRef idx="1">
+            <a:schemeClr val="accent1"/>
+          </a:lnRef>
+          <a:fillRef idx="3">
+            <a:schemeClr val="accent1"/>
+          </a:fillRef>
+          <a:effectRef idx="2">
+            <a:schemeClr val="accent1"/>
+          </a:effectRef>
+          <a:fontRef idx="minor">
+            <a:schemeClr val="lt1"/>
+          </a:fontRef>
+        </p:style>
+        <p:txBody>
+          <a:bodyPr rtlCol="0" anchor="ctr" lIns="0" rIns="0" tIns="0" bIns="0"/>
+          <a:lstStyle/>
+          <a:p>
+            <a:pPr algn="ctr"/>
+            <a:r>
+              <a:rPr sz="1500" b="1">
+                <a:solidFill>
+                  <a:srgbClr val="202122"/>
+                </a:solidFill>
+                <a:latin typeface="Calibri"/>
+              </a:rPr>
+              <a:t>5</a:t>
+            </a:r>
+          </a:p>
+        </p:txBody>
+      </p:sp>
+      <p:sp>
+        <p:nvSpPr>
+          <p:cNvPr id="24" name="TextBox 23"/>
+          <p:cNvSpPr txBox="1"/>
+          <p:nvPr/>
+        </p:nvSpPr>
+        <p:spPr>
+          <a:xfrm>
+            <a:off x="5161178" y="4224528"/>
+            <a:ext cx="2509418" cy="512064"/>
+          </a:xfrm>
+          <a:prstGeom prst="rect">
+            <a:avLst/>
+          </a:prstGeom>
+          <a:noFill/>
+        </p:spPr>
+        <p:txBody>
+          <a:bodyPr wrap="square" anchor="ctr" lIns="0" rIns="0" tIns="0" bIns="0"/>
+          <a:lstStyle/>
+          <a:p>
+            <a:pPr algn="l"/>
+            <a:r>
+              <a:rPr sz="1900" b="1" i="0">
                 <a:solidFill>
                   <a:srgbClr val="03306E"/>
                 </a:solidFill>
                 <a:latin typeface="Calibri"/>
               </a:rPr>
-              <a:t>Any two of: legal action, fines, reputational damage, loss of licence, lost business.</a:t>
+              <a:t>Availability</a:t>
+            </a:r>
+          </a:p>
+        </p:txBody>
+      </p:sp>
+      <p:sp>
+        <p:nvSpPr>
+          <p:cNvPr id="25" name="TextBox 24"/>
+          <p:cNvSpPr txBox="1"/>
+          <p:nvPr/>
+        </p:nvSpPr>
+        <p:spPr>
+          <a:xfrm>
+            <a:off x="4566818" y="4892040"/>
+            <a:ext cx="3058058" cy="1143000"/>
+          </a:xfrm>
+          <a:prstGeom prst="rect">
+            <a:avLst/>
+          </a:prstGeom>
+          <a:noFill/>
+        </p:spPr>
+        <p:txBody>
+          <a:bodyPr wrap="square" anchor="t" lIns="0" rIns="0" tIns="0" bIns="0"/>
+          <a:lstStyle/>
+          <a:p>
+            <a:pPr algn="l"/>
+            <a:r>
+              <a:rPr sz="2000" b="0" i="0">
+                <a:solidFill>
+                  <a:srgbClr val="202122"/>
+                </a:solidFill>
+                <a:latin typeface="Calibri"/>
+              </a:rPr>
+              <a:t>Minimal downtime.</a:t>
+            </a:r>
+          </a:p>
+        </p:txBody>
+      </p:sp>
+      <p:sp>
+        <p:nvSpPr>
+          <p:cNvPr id="26" name="Rounded Rectangle 25"/>
+          <p:cNvSpPr/>
+          <p:nvPr/>
+        </p:nvSpPr>
+        <p:spPr>
+          <a:xfrm>
+            <a:off x="8127796" y="4023360"/>
+            <a:ext cx="3515258" cy="2148840"/>
+          </a:xfrm>
+          <a:prstGeom prst="roundRect">
+            <a:avLst>
+              <a:gd name="adj" fmla="val 6000"/>
+            </a:avLst>
+          </a:prstGeom>
+          <a:solidFill>
+            <a:srgbClr val="EAF3FF"/>
+          </a:solidFill>
+          <a:ln>
+            <a:noFill/>
+          </a:ln>
+          <a:effectLst/>
+        </p:spPr>
+        <p:style>
+          <a:lnRef idx="1">
+            <a:schemeClr val="accent1"/>
+          </a:lnRef>
+          <a:fillRef idx="3">
+            <a:schemeClr val="accent1"/>
+          </a:fillRef>
+          <a:effectRef idx="2">
+            <a:schemeClr val="accent1"/>
+          </a:effectRef>
+          <a:fontRef idx="minor">
+            <a:schemeClr val="lt1"/>
+          </a:fontRef>
+        </p:style>
+        <p:txBody>
+          <a:bodyPr rtlCol="0" anchor="ctr"/>
+          <a:lstStyle/>
+          <a:p/>
+        </p:txBody>
+      </p:sp>
+      <p:sp>
+        <p:nvSpPr>
+          <p:cNvPr id="27" name="Oval 26"/>
+          <p:cNvSpPr/>
+          <p:nvPr/>
+        </p:nvSpPr>
+        <p:spPr>
+          <a:xfrm>
+            <a:off x="8356396" y="4251960"/>
+            <a:ext cx="457200" cy="457200"/>
+          </a:xfrm>
+          <a:prstGeom prst="ellipse">
+            <a:avLst/>
+          </a:prstGeom>
+          <a:solidFill>
+            <a:srgbClr val="F2B705"/>
+          </a:solidFill>
+          <a:ln>
+            <a:noFill/>
+          </a:ln>
+          <a:effectLst/>
+        </p:spPr>
+        <p:style>
+          <a:lnRef idx="1">
+            <a:schemeClr val="accent1"/>
+          </a:lnRef>
+          <a:fillRef idx="3">
+            <a:schemeClr val="accent1"/>
+          </a:fillRef>
+          <a:effectRef idx="2">
+            <a:schemeClr val="accent1"/>
+          </a:effectRef>
+          <a:fontRef idx="minor">
+            <a:schemeClr val="lt1"/>
+          </a:fontRef>
+        </p:style>
+        <p:txBody>
+          <a:bodyPr rtlCol="0" anchor="ctr" lIns="0" rIns="0" tIns="0" bIns="0"/>
+          <a:lstStyle/>
+          <a:p>
+            <a:pPr algn="ctr"/>
+            <a:r>
+              <a:rPr sz="1500" b="1">
+                <a:solidFill>
+                  <a:srgbClr val="202122"/>
+                </a:solidFill>
+                <a:latin typeface="Calibri"/>
+              </a:rPr>
+              <a:t>6</a:t>
+            </a:r>
+          </a:p>
+        </p:txBody>
+      </p:sp>
+      <p:sp>
+        <p:nvSpPr>
+          <p:cNvPr id="28" name="TextBox 27"/>
+          <p:cNvSpPr txBox="1"/>
+          <p:nvPr/>
+        </p:nvSpPr>
+        <p:spPr>
+          <a:xfrm>
+            <a:off x="8950756" y="4224528"/>
+            <a:ext cx="2509418" cy="512064"/>
+          </a:xfrm>
+          <a:prstGeom prst="rect">
+            <a:avLst/>
+          </a:prstGeom>
+          <a:noFill/>
+        </p:spPr>
+        <p:txBody>
+          <a:bodyPr wrap="square" anchor="ctr" lIns="0" rIns="0" tIns="0" bIns="0"/>
+          <a:lstStyle/>
+          <a:p>
+            <a:pPr algn="l"/>
+            <a:r>
+              <a:rPr sz="1900" b="1" i="0">
+                <a:solidFill>
+                  <a:srgbClr val="03306E"/>
+                </a:solidFill>
+                <a:latin typeface="Calibri"/>
+              </a:rPr>
+              <a:t>Support</a:t>
+            </a:r>
+          </a:p>
+        </p:txBody>
+      </p:sp>
+      <p:sp>
+        <p:nvSpPr>
+          <p:cNvPr id="29" name="TextBox 28"/>
+          <p:cNvSpPr txBox="1"/>
+          <p:nvPr/>
+        </p:nvSpPr>
+        <p:spPr>
+          <a:xfrm>
+            <a:off x="8356396" y="4892040"/>
+            <a:ext cx="3058058" cy="1143000"/>
+          </a:xfrm>
+          <a:prstGeom prst="rect">
+            <a:avLst/>
+          </a:prstGeom>
+          <a:noFill/>
+        </p:spPr>
+        <p:txBody>
+          <a:bodyPr wrap="square" anchor="t" lIns="0" rIns="0" tIns="0" bIns="0"/>
+          <a:lstStyle/>
+          <a:p>
+            <a:pPr algn="l"/>
+            <a:r>
+              <a:rPr sz="2000" b="0" i="0">
+                <a:solidFill>
+                  <a:srgbClr val="202122"/>
+                </a:solidFill>
+                <a:latin typeface="Calibri"/>
+              </a:rPr>
+              <a:t>Good end-user support and easy installation.</a:t>
             </a:r>
           </a:p>
         </p:txBody>
@@ -9382,7 +12537,7 @@
                 </a:solidFill>
                 <a:latin typeface="Cambria"/>
               </a:rPr>
-              <a:t>Activity: Pitch a feature</a:t>
+              <a:t>Quick check: What users expect from software</a:t>
             </a:r>
           </a:p>
         </p:txBody>
@@ -9455,19 +12610,17 @@
       </p:sp>
       <p:sp>
         <p:nvSpPr>
-          <p:cNvPr id="6" name="Rounded Rectangle 5"/>
+          <p:cNvPr id="6" name="Oval 5"/>
           <p:cNvSpPr/>
           <p:nvPr/>
         </p:nvSpPr>
         <p:spPr>
           <a:xfrm>
-            <a:off x="548640" y="1508760"/>
-            <a:ext cx="2011680" cy="457200"/>
-          </a:xfrm>
-          <a:prstGeom prst="roundRect">
-            <a:avLst>
-              <a:gd name="adj" fmla="val 50000"/>
-            </a:avLst>
+            <a:off x="548640" y="1691640"/>
+            <a:ext cx="502920" cy="502920"/>
+          </a:xfrm>
+          <a:prstGeom prst="ellipse">
+            <a:avLst/>
           </a:prstGeom>
           <a:solidFill>
             <a:srgbClr val="F2B705"/>
@@ -9492,9 +12645,20 @@
           </a:fontRef>
         </p:style>
         <p:txBody>
-          <a:bodyPr rtlCol="0" anchor="ctr"/>
-          <a:lstStyle/>
-          <a:p/>
+          <a:bodyPr rtlCol="0" anchor="ctr" lIns="0" rIns="0" tIns="0" bIns="0"/>
+          <a:lstStyle/>
+          <a:p>
+            <a:pPr algn="ctr"/>
+            <a:r>
+              <a:rPr sz="1600" b="1">
+                <a:solidFill>
+                  <a:srgbClr val="202122"/>
+                </a:solidFill>
+                <a:latin typeface="Calibri"/>
+              </a:rPr>
+              <a:t>1</a:t>
+            </a:r>
+          </a:p>
         </p:txBody>
       </p:sp>
       <p:sp>
@@ -9505,80 +12669,47 @@
         </p:nvSpPr>
         <p:spPr>
           <a:xfrm>
-            <a:off x="548640" y="1508760"/>
-            <a:ext cx="2011680" cy="457200"/>
-          </a:xfrm>
-          <a:prstGeom prst="rect">
-            <a:avLst/>
-          </a:prstGeom>
-          <a:noFill/>
-        </p:spPr>
-        <p:txBody>
-          <a:bodyPr wrap="square" anchor="ctr" lIns="0" rIns="0" tIns="0" bIns="0"/>
-          <a:lstStyle/>
-          <a:p>
-            <a:pPr algn="ctr"/>
-            <a:r>
-              <a:rPr sz="1400" b="1" i="0">
+            <a:off x="1371600" y="1645920"/>
+            <a:ext cx="10271455" cy="1188720"/>
+          </a:xfrm>
+          <a:prstGeom prst="rect">
+            <a:avLst/>
+          </a:prstGeom>
+          <a:noFill/>
+        </p:spPr>
+        <p:txBody>
+          <a:bodyPr wrap="square" anchor="t" lIns="0" rIns="0" tIns="0" bIns="0"/>
+          <a:lstStyle/>
+          <a:p>
+            <a:pPr algn="l"/>
+            <a:r>
+              <a:rPr sz="2400" b="0" i="0">
                 <a:solidFill>
                   <a:srgbClr val="202122"/>
                 </a:solidFill>
                 <a:latin typeface="Calibri"/>
               </a:rPr>
-              <a:t>20 minutes</a:t>
-            </a:r>
-          </a:p>
-        </p:txBody>
-      </p:sp>
-      <p:sp>
-        <p:nvSpPr>
-          <p:cNvPr id="8" name="TextBox 7"/>
-          <p:cNvSpPr txBox="1"/>
-          <p:nvPr/>
-        </p:nvSpPr>
-        <p:spPr>
-          <a:xfrm>
-            <a:off x="2743200" y="1508760"/>
-            <a:ext cx="4754880" cy="457200"/>
-          </a:xfrm>
-          <a:prstGeom prst="rect">
-            <a:avLst/>
-          </a:prstGeom>
-          <a:noFill/>
-        </p:spPr>
-        <p:txBody>
-          <a:bodyPr wrap="square" anchor="ctr" lIns="0" rIns="0" tIns="0" bIns="0"/>
-          <a:lstStyle/>
-          <a:p>
-            <a:pPr algn="l"/>
-            <a:r>
-              <a:rPr sz="1400" b="0" i="1">
-                <a:solidFill>
-                  <a:srgbClr val="54595D"/>
-                </a:solidFill>
-                <a:latin typeface="Calibri"/>
-              </a:rPr>
-              <a:t>Pairs</a:t>
-            </a:r>
-          </a:p>
-        </p:txBody>
-      </p:sp>
-      <p:sp>
-        <p:nvSpPr>
-          <p:cNvPr id="9" name="Oval 8"/>
+              <a:t>What is a pain point?</a:t>
+            </a:r>
+          </a:p>
+        </p:txBody>
+      </p:sp>
+      <p:sp>
+        <p:nvSpPr>
+          <p:cNvPr id="8" name="Oval 7"/>
           <p:cNvSpPr/>
           <p:nvPr/>
         </p:nvSpPr>
         <p:spPr>
           <a:xfrm>
-            <a:off x="548640" y="2482596"/>
-            <a:ext cx="384048" cy="384048"/>
+            <a:off x="548640" y="3108960"/>
+            <a:ext cx="502920" cy="502920"/>
           </a:xfrm>
           <a:prstGeom prst="ellipse">
             <a:avLst/>
           </a:prstGeom>
           <a:solidFill>
-            <a:srgbClr val="0645AD"/>
+            <a:srgbClr val="F2B705"/>
           </a:solidFill>
           <a:ln>
             <a:noFill/>
@@ -9605,66 +12736,66 @@
           <a:p>
             <a:pPr algn="ctr"/>
             <a:r>
-              <a:rPr sz="1300" b="1">
-                <a:solidFill>
-                  <a:srgbClr val="FFFFFF"/>
-                </a:solidFill>
-                <a:latin typeface="Calibri"/>
-              </a:rPr>
-              <a:t>1</a:t>
-            </a:r>
-          </a:p>
-        </p:txBody>
-      </p:sp>
-      <p:sp>
-        <p:nvSpPr>
-          <p:cNvPr id="10" name="TextBox 9"/>
-          <p:cNvSpPr txBox="1"/>
-          <p:nvPr/>
-        </p:nvSpPr>
-        <p:spPr>
-          <a:xfrm>
-            <a:off x="1143000" y="2240280"/>
-            <a:ext cx="5943600" cy="868680"/>
-          </a:xfrm>
-          <a:prstGeom prst="rect">
-            <a:avLst/>
-          </a:prstGeom>
-          <a:noFill/>
-        </p:spPr>
-        <p:txBody>
-          <a:bodyPr wrap="square" anchor="ctr" lIns="0" rIns="0" tIns="0" bIns="0"/>
+              <a:rPr sz="1600" b="1">
+                <a:solidFill>
+                  <a:srgbClr val="202122"/>
+                </a:solidFill>
+                <a:latin typeface="Calibri"/>
+              </a:rPr>
+              <a:t>2</a:t>
+            </a:r>
+          </a:p>
+        </p:txBody>
+      </p:sp>
+      <p:sp>
+        <p:nvSpPr>
+          <p:cNvPr id="9" name="TextBox 8"/>
+          <p:cNvSpPr txBox="1"/>
+          <p:nvPr/>
+        </p:nvSpPr>
+        <p:spPr>
+          <a:xfrm>
+            <a:off x="1371600" y="3063240"/>
+            <a:ext cx="10271455" cy="1188720"/>
+          </a:xfrm>
+          <a:prstGeom prst="rect">
+            <a:avLst/>
+          </a:prstGeom>
+          <a:noFill/>
+        </p:spPr>
+        <p:txBody>
+          <a:bodyPr wrap="square" anchor="t" lIns="0" rIns="0" tIns="0" bIns="0"/>
           <a:lstStyle/>
           <a:p>
             <a:pPr algn="l"/>
             <a:r>
-              <a:rPr sz="1700" b="0" i="0">
+              <a:rPr sz="2400" b="0" i="0">
                 <a:solidFill>
                   <a:srgbClr val="202122"/>
                 </a:solidFill>
                 <a:latin typeface="Calibri"/>
               </a:rPr>
-              <a:t>Choose a local business and a software feature that would help it.</a:t>
-            </a:r>
-          </a:p>
-        </p:txBody>
-      </p:sp>
-      <p:sp>
-        <p:nvSpPr>
-          <p:cNvPr id="11" name="Oval 10"/>
+              <a:t>Why does compatibility matter?</a:t>
+            </a:r>
+          </a:p>
+        </p:txBody>
+      </p:sp>
+      <p:sp>
+        <p:nvSpPr>
+          <p:cNvPr id="10" name="Oval 9"/>
           <p:cNvSpPr/>
           <p:nvPr/>
         </p:nvSpPr>
         <p:spPr>
           <a:xfrm>
-            <a:off x="548640" y="3461004"/>
-            <a:ext cx="384048" cy="384048"/>
+            <a:off x="548640" y="4526280"/>
+            <a:ext cx="502920" cy="502920"/>
           </a:xfrm>
           <a:prstGeom prst="ellipse">
             <a:avLst/>
           </a:prstGeom>
           <a:solidFill>
-            <a:srgbClr val="0645AD"/>
+            <a:srgbClr val="F2B705"/>
           </a:solidFill>
           <a:ln>
             <a:noFill/>
@@ -9691,13 +12822,46 @@
           <a:p>
             <a:pPr algn="ctr"/>
             <a:r>
-              <a:rPr sz="1300" b="1">
-                <a:solidFill>
-                  <a:srgbClr val="FFFFFF"/>
-                </a:solidFill>
-                <a:latin typeface="Calibri"/>
-              </a:rPr>
-              <a:t>2</a:t>
+              <a:rPr sz="1600" b="1">
+                <a:solidFill>
+                  <a:srgbClr val="202122"/>
+                </a:solidFill>
+                <a:latin typeface="Calibri"/>
+              </a:rPr>
+              <a:t>3</a:t>
+            </a:r>
+          </a:p>
+        </p:txBody>
+      </p:sp>
+      <p:sp>
+        <p:nvSpPr>
+          <p:cNvPr id="11" name="TextBox 10"/>
+          <p:cNvSpPr txBox="1"/>
+          <p:nvPr/>
+        </p:nvSpPr>
+        <p:spPr>
+          <a:xfrm>
+            <a:off x="1371600" y="4480560"/>
+            <a:ext cx="10271455" cy="1188720"/>
+          </a:xfrm>
+          <a:prstGeom prst="rect">
+            <a:avLst/>
+          </a:prstGeom>
+          <a:noFill/>
+        </p:spPr>
+        <p:txBody>
+          <a:bodyPr wrap="square" anchor="t" lIns="0" rIns="0" tIns="0" bIns="0"/>
+          <a:lstStyle/>
+          <a:p>
+            <a:pPr algn="l"/>
+            <a:r>
+              <a:rPr sz="2400" b="0" i="0">
+                <a:solidFill>
+                  <a:srgbClr val="202122"/>
+                </a:solidFill>
+                <a:latin typeface="Calibri"/>
+              </a:rPr>
+              <a:t>Give two quality expectations.</a:t>
             </a:r>
           </a:p>
         </p:txBody>
@@ -9710,362 +12874,27 @@
         </p:nvSpPr>
         <p:spPr>
           <a:xfrm>
-            <a:off x="1143000" y="3218688"/>
-            <a:ext cx="5943600" cy="868680"/>
-          </a:xfrm>
-          <a:prstGeom prst="rect">
-            <a:avLst/>
-          </a:prstGeom>
-          <a:noFill/>
-        </p:spPr>
-        <p:txBody>
-          <a:bodyPr wrap="square" anchor="ctr" lIns="0" rIns="0" tIns="0" bIns="0"/>
+            <a:off x="548640" y="5852160"/>
+            <a:ext cx="11094415" cy="365760"/>
+          </a:xfrm>
+          <a:prstGeom prst="rect">
+            <a:avLst/>
+          </a:prstGeom>
+          <a:noFill/>
+        </p:spPr>
+        <p:txBody>
+          <a:bodyPr wrap="square" anchor="t" lIns="0" rIns="0" tIns="0" bIns="0"/>
           <a:lstStyle/>
           <a:p>
             <a:pPr algn="l"/>
             <a:r>
-              <a:rPr sz="1700" b="0" i="0">
-                <a:solidFill>
-                  <a:srgbClr val="202122"/>
-                </a:solidFill>
-                <a:latin typeface="Calibri"/>
-              </a:rPr>
-              <a:t>Identify which business area gains value and how.</a:t>
-            </a:r>
-          </a:p>
-        </p:txBody>
-      </p:sp>
-      <p:sp>
-        <p:nvSpPr>
-          <p:cNvPr id="13" name="Oval 12"/>
-          <p:cNvSpPr/>
-          <p:nvPr/>
-        </p:nvSpPr>
-        <p:spPr>
-          <a:xfrm>
-            <a:off x="548640" y="4439412"/>
-            <a:ext cx="384048" cy="384048"/>
-          </a:xfrm>
-          <a:prstGeom prst="ellipse">
-            <a:avLst/>
-          </a:prstGeom>
-          <a:solidFill>
-            <a:srgbClr val="0645AD"/>
-          </a:solidFill>
-          <a:ln>
-            <a:noFill/>
-          </a:ln>
-          <a:effectLst/>
-        </p:spPr>
-        <p:style>
-          <a:lnRef idx="1">
-            <a:schemeClr val="accent1"/>
-          </a:lnRef>
-          <a:fillRef idx="3">
-            <a:schemeClr val="accent1"/>
-          </a:fillRef>
-          <a:effectRef idx="2">
-            <a:schemeClr val="accent1"/>
-          </a:effectRef>
-          <a:fontRef idx="minor">
-            <a:schemeClr val="lt1"/>
-          </a:fontRef>
-        </p:style>
-        <p:txBody>
-          <a:bodyPr rtlCol="0" anchor="ctr" lIns="0" rIns="0" tIns="0" bIns="0"/>
-          <a:lstStyle/>
-          <a:p>
-            <a:pPr algn="ctr"/>
-            <a:r>
-              <a:rPr sz="1300" b="1">
-                <a:solidFill>
-                  <a:srgbClr val="FFFFFF"/>
-                </a:solidFill>
-                <a:latin typeface="Calibri"/>
-              </a:rPr>
-              <a:t>3</a:t>
-            </a:r>
-          </a:p>
-        </p:txBody>
-      </p:sp>
-      <p:sp>
-        <p:nvSpPr>
-          <p:cNvPr id="14" name="TextBox 13"/>
-          <p:cNvSpPr txBox="1"/>
-          <p:nvPr/>
-        </p:nvSpPr>
-        <p:spPr>
-          <a:xfrm>
-            <a:off x="1143000" y="4197096"/>
-            <a:ext cx="5943600" cy="868680"/>
-          </a:xfrm>
-          <a:prstGeom prst="rect">
-            <a:avLst/>
-          </a:prstGeom>
-          <a:noFill/>
-        </p:spPr>
-        <p:txBody>
-          <a:bodyPr wrap="square" anchor="ctr" lIns="0" rIns="0" tIns="0" bIns="0"/>
-          <a:lstStyle/>
-          <a:p>
-            <a:pPr algn="l"/>
-            <a:r>
-              <a:rPr sz="1700" b="0" i="0">
-                <a:solidFill>
-                  <a:srgbClr val="202122"/>
-                </a:solidFill>
-                <a:latin typeface="Calibri"/>
-              </a:rPr>
-              <a:t>List the stakeholders affected.</a:t>
-            </a:r>
-          </a:p>
-        </p:txBody>
-      </p:sp>
-      <p:sp>
-        <p:nvSpPr>
-          <p:cNvPr id="15" name="Oval 14"/>
-          <p:cNvSpPr/>
-          <p:nvPr/>
-        </p:nvSpPr>
-        <p:spPr>
-          <a:xfrm>
-            <a:off x="548640" y="5417820"/>
-            <a:ext cx="384048" cy="384048"/>
-          </a:xfrm>
-          <a:prstGeom prst="ellipse">
-            <a:avLst/>
-          </a:prstGeom>
-          <a:solidFill>
-            <a:srgbClr val="0645AD"/>
-          </a:solidFill>
-          <a:ln>
-            <a:noFill/>
-          </a:ln>
-          <a:effectLst/>
-        </p:spPr>
-        <p:style>
-          <a:lnRef idx="1">
-            <a:schemeClr val="accent1"/>
-          </a:lnRef>
-          <a:fillRef idx="3">
-            <a:schemeClr val="accent1"/>
-          </a:fillRef>
-          <a:effectRef idx="2">
-            <a:schemeClr val="accent1"/>
-          </a:effectRef>
-          <a:fontRef idx="minor">
-            <a:schemeClr val="lt1"/>
-          </a:fontRef>
-        </p:style>
-        <p:txBody>
-          <a:bodyPr rtlCol="0" anchor="ctr" lIns="0" rIns="0" tIns="0" bIns="0"/>
-          <a:lstStyle/>
-          <a:p>
-            <a:pPr algn="ctr"/>
-            <a:r>
-              <a:rPr sz="1300" b="1">
-                <a:solidFill>
-                  <a:srgbClr val="FFFFFF"/>
-                </a:solidFill>
-                <a:latin typeface="Calibri"/>
-              </a:rPr>
-              <a:t>4</a:t>
-            </a:r>
-          </a:p>
-        </p:txBody>
-      </p:sp>
-      <p:sp>
-        <p:nvSpPr>
-          <p:cNvPr id="16" name="TextBox 15"/>
-          <p:cNvSpPr txBox="1"/>
-          <p:nvPr/>
-        </p:nvSpPr>
-        <p:spPr>
-          <a:xfrm>
-            <a:off x="1143000" y="5175504"/>
-            <a:ext cx="5943600" cy="868680"/>
-          </a:xfrm>
-          <a:prstGeom prst="rect">
-            <a:avLst/>
-          </a:prstGeom>
-          <a:noFill/>
-        </p:spPr>
-        <p:txBody>
-          <a:bodyPr wrap="square" anchor="ctr" lIns="0" rIns="0" tIns="0" bIns="0"/>
-          <a:lstStyle/>
-          <a:p>
-            <a:pPr algn="l"/>
-            <a:r>
-              <a:rPr sz="1700" b="0" i="0">
-                <a:solidFill>
-                  <a:srgbClr val="202122"/>
-                </a:solidFill>
-                <a:latin typeface="Calibri"/>
-              </a:rPr>
-              <a:t>Identify two risks and how you would reduce them.</a:t>
-            </a:r>
-          </a:p>
-        </p:txBody>
-      </p:sp>
-      <p:sp>
-        <p:nvSpPr>
-          <p:cNvPr id="17" name="Rounded Rectangle 16"/>
-          <p:cNvSpPr/>
-          <p:nvPr/>
-        </p:nvSpPr>
-        <p:spPr>
-          <a:xfrm>
-            <a:off x="7772400" y="1508760"/>
-            <a:ext cx="3867912" cy="4572000"/>
-          </a:xfrm>
-          <a:prstGeom prst="roundRect">
-            <a:avLst>
-              <a:gd name="adj" fmla="val 8000"/>
-            </a:avLst>
-          </a:prstGeom>
-          <a:solidFill>
-            <a:srgbClr val="EAF3FF"/>
-          </a:solidFill>
-          <a:ln>
-            <a:noFill/>
-          </a:ln>
-          <a:effectLst/>
-        </p:spPr>
-        <p:style>
-          <a:lnRef idx="1">
-            <a:schemeClr val="accent1"/>
-          </a:lnRef>
-          <a:fillRef idx="3">
-            <a:schemeClr val="accent1"/>
-          </a:fillRef>
-          <a:effectRef idx="2">
-            <a:schemeClr val="accent1"/>
-          </a:effectRef>
-          <a:fontRef idx="minor">
-            <a:schemeClr val="lt1"/>
-          </a:fontRef>
-        </p:style>
-        <p:txBody>
-          <a:bodyPr rtlCol="0" anchor="ctr"/>
-          <a:lstStyle/>
-          <a:p/>
-        </p:txBody>
-      </p:sp>
-      <p:sp>
-        <p:nvSpPr>
-          <p:cNvPr id="18" name="TextBox 17"/>
-          <p:cNvSpPr txBox="1"/>
-          <p:nvPr/>
-        </p:nvSpPr>
-        <p:spPr>
-          <a:xfrm>
-            <a:off x="8046720" y="1737360"/>
-            <a:ext cx="3291840" cy="365760"/>
-          </a:xfrm>
-          <a:prstGeom prst="rect">
-            <a:avLst/>
-          </a:prstGeom>
-          <a:noFill/>
-        </p:spPr>
-        <p:txBody>
-          <a:bodyPr wrap="square" anchor="t" lIns="0" rIns="0" tIns="0" bIns="0"/>
-          <a:lstStyle/>
-          <a:p>
-            <a:pPr algn="l"/>
-            <a:r>
-              <a:rPr sz="1300" b="1" i="0">
-                <a:solidFill>
-                  <a:srgbClr val="0645AD"/>
-                </a:solidFill>
-                <a:latin typeface="Calibri"/>
-              </a:rPr>
-              <a:t>SUCCESS CRITERIA</a:t>
-            </a:r>
-          </a:p>
-        </p:txBody>
-      </p:sp>
-      <p:sp>
-        <p:nvSpPr>
-          <p:cNvPr id="19" name="TextBox 18"/>
-          <p:cNvSpPr txBox="1"/>
-          <p:nvPr/>
-        </p:nvSpPr>
-        <p:spPr>
-          <a:xfrm>
-            <a:off x="8046720" y="2240280"/>
-            <a:ext cx="3337560" cy="3657600"/>
-          </a:xfrm>
-          <a:prstGeom prst="rect">
-            <a:avLst/>
-          </a:prstGeom>
-          <a:noFill/>
-        </p:spPr>
-        <p:txBody>
-          <a:bodyPr wrap="square" lIns="0" rIns="0" tIns="0" bIns="0">
-            <a:spAutoFit/>
-          </a:bodyPr>
-          <a:lstStyle/>
-          <a:p>
-            <a:pPr marL="274320" indent="-274320">
-              <a:spcAft>
-                <a:spcPts val="810"/>
-              </a:spcAft>
-              <a:buClr>
-                <a:srgbClr val="0645AD"/>
-              </a:buClr>
-              <a:buFont typeface="Arial"/>
-              <a:buChar char="•"/>
-            </a:pPr>
-            <a:r>
-              <a:rPr sz="1800" b="0">
-                <a:solidFill>
-                  <a:srgbClr val="202122"/>
-                </a:solidFill>
-                <a:latin typeface="Calibri"/>
-              </a:rPr>
-              <a:t>Value is specific and measurable</a:t>
-            </a:r>
-          </a:p>
-          <a:p>
-            <a:pPr marL="274320" indent="-274320">
-              <a:spcAft>
-                <a:spcPts val="810"/>
-              </a:spcAft>
-              <a:buClr>
-                <a:srgbClr val="0645AD"/>
-              </a:buClr>
-              <a:buFont typeface="Arial"/>
-              <a:buChar char="•"/>
-            </a:pPr>
-            <a:r>
-              <a:rPr sz="1800" b="0">
-                <a:solidFill>
-                  <a:srgbClr val="202122"/>
-                </a:solidFill>
-                <a:latin typeface="Calibri"/>
-              </a:rPr>
-              <a:t>Stakeholders split internal and external</a:t>
-            </a:r>
-          </a:p>
-          <a:p>
-            <a:pPr marL="274320" indent="-274320">
-              <a:spcAft>
-                <a:spcPts val="810"/>
-              </a:spcAft>
-              <a:buClr>
-                <a:srgbClr val="0645AD"/>
-              </a:buClr>
-              <a:buFont typeface="Arial"/>
-              <a:buChar char="•"/>
-            </a:pPr>
-            <a:r>
-              <a:rPr sz="1800" b="0">
-                <a:solidFill>
-                  <a:srgbClr val="202122"/>
-                </a:solidFill>
-                <a:latin typeface="Calibri"/>
-              </a:rPr>
-              <a:t>Risks are realistic</a:t>
+              <a:rPr sz="1300" b="0" i="1">
+                <a:solidFill>
+                  <a:srgbClr val="54595D"/>
+                </a:solidFill>
+                <a:latin typeface="Calibri"/>
+              </a:rPr>
+              <a:t>Answer on mini whiteboards or in your book. Answers are in the speaker notes.</a:t>
             </a:r>
           </a:p>
         </p:txBody>
